--- a/docs/MaskGuard_Round1_Submission.pptx
+++ b/docs/MaskGuard_Round1_Submission.pptx
@@ -1554,16 +1554,6 @@
               </a:rPr>
               <a:t>12 Oct 2026</a:t>
             </a:r>
-            <a:r>
-              <a:rPr lang="en-US" sz="1800" dirty="0">
-                <a:solidFill>
-                  <a:srgbClr val="FFFFFF"/>
-                </a:solidFill>
-                <a:latin typeface="Calibri" pitchFamily="34" charset="0"/>
-                <a:ea typeface="Calibri" pitchFamily="34" charset="-122"/>
-                <a:cs typeface="Calibri" pitchFamily="34" charset="-120"/>
-              </a:rPr>
-            </a:r>
             <a:endParaRPr lang="en-US" sz="1800" dirty="0"/>
           </a:p>
         </p:txBody>
@@ -1619,7 +1609,7 @@
                 <a:ea typeface="Calibri" pitchFamily="34" charset="-122"/>
                 <a:cs typeface="Calibri" pitchFamily="34" charset="-120"/>
               </a:rPr>
-              <a:t xml:space="preserve">  ·  query-time PII masking gateway for SQLite &amp; PostgreSQL</a:t>
+              <a:t>  ·  query-time PII masking gateway for SQLite &amp; PostgreSQL</a:t>
             </a:r>
             <a:endParaRPr lang="en-US" sz="1600" dirty="0"/>
           </a:p>
@@ -1862,7 +1852,7 @@
                 <a:ea typeface="Calibri" pitchFamily="34" charset="-122"/>
                 <a:cs typeface="Calibri" pitchFamily="34" charset="-120"/>
               </a:rPr>
-              <a:t xml:space="preserve">Who is affected: </a:t>
+              <a:t>Who is affected: </a:t>
             </a:r>
             <a:r>
               <a:rPr lang="en-US" sz="1200" dirty="0">
@@ -1897,7 +1887,7 @@
                 <a:ea typeface="Calibri" pitchFamily="34" charset="-122"/>
                 <a:cs typeface="Calibri" pitchFamily="34" charset="-120"/>
               </a:rPr>
-              <a:t xml:space="preserve">Need: </a:t>
+              <a:t>Need: </a:t>
             </a:r>
             <a:r>
               <a:rPr lang="en-US" sz="1200" dirty="0">
@@ -1972,8 +1962,9 @@
             <a:ext cx="2651760" cy="1097280"/>
           </a:xfrm>
           <a:prstGeom prst="roundRect">
-            <a:avLst/>
-            <a:gd name="adj" fmla="val 8000"/>
+            <a:avLst>
+              <a:gd name="adj" fmla="val 8000"/>
+            </a:avLst>
           </a:prstGeom>
           <a:solidFill>
             <a:srgbClr val="F5F5F5"/>
@@ -2044,8 +2035,9 @@
             <a:ext cx="2651760" cy="1097280"/>
           </a:xfrm>
           <a:prstGeom prst="roundRect">
-            <a:avLst/>
-            <a:gd name="adj" fmla="val 8000"/>
+            <a:avLst>
+              <a:gd name="adj" fmla="val 8000"/>
+            </a:avLst>
           </a:prstGeom>
           <a:solidFill>
             <a:srgbClr val="F5F5F5"/>
@@ -2116,8 +2108,9 @@
             <a:ext cx="2651760" cy="1097280"/>
           </a:xfrm>
           <a:prstGeom prst="roundRect">
-            <a:avLst/>
-            <a:gd name="adj" fmla="val 8000"/>
+            <a:avLst>
+              <a:gd name="adj" fmla="val 8000"/>
+            </a:avLst>
           </a:prstGeom>
           <a:solidFill>
             <a:srgbClr val="F5F5F5"/>
@@ -2216,7 +2209,7 @@
                 <a:ea typeface="Calibri" pitchFamily="34" charset="-122"/>
                 <a:cs typeface="Calibri" pitchFamily="34" charset="-120"/>
               </a:rPr>
-              <a:t xml:space="preserve">Target users: </a:t>
+              <a:t>Target users: </a:t>
             </a:r>
             <a:r>
               <a:rPr lang="en-US" sz="1100" dirty="0">
@@ -2468,7 +2461,7 @@
                 <a:ea typeface="Calibri" pitchFamily="34" charset="-122"/>
                 <a:cs typeface="Calibri" pitchFamily="34" charset="-120"/>
               </a:rPr>
-              <a:t xml:space="preserve">What: </a:t>
+              <a:t>What: </a:t>
             </a:r>
             <a:r>
               <a:rPr lang="en-US" sz="1150" dirty="0">
@@ -2503,7 +2496,7 @@
                 <a:ea typeface="Calibri" pitchFamily="34" charset="-122"/>
                 <a:cs typeface="Calibri" pitchFamily="34" charset="-120"/>
               </a:rPr>
-              <a:t xml:space="preserve">How: </a:t>
+              <a:t>How: </a:t>
             </a:r>
             <a:r>
               <a:rPr lang="en-US" sz="1150" dirty="0">
@@ -2538,7 +2531,7 @@
                 <a:ea typeface="Calibri" pitchFamily="34" charset="-122"/>
                 <a:cs typeface="Calibri" pitchFamily="34" charset="-120"/>
               </a:rPr>
-              <a:t xml:space="preserve">Roles: </a:t>
+              <a:t>Roles: </a:t>
             </a:r>
             <a:r>
               <a:rPr lang="en-US" sz="1150" dirty="0">
@@ -2573,7 +2566,7 @@
                 <a:ea typeface="Calibri" pitchFamily="34" charset="-122"/>
                 <a:cs typeface="Calibri" pitchFamily="34" charset="-120"/>
               </a:rPr>
-              <a:t xml:space="preserve">Features: </a:t>
+              <a:t>Features: </a:t>
             </a:r>
             <a:r>
               <a:rPr lang="en-US" sz="1150" dirty="0">
@@ -2608,7 +2601,7 @@
                 <a:ea typeface="Calibri" pitchFamily="34" charset="-122"/>
                 <a:cs typeface="Calibri" pitchFamily="34" charset="-120"/>
               </a:rPr>
-              <a:t xml:space="preserve">Why unique: </a:t>
+              <a:t>Why unique: </a:t>
             </a:r>
             <a:r>
               <a:rPr lang="en-US" sz="1150" dirty="0">
@@ -2712,8 +2705,9 @@
             <a:ext cx="3977640" cy="1417320"/>
           </a:xfrm>
           <a:prstGeom prst="roundRect">
-            <a:avLst/>
-            <a:gd name="adj" fmla="val 8000"/>
+            <a:avLst>
+              <a:gd name="adj" fmla="val 8000"/>
+            </a:avLst>
           </a:prstGeom>
           <a:solidFill>
             <a:srgbClr val="F5F5F5"/>
@@ -2820,7 +2814,7 @@
                 <a:latin typeface="Courier New" pitchFamily="49" charset="0"/>
                 <a:cs typeface="Courier New" pitchFamily="49" charset="0"/>
               </a:rPr>
-              <a:t xml:space="preserve">  SELECT id, mg_email(email) AS email,</a:t>
+              <a:t>  SELECT id, mg_email(email) AS email,</a:t>
             </a:r>
             <a:endParaRPr lang="en-US" sz="950" dirty="0"/>
           </a:p>
@@ -2839,7 +2833,7 @@
                 <a:latin typeface="Courier New" pitchFamily="49" charset="0"/>
                 <a:cs typeface="Courier New" pitchFamily="49" charset="0"/>
               </a:rPr>
-              <a:t xml:space="preserve">    mg_partial(ssn, 0, 4) AS ssn, ...</a:t>
+              <a:t>    mg_partial(ssn, 0, 4) AS ssn, ...</a:t>
             </a:r>
             <a:endParaRPr lang="en-US" sz="950" dirty="0"/>
           </a:p>
@@ -2858,7 +2852,7 @@
                 <a:latin typeface="Courier New" pitchFamily="49" charset="0"/>
                 <a:cs typeface="Courier New" pitchFamily="49" charset="0"/>
               </a:rPr>
-              <a:t xml:space="preserve">  FROM main.users) AS users LIMIT 100</a:t>
+              <a:t>  FROM main.users) AS users LIMIT 100</a:t>
             </a:r>
             <a:endParaRPr lang="en-US" sz="950" dirty="0"/>
           </a:p>
@@ -3053,7 +3047,7 @@
                 <a:ea typeface="Calibri" pitchFamily="34" charset="-122"/>
                 <a:cs typeface="Calibri" pitchFamily="34" charset="-120"/>
               </a:rPr>
-              <a:t xml:space="preserve">Connect: </a:t>
+              <a:t>Connect: </a:t>
             </a:r>
             <a:r>
               <a:rPr lang="en-US" sz="1100" dirty="0">
@@ -3088,7 +3082,7 @@
                 <a:ea typeface="Calibri" pitchFamily="34" charset="-122"/>
                 <a:cs typeface="Calibri" pitchFamily="34" charset="-120"/>
               </a:rPr>
-              <a:t xml:space="preserve">Scan: </a:t>
+              <a:t>Scan: </a:t>
             </a:r>
             <a:r>
               <a:rPr lang="en-US" sz="1100" dirty="0">
@@ -3123,7 +3117,7 @@
                 <a:ea typeface="Calibri" pitchFamily="34" charset="-122"/>
                 <a:cs typeface="Calibri" pitchFamily="34" charset="-120"/>
               </a:rPr>
-              <a:t xml:space="preserve">Authenticate: </a:t>
+              <a:t>Authenticate: </a:t>
             </a:r>
             <a:r>
               <a:rPr lang="en-US" sz="1100" dirty="0">
@@ -3158,7 +3152,7 @@
                 <a:ea typeface="Calibri" pitchFamily="34" charset="-122"/>
                 <a:cs typeface="Calibri" pitchFamily="34" charset="-120"/>
               </a:rPr>
-              <a:t xml:space="preserve">Rewrite: </a:t>
+              <a:t>Rewrite: </a:t>
             </a:r>
             <a:r>
               <a:rPr lang="en-US" sz="1100" dirty="0">
@@ -3193,7 +3187,7 @@
                 <a:ea typeface="Calibri" pitchFamily="34" charset="-122"/>
                 <a:cs typeface="Calibri" pitchFamily="34" charset="-120"/>
               </a:rPr>
-              <a:t xml:space="preserve">Execute: </a:t>
+              <a:t>Execute: </a:t>
             </a:r>
             <a:r>
               <a:rPr lang="en-US" sz="1100" dirty="0">
@@ -3228,7 +3222,7 @@
                 <a:ea typeface="Calibri" pitchFamily="34" charset="-122"/>
                 <a:cs typeface="Calibri" pitchFamily="34" charset="-120"/>
               </a:rPr>
-              <a:t xml:space="preserve">Audit: </a:t>
+              <a:t>Audit: </a:t>
             </a:r>
             <a:r>
               <a:rPr lang="en-US" sz="1100" dirty="0">
@@ -3303,8 +3297,9 @@
             <a:ext cx="2103120" cy="475488"/>
           </a:xfrm>
           <a:prstGeom prst="roundRect">
-            <a:avLst/>
-            <a:gd name="adj" fmla="val 8000"/>
+            <a:avLst>
+              <a:gd name="adj" fmla="val 8000"/>
+            </a:avLst>
           </a:prstGeom>
           <a:solidFill>
             <a:srgbClr val="E8EEF8"/>
@@ -3377,8 +3372,9 @@
             <a:ext cx="2103120" cy="420624"/>
           </a:xfrm>
           <a:prstGeom prst="roundRect">
-            <a:avLst/>
-            <a:gd name="adj" fmla="val 8000"/>
+            <a:avLst>
+              <a:gd name="adj" fmla="val 8000"/>
+            </a:avLst>
           </a:prstGeom>
           <a:solidFill>
             <a:srgbClr val="E8EEF8"/>
@@ -3451,8 +3447,9 @@
             <a:ext cx="1508760" cy="420624"/>
           </a:xfrm>
           <a:prstGeom prst="roundRect">
-            <a:avLst/>
-            <a:gd name="adj" fmla="val 8000"/>
+            <a:avLst>
+              <a:gd name="adj" fmla="val 8000"/>
+            </a:avLst>
           </a:prstGeom>
           <a:solidFill>
             <a:srgbClr val="E8EEF8"/>
@@ -3525,8 +3522,9 @@
             <a:ext cx="2103120" cy="713232"/>
           </a:xfrm>
           <a:prstGeom prst="roundRect">
-            <a:avLst/>
-            <a:gd name="adj" fmla="val 8000"/>
+            <a:avLst>
+              <a:gd name="adj" fmla="val 8000"/>
+            </a:avLst>
           </a:prstGeom>
           <a:solidFill>
             <a:srgbClr val="1F4788"/>
@@ -3597,8 +3595,9 @@
             <a:ext cx="1508760" cy="329184"/>
           </a:xfrm>
           <a:prstGeom prst="roundRect">
-            <a:avLst/>
-            <a:gd name="adj" fmla="val 8000"/>
+            <a:avLst>
+              <a:gd name="adj" fmla="val 8000"/>
+            </a:avLst>
           </a:prstGeom>
           <a:solidFill>
             <a:srgbClr val="E8EEF8"/>
@@ -3648,8 +3647,9 @@
             <a:ext cx="1508760" cy="1024128"/>
           </a:xfrm>
           <a:prstGeom prst="roundRect">
-            <a:avLst/>
-            <a:gd name="adj" fmla="val 8000"/>
+            <a:avLst>
+              <a:gd name="adj" fmla="val 8000"/>
+            </a:avLst>
           </a:prstGeom>
           <a:solidFill>
             <a:srgbClr val="E8EEF8"/>
@@ -3722,8 +3722,9 @@
             <a:ext cx="2103120" cy="493776"/>
           </a:xfrm>
           <a:prstGeom prst="roundRect">
-            <a:avLst/>
-            <a:gd name="adj" fmla="val 8000"/>
+            <a:avLst>
+              <a:gd name="adj" fmla="val 8000"/>
+            </a:avLst>
           </a:prstGeom>
           <a:solidFill>
             <a:srgbClr val="E8EEF8"/>
@@ -4169,7 +4170,7 @@
                 <a:ea typeface="Calibri" pitchFamily="34" charset="-122"/>
                 <a:cs typeface="Calibri" pitchFamily="34" charset="-120"/>
               </a:rPr>
-              <a:t xml:space="preserve">Problem: </a:t>
+              <a:t>Problem: </a:t>
             </a:r>
             <a:r>
               <a:rPr lang="en-US" sz="1100" dirty="0">
@@ -4200,7 +4201,7 @@
                 <a:ea typeface="Calibri" pitchFamily="34" charset="-122"/>
                 <a:cs typeface="Calibri" pitchFamily="34" charset="-120"/>
               </a:rPr>
-              <a:t xml:space="preserve">Mitigation: </a:t>
+              <a:t>Mitigation: </a:t>
             </a:r>
             <a:r>
               <a:rPr lang="en-US" sz="1100" dirty="0">
@@ -4332,7 +4333,7 @@
                 <a:ea typeface="Calibri" pitchFamily="34" charset="-122"/>
                 <a:cs typeface="Calibri" pitchFamily="34" charset="-120"/>
               </a:rPr>
-              <a:t xml:space="preserve">Problem: </a:t>
+              <a:t>Problem: </a:t>
             </a:r>
             <a:r>
               <a:rPr lang="en-US" sz="1100" dirty="0">
@@ -4363,7 +4364,7 @@
                 <a:ea typeface="Calibri" pitchFamily="34" charset="-122"/>
                 <a:cs typeface="Calibri" pitchFamily="34" charset="-120"/>
               </a:rPr>
-              <a:t xml:space="preserve">Mitigation: </a:t>
+              <a:t>Mitigation: </a:t>
             </a:r>
             <a:r>
               <a:rPr lang="en-US" sz="1100" dirty="0">
@@ -4495,7 +4496,7 @@
                 <a:ea typeface="Calibri" pitchFamily="34" charset="-122"/>
                 <a:cs typeface="Calibri" pitchFamily="34" charset="-120"/>
               </a:rPr>
-              <a:t xml:space="preserve">Problem: </a:t>
+              <a:t>Problem: </a:t>
             </a:r>
             <a:r>
               <a:rPr lang="en-US" sz="1100" dirty="0">
@@ -4526,7 +4527,7 @@
                 <a:ea typeface="Calibri" pitchFamily="34" charset="-122"/>
                 <a:cs typeface="Calibri" pitchFamily="34" charset="-120"/>
               </a:rPr>
-              <a:t xml:space="preserve">Mitigation: </a:t>
+              <a:t>Mitigation: </a:t>
             </a:r>
             <a:r>
               <a:rPr lang="en-US" sz="1100" dirty="0">
@@ -4555,8 +4556,9 @@
             <a:ext cx="8229600" cy="585216"/>
           </a:xfrm>
           <a:prstGeom prst="roundRect">
-            <a:avLst/>
-            <a:gd name="adj" fmla="val 8000"/>
+            <a:avLst>
+              <a:gd name="adj" fmla="val 8000"/>
+            </a:avLst>
           </a:prstGeom>
           <a:solidFill>
             <a:srgbClr val="F5F5F5"/>
@@ -4586,7 +4588,7 @@
                 <a:ea typeface="Calibri" pitchFamily="34" charset="-122"/>
                 <a:cs typeface="Calibri" pitchFamily="34" charset="-120"/>
               </a:rPr>
-              <a:t xml:space="preserve">Known limits, stated up front: </a:t>
+              <a:t>Known limits, stated up front: </a:t>
             </a:r>
             <a:r>
               <a:rPr lang="en-US" sz="1050" dirty="0">
@@ -5086,8 +5088,9 @@
             <a:ext cx="1920240" cy="658368"/>
           </a:xfrm>
           <a:prstGeom prst="roundRect">
-            <a:avLst/>
-            <a:gd name="adj" fmla="val 8000"/>
+            <a:avLst>
+              <a:gd name="adj" fmla="val 8000"/>
+            </a:avLst>
           </a:prstGeom>
           <a:solidFill>
             <a:srgbClr val="F5F5F5"/>
@@ -5155,8 +5158,9 @@
             <a:ext cx="1920240" cy="658368"/>
           </a:xfrm>
           <a:prstGeom prst="roundRect">
-            <a:avLst/>
-            <a:gd name="adj" fmla="val 8000"/>
+            <a:avLst>
+              <a:gd name="adj" fmla="val 8000"/>
+            </a:avLst>
           </a:prstGeom>
           <a:solidFill>
             <a:srgbClr val="F5F5F5"/>
@@ -5224,8 +5228,9 @@
             <a:ext cx="1920240" cy="658368"/>
           </a:xfrm>
           <a:prstGeom prst="roundRect">
-            <a:avLst/>
-            <a:gd name="adj" fmla="val 8000"/>
+            <a:avLst>
+              <a:gd name="adj" fmla="val 8000"/>
+            </a:avLst>
           </a:prstGeom>
           <a:solidFill>
             <a:srgbClr val="F5F5F5"/>
@@ -5293,8 +5298,9 @@
             <a:ext cx="1920240" cy="658368"/>
           </a:xfrm>
           <a:prstGeom prst="roundRect">
-            <a:avLst/>
-            <a:gd name="adj" fmla="val 8000"/>
+            <a:avLst>
+              <a:gd name="adj" fmla="val 8000"/>
+            </a:avLst>
           </a:prstGeom>
           <a:solidFill>
             <a:srgbClr val="F5F5F5"/>
@@ -5440,7 +5446,7 @@
                 <a:ea typeface="Calibri" pitchFamily="34" charset="-122"/>
                 <a:cs typeface="Calibri" pitchFamily="34" charset="-120"/>
               </a:rPr>
-              <a:t xml:space="preserve">vs native dynamic masking: </a:t>
+              <a:t>vs native dynamic masking: </a:t>
             </a:r>
             <a:r>
               <a:rPr lang="en-US" sz="1150" dirty="0">
@@ -5475,7 +5481,7 @@
                 <a:ea typeface="Calibri" pitchFamily="34" charset="-122"/>
                 <a:cs typeface="Calibri" pitchFamily="34" charset="-120"/>
               </a:rPr>
-              <a:t xml:space="preserve">vs static masked copies: </a:t>
+              <a:t>vs static masked copies: </a:t>
             </a:r>
             <a:r>
               <a:rPr lang="en-US" sz="1150" dirty="0">
@@ -5510,7 +5516,7 @@
                 <a:ea typeface="Calibri" pitchFamily="34" charset="-122"/>
                 <a:cs typeface="Calibri" pitchFamily="34" charset="-120"/>
               </a:rPr>
-              <a:t xml:space="preserve">vs database-specific extensions: </a:t>
+              <a:t>vs database-specific extensions: </a:t>
             </a:r>
             <a:r>
               <a:rPr lang="en-US" sz="1150" dirty="0">
@@ -5545,7 +5551,7 @@
                 <a:ea typeface="Calibri" pitchFamily="34" charset="-122"/>
                 <a:cs typeface="Calibri" pitchFamily="34" charset="-120"/>
               </a:rPr>
-              <a:t xml:space="preserve">Measured cost: </a:t>
+              <a:t>Measured cost: </a:t>
             </a:r>
             <a:r>
               <a:rPr lang="en-US" sz="1150" dirty="0">
@@ -5984,8 +5990,9 @@
             <a:ext cx="3017520" cy="1060704"/>
           </a:xfrm>
           <a:prstGeom prst="roundRect">
-            <a:avLst/>
-            <a:gd name="adj" fmla="val 8000"/>
+            <a:avLst>
+              <a:gd name="adj" fmla="val 8000"/>
+            </a:avLst>
           </a:prstGeom>
           <a:solidFill>
             <a:srgbClr val="F5F5F5"/>
@@ -6015,7 +6022,7 @@
                 <a:ea typeface="Calibri" pitchFamily="34" charset="-122"/>
                 <a:cs typeface="Calibri" pitchFamily="34" charset="-120"/>
               </a:rPr>
-              <a:t xml:space="preserve">Run it: </a:t>
+              <a:t>Run it: </a:t>
             </a:r>
             <a:r>
               <a:rPr lang="en-US" sz="1000" dirty="0">
@@ -6065,7 +6072,7 @@
                 <a:ea typeface="Calibri" pitchFamily="34" charset="-122"/>
                 <a:cs typeface="Calibri" pitchFamily="34" charset="-120"/>
               </a:rPr>
-              <a:t xml:space="preserve">Demo video: </a:t>
+              <a:t>Demo video: </a:t>
             </a:r>
             <a:r>
               <a:rPr lang="en-US" sz="1050" dirty="0">

--- a/docs/MaskGuard_Round1_Submission.pptx
+++ b/docs/MaskGuard_Round1_Submission.pptx
@@ -1609,7 +1609,7 @@
                 <a:ea typeface="Calibri" pitchFamily="34" charset="-122"/>
                 <a:cs typeface="Calibri" pitchFamily="34" charset="-120"/>
               </a:rPr>
-              <a:t>  ·  query-time PII masking gateway for SQLite &amp; PostgreSQL</a:t>
+              <a:t>  ·  AI-powered PII discovery and leak-proof masking for any database</a:t>
             </a:r>
             <a:endParaRPr lang="en-US" sz="1600" dirty="0"/>
           </a:p>
@@ -1769,7 +1769,7 @@
         <p:spPr>
           <a:xfrm>
             <a:off x="548640" y="1188720"/>
-            <a:ext cx="8092440" cy="1536192"/>
+            <a:ext cx="8092440" cy="1554480"/>
           </a:xfrm>
           <a:prstGeom prst="rect">
             <a:avLst/>
@@ -1787,7 +1787,7 @@
           <a:p>
             <a:pPr algn="l" marL="228600" indent="-228600">
               <a:spcAft>
-                <a:spcPts val="400"/>
+                <a:spcPts val="300"/>
               </a:spcAft>
               <a:buClr>
                 <a:srgbClr val="1F4788"/>
@@ -1796,7 +1796,7 @@
               <a:buChar char="•"/>
             </a:pPr>
             <a:r>
-              <a:rPr lang="en-US" sz="1200" dirty="0">
+              <a:rPr lang="en-US" sz="1150" dirty="0">
                 <a:solidFill>
                   <a:srgbClr val="2D2D2D"/>
                 </a:solidFill>
@@ -1804,14 +1804,14 @@
                 <a:ea typeface="Calibri" pitchFamily="34" charset="-122"/>
                 <a:cs typeface="Calibri" pitchFamily="34" charset="-120"/>
               </a:rPr>
-              <a:t>Banks and fintechs give support, analytics and ops staff SQL access to tables full of card numbers, SSN/Aadhaar, PAN and balances, with no column-level control over what each role sees.</a:t>
-            </a:r>
-            <a:endParaRPr lang="en-US" sz="1200" dirty="0"/>
+              <a:t>Banks, NBFCs and fintechs give support, analytics and ops staff SQL access to tables full of card numbers, Aadhaar, PAN and balances, with no per-role control over what each person sees.</a:t>
+            </a:r>
+            <a:endParaRPr lang="en-US" sz="1150" dirty="0"/>
           </a:p>
           <a:p>
             <a:pPr algn="l" marL="228600" indent="-228600">
               <a:spcAft>
-                <a:spcPts val="400"/>
+                <a:spcPts val="300"/>
               </a:spcAft>
               <a:buClr>
                 <a:srgbClr val="1F4788"/>
@@ -1820,7 +1820,7 @@
               <a:buChar char="•"/>
             </a:pPr>
             <a:r>
-              <a:rPr lang="en-US" sz="1200" dirty="0">
+              <a:rPr lang="en-US" sz="1150" b="1" dirty="0">
                 <a:solidFill>
                   <a:srgbClr val="2D2D2D"/>
                 </a:solidFill>
@@ -1828,14 +1828,25 @@
                 <a:ea typeface="Calibri" pitchFamily="34" charset="-122"/>
                 <a:cs typeface="Calibri" pitchFamily="34" charset="-120"/>
               </a:rPr>
-              <a:t>Masked copies go stale and multiply the data. Native dynamic masking is a display filter: WHERE, ORDER BY and aggregates still run on real values, so values can be inferred.</a:t>
-            </a:r>
-            <a:endParaRPr lang="en-US" sz="1200" dirty="0"/>
+              <a:t>Sensitive columns are hard to find: </a:t>
+            </a:r>
+            <a:r>
+              <a:rPr lang="en-US" sz="1150" dirty="0">
+                <a:solidFill>
+                  <a:srgbClr val="2D2D2D"/>
+                </a:solidFill>
+                <a:latin typeface="Calibri" pitchFamily="34" charset="0"/>
+                <a:ea typeface="Calibri" pitchFamily="34" charset="-122"/>
+                <a:cs typeface="Calibri" pitchFamily="34" charset="-120"/>
+              </a:rPr>
+              <a:t>headers lie (contact, ref_no) and regexes confuse order numbers with Aadhaar, so PII slips through unprotected.</a:t>
+            </a:r>
+            <a:endParaRPr lang="en-US" sz="1150" dirty="0"/>
           </a:p>
           <a:p>
             <a:pPr algn="l" marL="228600" indent="-228600">
               <a:spcAft>
-                <a:spcPts val="400"/>
+                <a:spcPts val="300"/>
               </a:spcAft>
               <a:buClr>
                 <a:srgbClr val="1F4788"/>
@@ -1844,7 +1855,7 @@
               <a:buChar char="•"/>
             </a:pPr>
             <a:r>
-              <a:rPr lang="en-US" sz="1200" b="1" dirty="0">
+              <a:rPr lang="en-US" sz="1150" b="1" dirty="0">
                 <a:solidFill>
                   <a:srgbClr val="2D2D2D"/>
                 </a:solidFill>
@@ -1852,10 +1863,10 @@
                 <a:ea typeface="Calibri" pitchFamily="34" charset="-122"/>
                 <a:cs typeface="Calibri" pitchFamily="34" charset="-120"/>
               </a:rPr>
-              <a:t>Who is affected: </a:t>
-            </a:r>
-            <a:r>
-              <a:rPr lang="en-US" sz="1200" dirty="0">
+              <a:t>Masking leaks: </a:t>
+            </a:r>
+            <a:r>
+              <a:rPr lang="en-US" sz="1150" dirty="0">
                 <a:solidFill>
                   <a:srgbClr val="2D2D2D"/>
                 </a:solidFill>
@@ -1863,14 +1874,14 @@
                 <a:ea typeface="Calibri" pitchFamily="34" charset="-122"/>
                 <a:cs typeface="Calibri" pitchFamily="34" charset="-120"/>
               </a:rPr>
-              <a:t>customers whose PII is exposed; the institution (breach costs, DPDP and GDPR penalties); and internal teams who still need the data to work.</a:t>
-            </a:r>
-            <a:endParaRPr lang="en-US" sz="1200" dirty="0"/>
+              <a:t>native masking is a display filter, so WHERE, ORDER BY and aggregates still run on real values. An IEEE Access 2025 survey names masking's weakness as “limited protection against sophisticated attacks”.</a:t>
+            </a:r>
+            <a:endParaRPr lang="en-US" sz="1150" dirty="0"/>
           </a:p>
           <a:p>
             <a:pPr algn="l" marL="228600" indent="-228600">
               <a:spcAft>
-                <a:spcPts val="400"/>
+                <a:spcPts val="0"/>
               </a:spcAft>
               <a:buClr>
                 <a:srgbClr val="1F4788"/>
@@ -1879,7 +1890,7 @@
               <a:buChar char="•"/>
             </a:pPr>
             <a:r>
-              <a:rPr lang="en-US" sz="1200" b="1" dirty="0">
+              <a:rPr lang="en-US" sz="1150" b="1" dirty="0">
                 <a:solidFill>
                   <a:srgbClr val="2D2D2D"/>
                 </a:solidFill>
@@ -1887,10 +1898,10 @@
                 <a:ea typeface="Calibri" pitchFamily="34" charset="-122"/>
                 <a:cs typeface="Calibri" pitchFamily="34" charset="-120"/>
               </a:rPr>
-              <a:t>Need: </a:t>
-            </a:r>
-            <a:r>
-              <a:rPr lang="en-US" sz="1200" dirty="0">
+              <a:t>Who is affected: </a:t>
+            </a:r>
+            <a:r>
+              <a:rPr lang="en-US" sz="1150" dirty="0">
                 <a:solidFill>
                   <a:srgbClr val="2D2D2D"/>
                 </a:solidFill>
@@ -1898,9 +1909,9 @@
                 <a:ea typeface="Calibri" pitchFamily="34" charset="-122"/>
                 <a:cs typeface="Calibri" pitchFamily="34" charset="-120"/>
               </a:rPr>
-              <a:t>find PII automatically and mask it per role at query time, on any database, without changing stored data.</a:t>
-            </a:r>
-            <a:endParaRPr lang="en-US" sz="1200" dirty="0"/>
+              <a:t>customers (identity theft), institutions (breach costs, DPDP penalties) and teams who need the data.</a:t>
+            </a:r>
+            <a:endParaRPr lang="en-US" sz="1150" dirty="0"/>
           </a:p>
         </p:txBody>
       </p:sp>
@@ -1912,7 +1923,7 @@
         </p:nvSpPr>
         <p:spPr>
           <a:xfrm>
-            <a:off x="457200" y="2770632"/>
+            <a:off x="457200" y="2788920"/>
             <a:ext cx="8229600" cy="320040"/>
           </a:xfrm>
           <a:prstGeom prst="rect">
@@ -1958,7 +1969,7 @@
         </p:nvSpPr>
         <p:spPr>
           <a:xfrm>
-            <a:off x="457200" y="3127248"/>
+            <a:off x="457200" y="3145536"/>
             <a:ext cx="2651760" cy="1097280"/>
           </a:xfrm>
           <a:prstGeom prst="roundRect">
@@ -2031,7 +2042,7 @@
         </p:nvSpPr>
         <p:spPr>
           <a:xfrm>
-            <a:off x="3246120" y="3127248"/>
+            <a:off x="3246120" y="3145536"/>
             <a:ext cx="2651760" cy="1097280"/>
           </a:xfrm>
           <a:prstGeom prst="roundRect">
@@ -2104,7 +2115,7 @@
         </p:nvSpPr>
         <p:spPr>
           <a:xfrm>
-            <a:off x="6035040" y="3127248"/>
+            <a:off x="6035040" y="3145536"/>
             <a:ext cx="2651760" cy="1097280"/>
           </a:xfrm>
           <a:prstGeom prst="roundRect">
@@ -2177,7 +2188,7 @@
         </p:nvSpPr>
         <p:spPr>
           <a:xfrm>
-            <a:off x="457200" y="4297680"/>
+            <a:off x="457200" y="4315968"/>
             <a:ext cx="8229600" cy="256032"/>
           </a:xfrm>
           <a:prstGeom prst="rect">
@@ -2220,7 +2231,7 @@
                 <a:ea typeface="Calibri" pitchFamily="34" charset="-122"/>
                 <a:cs typeface="Calibri" pitchFamily="34" charset="-120"/>
               </a:rPr>
-              <a:t>banks, NBFCs, insurers and fintechs; their DBAs, compliance and data teams. Competitive landscape: see USP slide.</a:t>
+              <a:t>banks, NBFCs, insurers, fintechs and government data teams handling citizen records under DPDP.</a:t>
             </a:r>
             <a:endParaRPr lang="en-US" sz="1100" dirty="0"/>
           </a:p>
@@ -2235,7 +2246,7 @@
         <p:spPr>
           <a:xfrm>
             <a:off x="457200" y="4572000"/>
-            <a:ext cx="8229600" cy="256032"/>
+            <a:ext cx="8229600" cy="274320"/>
           </a:xfrm>
           <a:prstGeom prst="rect">
             <a:avLst/>
@@ -2266,7 +2277,7 @@
                 <a:ea typeface="Calibri" pitchFamily="34" charset="-122"/>
                 <a:cs typeface="Calibri" pitchFamily="34" charset="-120"/>
               </a:rPr>
-              <a:t>Sources: IBM Cost of a Data Breach Report 2026 (India); DPDP Rules 2025 (Rule 6) and PIB overview; The Business Research Company, Research and Markets.</a:t>
+              <a:t>Sources: IBM Cost of a Data Breach 2026 (India); DPDP Rules 2025 (Rule 6), PIB; The Business Research Company; Research and Markets; Prabowo et al., IEEE Access 13 (2025).</a:t>
             </a:r>
             <a:endParaRPr lang="en-US" sz="900" dirty="0"/>
           </a:p>
@@ -2426,7 +2437,7 @@
         <p:spPr>
           <a:xfrm>
             <a:off x="457200" y="1216152"/>
-            <a:ext cx="4069080" cy="3611880"/>
+            <a:ext cx="4114800" cy="3630168"/>
           </a:xfrm>
           <a:prstGeom prst="rect">
             <a:avLst/>
@@ -2444,7 +2455,7 @@
           <a:p>
             <a:pPr algn="l" marL="228600" indent="-228600">
               <a:spcAft>
-                <a:spcPts val="500"/>
+                <a:spcPts val="400"/>
               </a:spcAft>
               <a:buClr>
                 <a:srgbClr val="1F4788"/>
@@ -2453,7 +2464,7 @@
               <a:buChar char="•"/>
             </a:pPr>
             <a:r>
-              <a:rPr lang="en-US" sz="1150" b="1" dirty="0">
+              <a:rPr lang="en-US" sz="1050" b="1" dirty="0">
                 <a:solidFill>
                   <a:srgbClr val="1F4788"/>
                 </a:solidFill>
@@ -2461,10 +2472,10 @@
                 <a:ea typeface="Calibri" pitchFamily="34" charset="-122"/>
                 <a:cs typeface="Calibri" pitchFamily="34" charset="-120"/>
               </a:rPr>
-              <a:t>What: </a:t>
-            </a:r>
-            <a:r>
-              <a:rPr lang="en-US" sz="1150" dirty="0">
+              <a:t>MaskGuard </a:t>
+            </a:r>
+            <a:r>
+              <a:rPr lang="en-US" sz="1050" dirty="0">
                 <a:solidFill>
                   <a:srgbClr val="2D2D2D"/>
                 </a:solidFill>
@@ -2472,14 +2483,14 @@
                 <a:ea typeface="Calibri" pitchFamily="34" charset="-122"/>
                 <a:cs typeface="Calibri" pitchFamily="34" charset="-120"/>
               </a:rPr>
-              <a:t>MaskGuard, a gateway between users and the database that finds PII and masks it per role at query time. Stored data never changes.</a:t>
-            </a:r>
-            <a:endParaRPr lang="en-US" sz="1150" dirty="0"/>
+              <a:t>is a privacy gateway in front of any SQL database. It finds PII with AI and masks it per role at query time; stored data never changes.</a:t>
+            </a:r>
+            <a:endParaRPr lang="en-US" sz="1050" dirty="0"/>
           </a:p>
           <a:p>
             <a:pPr algn="l" marL="228600" indent="-228600">
               <a:spcAft>
-                <a:spcPts val="500"/>
+                <a:spcPts val="400"/>
               </a:spcAft>
               <a:buClr>
                 <a:srgbClr val="1F4788"/>
@@ -2488,7 +2499,7 @@
               <a:buChar char="•"/>
             </a:pPr>
             <a:r>
-              <a:rPr lang="en-US" sz="1150" b="1" dirty="0">
+              <a:rPr lang="en-US" sz="1050" b="1" dirty="0">
                 <a:solidFill>
                   <a:srgbClr val="1F4788"/>
                 </a:solidFill>
@@ -2496,10 +2507,10 @@
                 <a:ea typeface="Calibri" pitchFamily="34" charset="-122"/>
                 <a:cs typeface="Calibri" pitchFamily="34" charset="-120"/>
               </a:rPr>
-              <a:t>How: </a:t>
-            </a:r>
-            <a:r>
-              <a:rPr lang="en-US" sz="1150" dirty="0">
+              <a:t>AI PII discovery: </a:t>
+            </a:r>
+            <a:r>
+              <a:rPr lang="en-US" sz="1050" dirty="0">
                 <a:solidFill>
                   <a:srgbClr val="2D2D2D"/>
                 </a:solidFill>
@@ -2507,14 +2518,14 @@
                 <a:ea typeface="Calibri" pitchFamily="34" charset="-122"/>
                 <a:cs typeface="Calibri" pitchFamily="34" charset="-120"/>
               </a:rPr>
-              <a:t>every table in a query is swapped for a masked derived table, so aliases, *, CTEs, joins, WHERE, ORDER BY and aggregates only ever see masked values.</a:t>
-            </a:r>
-            <a:endParaRPr lang="en-US" sz="1150" dirty="0"/>
+              <a:t>LightGBM + checksum validators find 20 PII types (Aadhaar, PAN, GSTIN, UPI, IFSC…) even behind misleading column names.</a:t>
+            </a:r>
+            <a:endParaRPr lang="en-US" sz="1050" dirty="0"/>
           </a:p>
           <a:p>
             <a:pPr algn="l" marL="228600" indent="-228600">
               <a:spcAft>
-                <a:spcPts val="500"/>
+                <a:spcPts val="400"/>
               </a:spcAft>
               <a:buClr>
                 <a:srgbClr val="1F4788"/>
@@ -2523,7 +2534,7 @@
               <a:buChar char="•"/>
             </a:pPr>
             <a:r>
-              <a:rPr lang="en-US" sz="1150" b="1" dirty="0">
+              <a:rPr lang="en-US" sz="1050" b="1" dirty="0">
                 <a:solidFill>
                   <a:srgbClr val="1F4788"/>
                 </a:solidFill>
@@ -2531,10 +2542,10 @@
                 <a:ea typeface="Calibri" pitchFamily="34" charset="-122"/>
                 <a:cs typeface="Calibri" pitchFamily="34" charset="-120"/>
               </a:rPr>
-              <a:t>Roles: </a:t>
-            </a:r>
-            <a:r>
-              <a:rPr lang="en-US" sz="1150" dirty="0">
+              <a:t>Leak-proof masking: </a:t>
+            </a:r>
+            <a:r>
+              <a:rPr lang="en-US" sz="1050" dirty="0">
                 <a:solidFill>
                   <a:srgbClr val="2D2D2D"/>
                 </a:solidFill>
@@ -2542,14 +2553,14 @@
                 <a:ea typeface="Calibri" pitchFamily="34" charset="-122"/>
                 <a:cs typeface="Calibri" pitchFamily="34" charset="-120"/>
               </a:rPr>
-              <a:t>Admin sees everything · Support gets partial masks (4111-XXXX-XXXX-1111) · Analyst gets REDACTED or keyed-HMAC tokens.</a:t>
-            </a:r>
-            <a:endParaRPr lang="en-US" sz="1150" dirty="0"/>
+              <a:t>each table is rewritten into a masked view inside the query. Admin sees all · Support 4111-XXXX-XXXX-1111 · Analyst redacted or keyed tokens.</a:t>
+            </a:r>
+            <a:endParaRPr lang="en-US" sz="1050" dirty="0"/>
           </a:p>
           <a:p>
             <a:pPr algn="l" marL="228600" indent="-228600">
               <a:spcAft>
-                <a:spcPts val="500"/>
+                <a:spcPts val="400"/>
               </a:spcAft>
               <a:buClr>
                 <a:srgbClr val="1F4788"/>
@@ -2558,7 +2569,7 @@
               <a:buChar char="•"/>
             </a:pPr>
             <a:r>
-              <a:rPr lang="en-US" sz="1150" b="1" dirty="0">
+              <a:rPr lang="en-US" sz="1050" b="1" dirty="0">
                 <a:solidFill>
                   <a:srgbClr val="1F4788"/>
                 </a:solidFill>
@@ -2566,10 +2577,10 @@
                 <a:ea typeface="Calibri" pitchFamily="34" charset="-122"/>
                 <a:cs typeface="Calibri" pitchFamily="34" charset="-120"/>
               </a:rPr>
-              <a:t>Features: </a:t>
-            </a:r>
-            <a:r>
-              <a:rPr lang="en-US" sz="1150" dirty="0">
+              <a:t>Insider-threat engine: </a:t>
+            </a:r>
+            <a:r>
+              <a:rPr lang="en-US" sz="1050" dirty="0">
                 <a:solidFill>
                   <a:srgbClr val="2D2D2D"/>
                 </a:solidFill>
@@ -2577,14 +2588,14 @@
                 <a:ea typeface="Calibri" pitchFamily="34" charset="-122"/>
                 <a:cs typeface="Calibri" pitchFamily="34" charset="-120"/>
               </a:rPr>
-              <a:t>auto-scanner with background rescans, YAML policy, SQLite + PostgreSQL, read-only execution, statement firewall, small-group suppression, hash-chained audit log; dashboard, REST API and CLI.</a:t>
-            </a:r>
-            <a:endParaRPr lang="en-US" sz="1150" dirty="0"/>
+              <a:t>ML anomaly scoring on the query stream blocks enumeration and probing.</a:t>
+            </a:r>
+            <a:endParaRPr lang="en-US" sz="1050" dirty="0"/>
           </a:p>
           <a:p>
             <a:pPr algn="l" marL="228600" indent="-228600">
               <a:spcAft>
-                <a:spcPts val="500"/>
+                <a:spcPts val="400"/>
               </a:spcAft>
               <a:buClr>
                 <a:srgbClr val="1F4788"/>
@@ -2593,7 +2604,7 @@
               <a:buChar char="•"/>
             </a:pPr>
             <a:r>
-              <a:rPr lang="en-US" sz="1150" b="1" dirty="0">
+              <a:rPr lang="en-US" sz="1050" b="1" dirty="0">
                 <a:solidFill>
                   <a:srgbClr val="1F4788"/>
                 </a:solidFill>
@@ -2601,10 +2612,10 @@
                 <a:ea typeface="Calibri" pitchFamily="34" charset="-122"/>
                 <a:cs typeface="Calibri" pitchFamily="34" charset="-120"/>
               </a:rPr>
-              <a:t>Why unique: </a:t>
-            </a:r>
-            <a:r>
-              <a:rPr lang="en-US" sz="1150" dirty="0">
+              <a:t>Privacy-safe analytics: </a:t>
+            </a:r>
+            <a:r>
+              <a:rPr lang="en-US" sz="1050" dirty="0">
                 <a:solidFill>
                   <a:srgbClr val="2D2D2D"/>
                 </a:solidFill>
@@ -2612,9 +2623,44 @@
                 <a:ea typeface="Calibri" pitchFamily="34" charset="-122"/>
                 <a:cs typeface="Calibri" pitchFamily="34" charset="-120"/>
               </a:rPr>
-              <a:t>a built-in attack suite proves it: 0/17 PII leaks vs 13–15/17 for naive output masking.</a:t>
-            </a:r>
-            <a:endParaRPr lang="en-US" sz="1150" dirty="0"/>
+              <a:t>differential-privacy aggregates with a per-analyst budget; free-text PII redacted in place.</a:t>
+            </a:r>
+            <a:endParaRPr lang="en-US" sz="1050" dirty="0"/>
+          </a:p>
+          <a:p>
+            <a:pPr algn="l" marL="228600" indent="-228600">
+              <a:spcAft>
+                <a:spcPts val="400"/>
+              </a:spcAft>
+              <a:buClr>
+                <a:srgbClr val="1F4788"/>
+              </a:buClr>
+              <a:buFont typeface="Arial"/>
+              <a:buChar char="•"/>
+            </a:pPr>
+            <a:r>
+              <a:rPr lang="en-US" sz="1050" b="1" dirty="0">
+                <a:solidFill>
+                  <a:srgbClr val="1F4788"/>
+                </a:solidFill>
+                <a:latin typeface="Calibri" pitchFamily="34" charset="0"/>
+                <a:ea typeface="Calibri" pitchFamily="34" charset="-122"/>
+                <a:cs typeface="Calibri" pitchFamily="34" charset="-120"/>
+              </a:rPr>
+              <a:t>Plug-in anywhere: </a:t>
+            </a:r>
+            <a:r>
+              <a:rPr lang="en-US" sz="1050" dirty="0">
+                <a:solidFill>
+                  <a:srgbClr val="2D2D2D"/>
+                </a:solidFill>
+                <a:latin typeface="Calibri" pitchFamily="34" charset="0"/>
+                <a:ea typeface="Calibri" pitchFamily="34" charset="-122"/>
+                <a:cs typeface="Calibri" pitchFamily="34" charset="-120"/>
+              </a:rPr>
+              <a:t>PostgreSQL wire proxy for BI tools, REST API, CLI, dashboard; tamper-evident audit and automated PIA.</a:t>
+            </a:r>
+            <a:endParaRPr lang="en-US" sz="1050" dirty="0"/>
           </a:p>
         </p:txBody>
       </p:sp>
@@ -3012,7 +3058,7 @@
         <p:spPr>
           <a:xfrm>
             <a:off x="457200" y="1216152"/>
-            <a:ext cx="4160520" cy="3611880"/>
+            <a:ext cx="4160520" cy="3630168"/>
           </a:xfrm>
           <a:prstGeom prst="rect">
             <a:avLst/>
@@ -3030,7 +3076,7 @@
           <a:p>
             <a:pPr algn="l" marL="228600" indent="-228600">
               <a:spcAft>
-                <a:spcPts val="500"/>
+                <a:spcPts val="400"/>
               </a:spcAft>
               <a:buClr>
                 <a:srgbClr val="1F4788"/>
@@ -3039,7 +3085,7 @@
               <a:buAutoNum type="arabicPeriod"/>
             </a:pPr>
             <a:r>
-              <a:rPr lang="en-US" sz="1100" b="1" dirty="0">
+              <a:rPr lang="en-US" sz="1050" b="1" dirty="0">
                 <a:solidFill>
                   <a:srgbClr val="1F4788"/>
                 </a:solidFill>
@@ -3050,7 +3096,7 @@
               <a:t>Connect: </a:t>
             </a:r>
             <a:r>
-              <a:rPr lang="en-US" sz="1100" dirty="0">
+              <a:rPr lang="en-US" sz="1050" dirty="0">
                 <a:solidFill>
                   <a:srgbClr val="2D2D2D"/>
                 </a:solidFill>
@@ -3058,14 +3104,14 @@
                 <a:ea typeface="Calibri" pitchFamily="34" charset="-122"/>
                 <a:cs typeface="Calibri" pitchFamily="34" charset="-120"/>
               </a:rPr>
-              <a:t>SQLite or PostgreSQL via one backend interface; mask functions installed (Python UDFs, PL/pgSQL + pgcrypto).</a:t>
-            </a:r>
-            <a:endParaRPr lang="en-US" sz="1100" dirty="0"/>
+              <a:t>SQLite, PostgreSQL and MySQL behind one interface; apps use the REST API, SDK or PostgreSQL wire proxy.</a:t>
+            </a:r>
+            <a:endParaRPr lang="en-US" sz="1050" dirty="0"/>
           </a:p>
           <a:p>
             <a:pPr algn="l" marL="228600" indent="-228600">
               <a:spcAft>
-                <a:spcPts val="500"/>
+                <a:spcPts val="400"/>
               </a:spcAft>
               <a:buClr>
                 <a:srgbClr val="1F4788"/>
@@ -3074,7 +3120,7 @@
               <a:buAutoNum type="arabicPeriod"/>
             </a:pPr>
             <a:r>
-              <a:rPr lang="en-US" sz="1100" b="1" dirty="0">
+              <a:rPr lang="en-US" sz="1050" b="1" dirty="0">
                 <a:solidFill>
                   <a:srgbClr val="1F4788"/>
                 </a:solidFill>
@@ -3082,10 +3128,10 @@
                 <a:ea typeface="Calibri" pitchFamily="34" charset="-122"/>
                 <a:cs typeface="Calibri" pitchFamily="34" charset="-120"/>
               </a:rPr>
-              <a:t>Scan: </a:t>
-            </a:r>
-            <a:r>
-              <a:rPr lang="en-US" sz="1100" dirty="0">
+              <a:t>Discover: </a:t>
+            </a:r>
+            <a:r>
+              <a:rPr lang="en-US" sz="1050" dirty="0">
                 <a:solidFill>
                   <a:srgbClr val="2D2D2D"/>
                 </a:solidFill>
@@ -3093,14 +3139,14 @@
                 <a:ea typeface="Calibri" pitchFamily="34" charset="-122"/>
                 <a:cs typeface="Calibri" pitchFamily="34" charset="-120"/>
               </a:rPr>
-              <a:t>headers + 200 sampled values per column through Luhn, Verhoeff, PAN, IBAN, email, phone and SSN checks; tags with evidence; background rescans.</a:t>
-            </a:r>
-            <a:endParaRPr lang="en-US" sz="1100" dirty="0"/>
+              <a:t>a background AI scanner samples each column; LightGBM (85 features) + checksums tag it with evidence. Unsure columns stay masked.</a:t>
+            </a:r>
+            <a:endParaRPr lang="en-US" sz="1050" dirty="0"/>
           </a:p>
           <a:p>
             <a:pPr algn="l" marL="228600" indent="-228600">
               <a:spcAft>
-                <a:spcPts val="500"/>
+                <a:spcPts val="400"/>
               </a:spcAft>
               <a:buClr>
                 <a:srgbClr val="1F4788"/>
@@ -3109,7 +3155,7 @@
               <a:buAutoNum type="arabicPeriod"/>
             </a:pPr>
             <a:r>
-              <a:rPr lang="en-US" sz="1100" b="1" dirty="0">
+              <a:rPr lang="en-US" sz="1050" b="1" dirty="0">
                 <a:solidFill>
                   <a:srgbClr val="1F4788"/>
                 </a:solidFill>
@@ -3120,7 +3166,7 @@
               <a:t>Authenticate: </a:t>
             </a:r>
             <a:r>
-              <a:rPr lang="en-US" sz="1100" dirty="0">
+              <a:rPr lang="en-US" sz="1050" dirty="0">
                 <a:solidFill>
                   <a:srgbClr val="2D2D2D"/>
                 </a:solidFill>
@@ -3130,12 +3176,12 @@
               </a:rPr>
               <a:t>PBKDF2 passwords and signed JWTs; the role only ever comes from the session.</a:t>
             </a:r>
-            <a:endParaRPr lang="en-US" sz="1100" dirty="0"/>
+            <a:endParaRPr lang="en-US" sz="1050" dirty="0"/>
           </a:p>
           <a:p>
             <a:pPr algn="l" marL="228600" indent="-228600">
               <a:spcAft>
-                <a:spcPts val="500"/>
+                <a:spcPts val="400"/>
               </a:spcAft>
               <a:buClr>
                 <a:srgbClr val="1F4788"/>
@@ -3144,7 +3190,7 @@
               <a:buAutoNum type="arabicPeriod"/>
             </a:pPr>
             <a:r>
-              <a:rPr lang="en-US" sz="1100" b="1" dirty="0">
+              <a:rPr lang="en-US" sz="1050" b="1" dirty="0">
                 <a:solidFill>
                   <a:srgbClr val="1F4788"/>
                 </a:solidFill>
@@ -3152,10 +3198,10 @@
                 <a:ea typeface="Calibri" pitchFamily="34" charset="-122"/>
                 <a:cs typeface="Calibri" pitchFamily="34" charset="-120"/>
               </a:rPr>
-              <a:t>Rewrite: </a:t>
-            </a:r>
-            <a:r>
-              <a:rPr lang="en-US" sz="1100" dirty="0">
+              <a:t>Assess risk: </a:t>
+            </a:r>
+            <a:r>
+              <a:rPr lang="en-US" sz="1050" dirty="0">
                 <a:solidFill>
                   <a:srgbClr val="2D2D2D"/>
                 </a:solidFill>
@@ -3163,14 +3209,14 @@
                 <a:ea typeface="Calibri" pitchFamily="34" charset="-122"/>
                 <a:cs typeface="Calibri" pitchFamily="34" charset="-120"/>
               </a:rPr>
-              <a:t>sqlglot parses one SELECT, rejects anything else, swaps each table for a masked derived table, caps rows, suppresses groups under 5.</a:t>
-            </a:r>
-            <a:endParaRPr lang="en-US" sz="1100" dirty="0"/>
+              <a:t>the threat engine scores each session (rules + IsolationForest) and blocks probing.</a:t>
+            </a:r>
+            <a:endParaRPr lang="en-US" sz="1050" dirty="0"/>
           </a:p>
           <a:p>
             <a:pPr algn="l" marL="228600" indent="-228600">
               <a:spcAft>
-                <a:spcPts val="500"/>
+                <a:spcPts val="400"/>
               </a:spcAft>
               <a:buClr>
                 <a:srgbClr val="1F4788"/>
@@ -3179,7 +3225,7 @@
               <a:buAutoNum type="arabicPeriod"/>
             </a:pPr>
             <a:r>
-              <a:rPr lang="en-US" sz="1100" b="1" dirty="0">
+              <a:rPr lang="en-US" sz="1050" b="1" dirty="0">
                 <a:solidFill>
                   <a:srgbClr val="1F4788"/>
                 </a:solidFill>
@@ -3187,10 +3233,10 @@
                 <a:ea typeface="Calibri" pitchFamily="34" charset="-122"/>
                 <a:cs typeface="Calibri" pitchFamily="34" charset="-120"/>
               </a:rPr>
-              <a:t>Execute: </a:t>
-            </a:r>
-            <a:r>
-              <a:rPr lang="en-US" sz="1100" dirty="0">
+              <a:t>Rewrite &amp; execute: </a:t>
+            </a:r>
+            <a:r>
+              <a:rPr lang="en-US" sz="1050" dirty="0">
                 <a:solidFill>
                   <a:srgbClr val="2D2D2D"/>
                 </a:solidFill>
@@ -3198,14 +3244,14 @@
                 <a:ea typeface="Calibri" pitchFamily="34" charset="-122"/>
                 <a:cs typeface="Calibri" pitchFamily="34" charset="-120"/>
               </a:rPr>
-              <a:t>read-only (SQLite authorizer, Postgres READ ONLY transaction + timeout).</a:t>
-            </a:r>
-            <a:endParaRPr lang="en-US" sz="1100" dirty="0"/>
+              <a:t>sqlglot swaps every table for a masked view, adds DP noise to analyst aggregates, rejects unsafe SQL, runs read-only.</a:t>
+            </a:r>
+            <a:endParaRPr lang="en-US" sz="1050" dirty="0"/>
           </a:p>
           <a:p>
             <a:pPr algn="l" marL="228600" indent="-228600">
               <a:spcAft>
-                <a:spcPts val="500"/>
+                <a:spcPts val="400"/>
               </a:spcAft>
               <a:buClr>
                 <a:srgbClr val="1F4788"/>
@@ -3214,7 +3260,7 @@
               <a:buAutoNum type="arabicPeriod"/>
             </a:pPr>
             <a:r>
-              <a:rPr lang="en-US" sz="1100" b="1" dirty="0">
+              <a:rPr lang="en-US" sz="1050" b="1" dirty="0">
                 <a:solidFill>
                   <a:srgbClr val="1F4788"/>
                 </a:solidFill>
@@ -3222,10 +3268,10 @@
                 <a:ea typeface="Calibri" pitchFamily="34" charset="-122"/>
                 <a:cs typeface="Calibri" pitchFamily="34" charset="-120"/>
               </a:rPr>
-              <a:t>Audit: </a:t>
-            </a:r>
-            <a:r>
-              <a:rPr lang="en-US" sz="1100" dirty="0">
+              <a:t>Audit &amp; report: </a:t>
+            </a:r>
+            <a:r>
+              <a:rPr lang="en-US" sz="1050" dirty="0">
                 <a:solidFill>
                   <a:srgbClr val="2D2D2D"/>
                 </a:solidFill>
@@ -3233,9 +3279,9 @@
                 <a:ea typeface="Calibri" pitchFamily="34" charset="-122"/>
                 <a:cs typeface="Calibri" pitchFamily="34" charset="-120"/>
               </a:rPr>
-              <a:t>hash-chained log with literals stripped, so typed-in PII never reaches it.</a:t>
-            </a:r>
-            <a:endParaRPr lang="en-US" sz="1100" dirty="0"/>
+              <a:t>hash-chained log without literals; one-click PIA report mapped to DPDP Rule 6.</a:t>
+            </a:r>
+            <a:endParaRPr lang="en-US" sz="1050" dirty="0"/>
           </a:p>
         </p:txBody>
       </p:sp>
@@ -3287,7 +3333,7 @@
       </p:sp>
       <p:sp>
         <p:nvSpPr>
-          <p:cNvPr id="104" name="Dashboard · REST API · CLI"/>
+          <p:cNvPr id="104" name="BI tools · API · CLI · Dashboard"/>
           <p:cNvSpPr txBox="1"/>
           <p:nvPr/>
         </p:nvSpPr>
@@ -3323,7 +3369,7 @@
               <a:buNone/>
             </a:pPr>
             <a:r>
-              <a:rPr lang="en-US" sz="1050" b="1" dirty="0">
+              <a:rPr lang="en-US" sz="1000" b="1" dirty="0">
                 <a:solidFill>
                   <a:srgbClr val="1F4788"/>
                 </a:solidFill>
@@ -3331,9 +3377,9 @@
                 <a:ea typeface="Calibri" pitchFamily="34" charset="-122"/>
                 <a:cs typeface="Calibri" pitchFamily="34" charset="-120"/>
               </a:rPr>
-              <a:t>Dashboard · REST API · CLI</a:t>
-            </a:r>
-            <a:endParaRPr lang="en-US" sz="1050" dirty="0"/>
+              <a:t>BI tools · API · CLI · Dashboard</a:t>
+            </a:r>
+            <a:endParaRPr lang="en-US" sz="1000" dirty="0"/>
           </a:p>
           <a:p>
             <a:pPr algn="ctr" marL="0" indent="0">
@@ -3354,7 +3400,7 @@
                 <a:ea typeface="Calibri" pitchFamily="34" charset="-122"/>
                 <a:cs typeface="Calibri" pitchFamily="34" charset="-120"/>
               </a:rPr>
-              <a:t>user logs in, sends SQL</a:t>
+              <a:t>via PostgreSQL wire proxy or SDK</a:t>
             </a:r>
             <a:endParaRPr lang="en-US" sz="850" dirty="0"/>
           </a:p>
@@ -3362,7 +3408,7 @@
       </p:sp>
       <p:sp>
         <p:nvSpPr>
-          <p:cNvPr id="105" name="Auth"/>
+          <p:cNvPr id="105" name="Auth + threat engine"/>
           <p:cNvSpPr txBox="1"/>
           <p:nvPr/>
         </p:nvSpPr>
@@ -3398,7 +3444,7 @@
               <a:buNone/>
             </a:pPr>
             <a:r>
-              <a:rPr lang="en-US" sz="1050" b="1" dirty="0">
+              <a:rPr lang="en-US" sz="1000" b="1" dirty="0">
                 <a:solidFill>
                   <a:srgbClr val="1F4788"/>
                 </a:solidFill>
@@ -3406,9 +3452,9 @@
                 <a:ea typeface="Calibri" pitchFamily="34" charset="-122"/>
                 <a:cs typeface="Calibri" pitchFamily="34" charset="-120"/>
               </a:rPr>
-              <a:t>Auth</a:t>
-            </a:r>
-            <a:endParaRPr lang="en-US" sz="1050" dirty="0"/>
+              <a:t>Auth + threat engine</a:t>
+            </a:r>
+            <a:endParaRPr lang="en-US" sz="1000" dirty="0"/>
           </a:p>
           <a:p>
             <a:pPr algn="ctr" marL="0" indent="0">
@@ -3429,7 +3475,7 @@
                 <a:ea typeface="Calibri" pitchFamily="34" charset="-122"/>
                 <a:cs typeface="Calibri" pitchFamily="34" charset="-120"/>
               </a:rPr>
-              <a:t>JWT session → role</a:t>
+              <a:t>JWT role · ML risk score</a:t>
             </a:r>
             <a:endParaRPr lang="en-US" sz="850" dirty="0"/>
           </a:p>
@@ -3437,7 +3483,7 @@
       </p:sp>
       <p:sp>
         <p:nvSpPr>
-          <p:cNvPr id="106" name="Audit log"/>
+          <p:cNvPr id="106" name="Audit log + PIA"/>
           <p:cNvSpPr txBox="1"/>
           <p:nvPr/>
         </p:nvSpPr>
@@ -3473,7 +3519,7 @@
               <a:buNone/>
             </a:pPr>
             <a:r>
-              <a:rPr lang="en-US" sz="1050" b="1" dirty="0">
+              <a:rPr lang="en-US" sz="1000" b="1" dirty="0">
                 <a:solidFill>
                   <a:srgbClr val="1F4788"/>
                 </a:solidFill>
@@ -3481,9 +3527,9 @@
                 <a:ea typeface="Calibri" pitchFamily="34" charset="-122"/>
                 <a:cs typeface="Calibri" pitchFamily="34" charset="-120"/>
               </a:rPr>
-              <a:t>Audit log</a:t>
-            </a:r>
-            <a:endParaRPr lang="en-US" sz="1050" dirty="0"/>
+              <a:t>Audit log + PIA</a:t>
+            </a:r>
+            <a:endParaRPr lang="en-US" sz="1000" dirty="0"/>
           </a:p>
           <a:p>
             <a:pPr algn="ctr" marL="0" indent="0">
@@ -3512,7 +3558,7 @@
       </p:sp>
       <p:sp>
         <p:nvSpPr>
-          <p:cNvPr id="107" name="SQL rewriter (sqlglot)"/>
+          <p:cNvPr id="107" name="Masking engine (sqlglot)"/>
           <p:cNvSpPr txBox="1"/>
           <p:nvPr/>
         </p:nvSpPr>
@@ -3546,7 +3592,7 @@
               <a:buNone/>
             </a:pPr>
             <a:r>
-              <a:rPr lang="en-US" sz="1050" b="1" dirty="0">
+              <a:rPr lang="en-US" sz="1000" b="1" dirty="0">
                 <a:solidFill>
                   <a:srgbClr val="FFFFFF"/>
                 </a:solidFill>
@@ -3554,9 +3600,9 @@
                 <a:ea typeface="Calibri" pitchFamily="34" charset="-122"/>
                 <a:cs typeface="Calibri" pitchFamily="34" charset="-120"/>
               </a:rPr>
-              <a:t>SQL rewriter (sqlglot)</a:t>
-            </a:r>
-            <a:endParaRPr lang="en-US" sz="1050" dirty="0"/>
+              <a:t>Masking engine (sqlglot)</a:t>
+            </a:r>
+            <a:endParaRPr lang="en-US" sz="1000" dirty="0"/>
           </a:p>
           <a:p>
             <a:pPr algn="ctr" marL="0" indent="0">
@@ -3577,7 +3623,7 @@
                 <a:ea typeface="Calibri" pitchFamily="34" charset="-122"/>
                 <a:cs typeface="Calibri" pitchFamily="34" charset="-120"/>
               </a:rPr>
-              <a:t>masked derived tables · firewall · row cap · group floor</a:t>
+              <a:t>masked views · DP aggregates · firewall · row caps</a:t>
             </a:r>
             <a:endParaRPr lang="en-US" sz="850" dirty="0"/>
           </a:p>
@@ -3585,7 +3631,7 @@
       </p:sp>
       <p:sp>
         <p:nvSpPr>
-          <p:cNvPr id="108" name="Policy YAML"/>
+          <p:cNvPr id="108" name="Policy as code"/>
           <p:cNvSpPr txBox="1"/>
           <p:nvPr/>
         </p:nvSpPr>
@@ -3621,7 +3667,7 @@
               <a:buNone/>
             </a:pPr>
             <a:r>
-              <a:rPr lang="en-US" sz="1050" b="1" dirty="0">
+              <a:rPr lang="en-US" sz="1000" b="1" dirty="0">
                 <a:solidFill>
                   <a:srgbClr val="1F4788"/>
                 </a:solidFill>
@@ -3629,15 +3675,15 @@
                 <a:ea typeface="Calibri" pitchFamily="34" charset="-122"/>
                 <a:cs typeface="Calibri" pitchFamily="34" charset="-120"/>
               </a:rPr>
-              <a:t>Policy YAML</a:t>
-            </a:r>
-            <a:endParaRPr lang="en-US" sz="1050" dirty="0"/>
-          </a:p>
-        </p:txBody>
-      </p:sp>
-      <p:sp>
-        <p:nvSpPr>
-          <p:cNvPr id="109" name="PII scanner"/>
+              <a:t>Policy as code</a:t>
+            </a:r>
+            <a:endParaRPr lang="en-US" sz="1000" dirty="0"/>
+          </a:p>
+        </p:txBody>
+      </p:sp>
+      <p:sp>
+        <p:nvSpPr>
+          <p:cNvPr id="109" name="AI PII scanner"/>
           <p:cNvSpPr txBox="1"/>
           <p:nvPr/>
         </p:nvSpPr>
@@ -3673,7 +3719,7 @@
               <a:buNone/>
             </a:pPr>
             <a:r>
-              <a:rPr lang="en-US" sz="1050" b="1" dirty="0">
+              <a:rPr lang="en-US" sz="1000" b="1" dirty="0">
                 <a:solidFill>
                   <a:srgbClr val="1F4788"/>
                 </a:solidFill>
@@ -3681,9 +3727,9 @@
                 <a:ea typeface="Calibri" pitchFamily="34" charset="-122"/>
                 <a:cs typeface="Calibri" pitchFamily="34" charset="-120"/>
               </a:rPr>
-              <a:t>PII scanner</a:t>
-            </a:r>
-            <a:endParaRPr lang="en-US" sz="1050" dirty="0"/>
+              <a:t>AI PII scanner</a:t>
+            </a:r>
+            <a:endParaRPr lang="en-US" sz="1000" dirty="0"/>
           </a:p>
           <a:p>
             <a:pPr algn="ctr" marL="0" indent="0">
@@ -3704,7 +3750,7 @@
                 <a:ea typeface="Calibri" pitchFamily="34" charset="-122"/>
                 <a:cs typeface="Calibri" pitchFamily="34" charset="-120"/>
               </a:rPr>
-              <a:t>background worker: headers + checksum validators → tags</a:t>
+              <a:t>background worker: LightGBM + checksums → tags</a:t>
             </a:r>
             <a:endParaRPr lang="en-US" sz="850" dirty="0"/>
           </a:p>
@@ -3712,7 +3758,7 @@
       </p:sp>
       <p:sp>
         <p:nvSpPr>
-          <p:cNvPr id="110" name="SQLite | PostgreSQL"/>
+          <p:cNvPr id="110" name="SQLite | PostgreSQL | MySQL"/>
           <p:cNvSpPr txBox="1"/>
           <p:nvPr/>
         </p:nvSpPr>
@@ -3748,7 +3794,7 @@
               <a:buNone/>
             </a:pPr>
             <a:r>
-              <a:rPr lang="en-US" sz="1050" b="1" dirty="0">
+              <a:rPr lang="en-US" sz="1000" b="1" dirty="0">
                 <a:solidFill>
                   <a:srgbClr val="1F4788"/>
                 </a:solidFill>
@@ -3756,9 +3802,9 @@
                 <a:ea typeface="Calibri" pitchFamily="34" charset="-122"/>
                 <a:cs typeface="Calibri" pitchFamily="34" charset="-120"/>
               </a:rPr>
-              <a:t>SQLite | PostgreSQL</a:t>
-            </a:r>
-            <a:endParaRPr lang="en-US" sz="1050" dirty="0"/>
+              <a:t>SQLite | PostgreSQL | MySQL</a:t>
+            </a:r>
+            <a:endParaRPr lang="en-US" sz="1000" dirty="0"/>
           </a:p>
           <a:p>
             <a:pPr algn="ctr" marL="0" indent="0">
@@ -4093,7 +4139,7 @@
         <p:spPr>
           <a:xfrm>
             <a:off x="457200" y="841248"/>
-            <a:ext cx="8229600" cy="274320"/>
+            <a:ext cx="4663440" cy="274320"/>
           </a:xfrm>
           <a:prstGeom prst="rect">
             <a:avLst/>
@@ -4116,7 +4162,7 @@
               <a:buNone/>
             </a:pPr>
             <a:r>
-              <a:rPr lang="en-US" sz="1400" b="1" dirty="0">
+              <a:rPr lang="en-US" sz="1250" b="1" dirty="0">
                 <a:solidFill>
                   <a:srgbClr val="1F4788"/>
                 </a:solidFill>
@@ -4124,9 +4170,9 @@
                 <a:ea typeface="Calibri" pitchFamily="34" charset="-122"/>
                 <a:cs typeface="Calibri" pitchFamily="34" charset="-120"/>
               </a:rPr>
-              <a:t>1. Query tricks get around column masking</a:t>
-            </a:r>
-            <a:endParaRPr lang="en-US" sz="1400" dirty="0"/>
+              <a:t>1. Finding PII when column names lie</a:t>
+            </a:r>
+            <a:endParaRPr lang="en-US" sz="1250" dirty="0"/>
           </a:p>
         </p:txBody>
       </p:sp>
@@ -4138,8 +4184,8 @@
         </p:nvSpPr>
         <p:spPr>
           <a:xfrm>
-            <a:off x="640080" y="1115568"/>
-            <a:ext cx="8046720" cy="777240"/>
+            <a:off x="594360" y="1115568"/>
+            <a:ext cx="4526280" cy="960120"/>
           </a:xfrm>
           <a:prstGeom prst="rect">
             <a:avLst/>
@@ -4162,7 +4208,7 @@
               <a:buNone/>
             </a:pPr>
             <a:r>
-              <a:rPr lang="en-US" sz="1100" b="1" dirty="0">
+              <a:rPr lang="en-US" sz="1050" b="1" dirty="0">
                 <a:solidFill>
                   <a:srgbClr val="2D2D2D"/>
                 </a:solidFill>
@@ -4173,7 +4219,7 @@
               <a:t>Problem: </a:t>
             </a:r>
             <a:r>
-              <a:rPr lang="en-US" sz="1100" dirty="0">
+              <a:rPr lang="en-US" sz="1050" dirty="0">
                 <a:solidFill>
                   <a:srgbClr val="2D2D2D"/>
                 </a:solidFill>
@@ -4181,9 +4227,9 @@
                 <a:ea typeface="Calibri" pitchFamily="34" charset="-122"/>
                 <a:cs typeface="Calibri" pitchFamily="34" charset="-120"/>
               </a:rPr>
-              <a:t>aliases (email AS contact), SELECT *, CTEs, subqueries, UNION and expressions rename or wrap a sensitive column, so name-based masking misses it.</a:t>
-            </a:r>
-            <a:endParaRPr lang="en-US" sz="1100" dirty="0"/>
+              <a:t>headers mislead (contact, ref_no) and regexes mistake order numbers or OTPs for Aadhaar and pincodes.</a:t>
+            </a:r>
+            <a:endParaRPr lang="en-US" sz="1050" dirty="0"/>
           </a:p>
           <a:p>
             <a:pPr algn="l" marL="0" indent="0">
@@ -4193,7 +4239,7 @@
               <a:buNone/>
             </a:pPr>
             <a:r>
-              <a:rPr lang="en-US" sz="1100" b="1" dirty="0">
+              <a:rPr lang="en-US" sz="1050" b="1" dirty="0">
                 <a:solidFill>
                   <a:srgbClr val="1F4788"/>
                 </a:solidFill>
@@ -4201,10 +4247,10 @@
                 <a:ea typeface="Calibri" pitchFamily="34" charset="-122"/>
                 <a:cs typeface="Calibri" pitchFamily="34" charset="-120"/>
               </a:rPr>
-              <a:t>Mitigation: </a:t>
-            </a:r>
-            <a:r>
-              <a:rPr lang="en-US" sz="1100" dirty="0">
+              <a:t>Solution: </a:t>
+            </a:r>
+            <a:r>
+              <a:rPr lang="en-US" sz="1050" dirty="0">
                 <a:solidFill>
                   <a:srgbClr val="2D2D2D"/>
                 </a:solidFill>
@@ -4212,9 +4258,9 @@
                 <a:ea typeface="Calibri" pitchFamily="34" charset="-122"/>
                 <a:cs typeface="Calibri" pitchFamily="34" charset="-120"/>
               </a:rPr>
-              <a:t>mask at the source. Every table is replaced by a masked derived table pinned to the real schema, so any query shape only sees masked values. Attack suite: 0 leaks.</a:t>
-            </a:r>
-            <a:endParaRPr lang="en-US" sz="1100" dirty="0"/>
+              <a:t>ML on value statistics plus checksum validators; checksum hits can never be overridden, and uncertain columns are still masked for review.</a:t>
+            </a:r>
+            <a:endParaRPr lang="en-US" sz="1050" dirty="0"/>
           </a:p>
         </p:txBody>
       </p:sp>
@@ -4226,8 +4272,8 @@
         </p:nvSpPr>
         <p:spPr>
           <a:xfrm>
-            <a:off x="457200" y="1929384"/>
-            <a:ext cx="8229600" cy="9144"/>
+            <a:off x="457200" y="2093976"/>
+            <a:ext cx="4663440" cy="9144"/>
           </a:xfrm>
           <a:prstGeom prst="rect">
             <a:avLst/>
@@ -4255,8 +4301,8 @@
         </p:nvSpPr>
         <p:spPr>
           <a:xfrm>
-            <a:off x="457200" y="1984248"/>
-            <a:ext cx="8229600" cy="274320"/>
+            <a:off x="457200" y="2167128"/>
+            <a:ext cx="4663440" cy="274320"/>
           </a:xfrm>
           <a:prstGeom prst="rect">
             <a:avLst/>
@@ -4279,7 +4325,7 @@
               <a:buNone/>
             </a:pPr>
             <a:r>
-              <a:rPr lang="en-US" sz="1400" b="1" dirty="0">
+              <a:rPr lang="en-US" sz="1250" b="1" dirty="0">
                 <a:solidFill>
                   <a:srgbClr val="1F4788"/>
                 </a:solidFill>
@@ -4287,9 +4333,9 @@
                 <a:ea typeface="Calibri" pitchFamily="34" charset="-122"/>
                 <a:cs typeface="Calibri" pitchFamily="34" charset="-120"/>
               </a:rPr>
-              <a:t>2. Inference through filters, ordering and aggregates</a:t>
-            </a:r>
-            <a:endParaRPr lang="en-US" sz="1400" dirty="0"/>
+              <a:t>2. Inference through filters and aggregates</a:t>
+            </a:r>
+            <a:endParaRPr lang="en-US" sz="1250" dirty="0"/>
           </a:p>
         </p:txBody>
       </p:sp>
@@ -4301,8 +4347,8 @@
         </p:nvSpPr>
         <p:spPr>
           <a:xfrm>
-            <a:off x="640080" y="2258568"/>
-            <a:ext cx="8046720" cy="777240"/>
+            <a:off x="594360" y="2441448"/>
+            <a:ext cx="4526280" cy="960120"/>
           </a:xfrm>
           <a:prstGeom prst="rect">
             <a:avLst/>
@@ -4325,7 +4371,7 @@
               <a:buNone/>
             </a:pPr>
             <a:r>
-              <a:rPr lang="en-US" sz="1100" b="1" dirty="0">
+              <a:rPr lang="en-US" sz="1050" b="1" dirty="0">
                 <a:solidFill>
                   <a:srgbClr val="2D2D2D"/>
                 </a:solidFill>
@@ -4336,7 +4382,7 @@
               <a:t>Problem: </a:t>
             </a:r>
             <a:r>
-              <a:rPr lang="en-US" sz="1100" dirty="0">
+              <a:rPr lang="en-US" sz="1050" dirty="0">
                 <a:solidFill>
                   <a:srgbClr val="2D2D2D"/>
                 </a:solidFill>
@@ -4344,9 +4390,9 @@
                 <a:ea typeface="Calibri" pitchFamily="34" charset="-122"/>
                 <a:cs typeface="Calibri" pitchFamily="34" charset="-120"/>
               </a:rPr>
-              <a:t>WHERE email = '…', LIKE prefixes, BETWEEN ranges, ORDER BY and AVG over one row reveal values without ever selecting them.</a:t>
-            </a:r>
-            <a:endParaRPr lang="en-US" sz="1100" dirty="0"/>
+              <a:t>WHERE / LIKE / BETWEEN probes, ORDER BY and one-row aggregates reveal masked values without selecting them.</a:t>
+            </a:r>
+            <a:endParaRPr lang="en-US" sz="1050" dirty="0"/>
           </a:p>
           <a:p>
             <a:pPr algn="l" marL="0" indent="0">
@@ -4356,7 +4402,7 @@
               <a:buNone/>
             </a:pPr>
             <a:r>
-              <a:rPr lang="en-US" sz="1100" b="1" dirty="0">
+              <a:rPr lang="en-US" sz="1050" b="1" dirty="0">
                 <a:solidFill>
                   <a:srgbClr val="1F4788"/>
                 </a:solidFill>
@@ -4364,10 +4410,10 @@
                 <a:ea typeface="Calibri" pitchFamily="34" charset="-122"/>
                 <a:cs typeface="Calibri" pitchFamily="34" charset="-120"/>
               </a:rPr>
-              <a:t>Mitigation: </a:t>
-            </a:r>
-            <a:r>
-              <a:rPr lang="en-US" sz="1100" dirty="0">
+              <a:t>Solution: </a:t>
+            </a:r>
+            <a:r>
+              <a:rPr lang="en-US" sz="1050" dirty="0">
                 <a:solidFill>
                   <a:srgbClr val="2D2D2D"/>
                 </a:solidFill>
@@ -4375,9 +4421,9 @@
                 <a:ea typeface="Calibri" pitchFamily="34" charset="-122"/>
                 <a:cs typeface="Calibri" pitchFamily="34" charset="-120"/>
               </a:rPr>
-              <a:t>predicates run on masked values, so probes give no signal; aggregates over fewer than 5 rows are suppressed; writes, catalogs and unknown functions are rejected.</a:t>
-            </a:r>
-            <a:endParaRPr lang="en-US" sz="1100" dirty="0"/>
+              <a:t>mask at the table source, suppress groups under 5 rows, reject unsafe SQL; the ML threat engine stops multi-query probing.</a:t>
+            </a:r>
+            <a:endParaRPr lang="en-US" sz="1050" dirty="0"/>
           </a:p>
         </p:txBody>
       </p:sp>
@@ -4389,8 +4435,8 @@
         </p:nvSpPr>
         <p:spPr>
           <a:xfrm>
-            <a:off x="457200" y="3072384"/>
-            <a:ext cx="8229600" cy="9144"/>
+            <a:off x="457200" y="3419856"/>
+            <a:ext cx="4663440" cy="9144"/>
           </a:xfrm>
           <a:prstGeom prst="rect">
             <a:avLst/>
@@ -4418,8 +4464,8 @@
         </p:nvSpPr>
         <p:spPr>
           <a:xfrm>
-            <a:off x="457200" y="3127248"/>
-            <a:ext cx="8229600" cy="274320"/>
+            <a:off x="457200" y="3493008"/>
+            <a:ext cx="4663440" cy="274320"/>
           </a:xfrm>
           <a:prstGeom prst="rect">
             <a:avLst/>
@@ -4442,7 +4488,7 @@
               <a:buNone/>
             </a:pPr>
             <a:r>
-              <a:rPr lang="en-US" sz="1400" b="1" dirty="0">
+              <a:rPr lang="en-US" sz="1250" b="1" dirty="0">
                 <a:solidFill>
                   <a:srgbClr val="1F4788"/>
                 </a:solidFill>
@@ -4450,9 +4496,9 @@
                 <a:ea typeface="Calibri" pitchFamily="34" charset="-122"/>
                 <a:cs typeface="Calibri" pitchFamily="34" charset="-120"/>
               </a:rPr>
-              <a:t>3. Finding PII reliably</a:t>
-            </a:r>
-            <a:endParaRPr lang="en-US" sz="1400" dirty="0"/>
+              <a:t>3. Privacy vs. usefulness for analysts</a:t>
+            </a:r>
+            <a:endParaRPr lang="en-US" sz="1250" dirty="0"/>
           </a:p>
         </p:txBody>
       </p:sp>
@@ -4464,8 +4510,8 @@
         </p:nvSpPr>
         <p:spPr>
           <a:xfrm>
-            <a:off x="640080" y="3401568"/>
-            <a:ext cx="8046720" cy="777240"/>
+            <a:off x="594360" y="3767328"/>
+            <a:ext cx="4526280" cy="960120"/>
           </a:xfrm>
           <a:prstGeom prst="rect">
             <a:avLst/>
@@ -4488,7 +4534,7 @@
               <a:buNone/>
             </a:pPr>
             <a:r>
-              <a:rPr lang="en-US" sz="1100" b="1" dirty="0">
+              <a:rPr lang="en-US" sz="1050" b="1" dirty="0">
                 <a:solidFill>
                   <a:srgbClr val="2D2D2D"/>
                 </a:solidFill>
@@ -4499,7 +4545,7 @@
               <a:t>Problem: </a:t>
             </a:r>
             <a:r>
-              <a:rPr lang="en-US" sz="1100" dirty="0">
+              <a:rPr lang="en-US" sz="1050" dirty="0">
                 <a:solidFill>
                   <a:srgbClr val="2D2D2D"/>
                 </a:solidFill>
@@ -4507,9 +4553,9 @@
                 <a:ea typeface="Calibri" pitchFamily="34" charset="-122"/>
                 <a:cs typeface="Calibri" pitchFamily="34" charset="-120"/>
               </a:rPr>
-              <a:t>headers lie (contact holds phone numbers, payment_ref holds cards) and plain regexes mistake 12-digit order numbers for Aadhaar.</a:t>
-            </a:r>
-            <a:endParaRPr lang="en-US" sz="1100" dirty="0"/>
+              <a:t>full redaction makes analytics useless; plain hashes of IDs are brute-forceable.</a:t>
+            </a:r>
+            <a:endParaRPr lang="en-US" sz="1050" dirty="0"/>
           </a:p>
           <a:p>
             <a:pPr algn="l" marL="0" indent="0">
@@ -4519,7 +4565,7 @@
               <a:buNone/>
             </a:pPr>
             <a:r>
-              <a:rPr lang="en-US" sz="1100" b="1" dirty="0">
+              <a:rPr lang="en-US" sz="1050" b="1" dirty="0">
                 <a:solidFill>
                   <a:srgbClr val="1F4788"/>
                 </a:solidFill>
@@ -4527,10 +4573,10 @@
                 <a:ea typeface="Calibri" pitchFamily="34" charset="-122"/>
                 <a:cs typeface="Calibri" pitchFamily="34" charset="-120"/>
               </a:rPr>
-              <a:t>Mitigation: </a:t>
-            </a:r>
-            <a:r>
-              <a:rPr lang="en-US" sz="1100" dirty="0">
+              <a:t>Solution: </a:t>
+            </a:r>
+            <a:r>
+              <a:rPr lang="en-US" sz="1050" dirty="0">
                 <a:solidFill>
                   <a:srgbClr val="2D2D2D"/>
                 </a:solidFill>
@@ -4538,22 +4584,22 @@
                 <a:ea typeface="Calibri" pitchFamily="34" charset="-122"/>
                 <a:cs typeface="Calibri" pitchFamily="34" charset="-120"/>
               </a:rPr>
-              <a:t>checksum-validate sampled values (Luhn, Verhoeff, PAN, IBAN); low-confidence columns go to review; manual overrides; new tables are blocked until scanned.</a:t>
-            </a:r>
-            <a:endParaRPr lang="en-US" sz="1100" dirty="0"/>
-          </a:p>
-        </p:txBody>
-      </p:sp>
-      <p:sp>
-        <p:nvSpPr>
-          <p:cNvPr id="109" name="Known limits"/>
+              <a:t>keyed-HMAC tokens keep joins and counts working; differential-privacy aggregates with a per-analyst privacy budget.</a:t>
+            </a:r>
+            <a:endParaRPr lang="en-US" sz="1050" dirty="0"/>
+          </a:p>
+        </p:txBody>
+      </p:sp>
+      <p:sp>
+        <p:nvSpPr>
+          <p:cNvPr id="109" name="Evidence panel"/>
           <p:cNvSpPr txBox="1"/>
           <p:nvPr/>
         </p:nvSpPr>
         <p:spPr>
           <a:xfrm>
-            <a:off x="457200" y="4261104"/>
-            <a:ext cx="8229600" cy="585216"/>
+            <a:off x="5349240" y="841248"/>
+            <a:ext cx="3337560" cy="4005072"/>
           </a:xfrm>
           <a:prstGeom prst="roundRect">
             <a:avLst>
@@ -4568,11 +4614,40 @@
           </a:ln>
         </p:spPr>
         <p:txBody>
-          <a:bodyPr wrap="square" lIns="91440" tIns="91440" rIns="91440" bIns="91440" rtlCol="0" anchor="ctr">
+          <a:bodyPr wrap="square" lIns="91440" tIns="91440" rIns="91440" bIns="91440" rtlCol="0" anchor="t">
             <a:noAutofit/>
           </a:bodyPr>
           <a:lstStyle/>
           <a:p>
+            <a:endParaRPr lang="en-US"/>
+          </a:p>
+        </p:txBody>
+      </p:sp>
+      <p:sp>
+        <p:nvSpPr>
+          <p:cNvPr id="110" name="Evidence title"/>
+          <p:cNvSpPr txBox="1"/>
+          <p:nvPr/>
+        </p:nvSpPr>
+        <p:spPr>
+          <a:xfrm>
+            <a:off x="5486400" y="896112"/>
+            <a:ext cx="3108960" cy="274320"/>
+          </a:xfrm>
+          <a:prstGeom prst="rect">
+            <a:avLst/>
+          </a:prstGeom>
+          <a:noFill/>
+          <a:ln>
+            <a:noFill/>
+          </a:ln>
+        </p:spPr>
+        <p:txBody>
+          <a:bodyPr wrap="square" lIns="0" tIns="0" rIns="0" bIns="0" rtlCol="0" anchor="ctr">
+            <a:noAutofit/>
+          </a:bodyPr>
+          <a:lstStyle/>
+          <a:p>
             <a:pPr algn="l" marL="0" indent="0">
               <a:spcAft>
                 <a:spcPts val="0"/>
@@ -4580,6 +4655,52 @@
               <a:buNone/>
             </a:pPr>
             <a:r>
+              <a:rPr lang="en-US" sz="1300" b="1" dirty="0">
+                <a:solidFill>
+                  <a:srgbClr val="1F4788"/>
+                </a:solidFill>
+                <a:latin typeface="Calibri" pitchFamily="34" charset="0"/>
+                <a:ea typeface="Calibri" pitchFamily="34" charset="-122"/>
+                <a:cs typeface="Calibri" pitchFamily="34" charset="-120"/>
+              </a:rPr>
+              <a:t>Measured results</a:t>
+            </a:r>
+            <a:endParaRPr lang="en-US" sz="1300" dirty="0"/>
+          </a:p>
+        </p:txBody>
+      </p:sp>
+      <p:sp>
+        <p:nvSpPr>
+          <p:cNvPr id="111" name="PII discovery, misleading column names (F1)"/>
+          <p:cNvSpPr txBox="1"/>
+          <p:nvPr/>
+        </p:nvSpPr>
+        <p:spPr>
+          <a:xfrm>
+            <a:off x="5486400" y="1234440"/>
+            <a:ext cx="3108960" cy="237744"/>
+          </a:xfrm>
+          <a:prstGeom prst="rect">
+            <a:avLst/>
+          </a:prstGeom>
+          <a:noFill/>
+          <a:ln>
+            <a:noFill/>
+          </a:ln>
+        </p:spPr>
+        <p:txBody>
+          <a:bodyPr wrap="square" lIns="0" tIns="0" rIns="0" bIns="0" rtlCol="0" anchor="t">
+            <a:noAutofit/>
+          </a:bodyPr>
+          <a:lstStyle/>
+          <a:p>
+            <a:pPr algn="l" marL="0" indent="0">
+              <a:spcAft>
+                <a:spcPts val="0"/>
+              </a:spcAft>
+              <a:buNone/>
+            </a:pPr>
+            <a:r>
               <a:rPr lang="en-US" sz="1050" b="1" dirty="0">
                 <a:solidFill>
                   <a:srgbClr val="1F4788"/>
@@ -4588,10 +4709,45 @@
                 <a:ea typeface="Calibri" pitchFamily="34" charset="-122"/>
                 <a:cs typeface="Calibri" pitchFamily="34" charset="-120"/>
               </a:rPr>
-              <a:t>Known limits, stated up front: </a:t>
-            </a:r>
-            <a:r>
-              <a:rPr lang="en-US" sz="1050" dirty="0">
+              <a:t>PII discovery, misleading column names (F1)</a:t>
+            </a:r>
+            <a:endParaRPr lang="en-US" sz="1050" dirty="0"/>
+          </a:p>
+        </p:txBody>
+      </p:sp>
+      <p:sp>
+        <p:nvSpPr>
+          <p:cNvPr id="112" name="PII discovery, misleading column names (F1) label 0"/>
+          <p:cNvSpPr txBox="1"/>
+          <p:nvPr/>
+        </p:nvSpPr>
+        <p:spPr>
+          <a:xfrm>
+            <a:off x="5486400" y="1508760"/>
+            <a:ext cx="1234440" cy="219456"/>
+          </a:xfrm>
+          <a:prstGeom prst="rect">
+            <a:avLst/>
+          </a:prstGeom>
+          <a:noFill/>
+          <a:ln>
+            <a:noFill/>
+          </a:ln>
+        </p:spPr>
+        <p:txBody>
+          <a:bodyPr wrap="square" lIns="0" tIns="0" rIns="0" bIns="0" rtlCol="0" anchor="ctr">
+            <a:noAutofit/>
+          </a:bodyPr>
+          <a:lstStyle/>
+          <a:p>
+            <a:pPr algn="l" marL="0" indent="0">
+              <a:spcAft>
+                <a:spcPts val="0"/>
+              </a:spcAft>
+              <a:buNone/>
+            </a:pPr>
+            <a:r>
+              <a:rPr lang="en-US" sz="950" dirty="0">
                 <a:solidFill>
                   <a:srgbClr val="2D2D2D"/>
                 </a:solidFill>
@@ -4599,9 +4755,922 @@
                 <a:ea typeface="Calibri" pitchFamily="34" charset="-122"/>
                 <a:cs typeface="Calibri" pitchFamily="34" charset="-120"/>
               </a:rPr>
-              <a:t>HMAC tokens still allow equality joins and frequency analysis; partial masks reveal their visible digits; a column the scanner misses stays exposed until tagged; apps must not hold direct database credentials, or they can bypass the gateway.</a:t>
+              <a:t>Benchmark baseline</a:t>
+            </a:r>
+            <a:endParaRPr lang="en-US" sz="950" dirty="0"/>
+          </a:p>
+        </p:txBody>
+      </p:sp>
+      <p:sp>
+        <p:nvSpPr>
+          <p:cNvPr id="113" name="Rect 113"/>
+          <p:cNvSpPr/>
+          <p:nvPr/>
+        </p:nvSpPr>
+        <p:spPr>
+          <a:xfrm>
+            <a:off x="6720840" y="1536192"/>
+            <a:ext cx="1103608" cy="164592"/>
+          </a:xfrm>
+          <a:prstGeom prst="rect">
+            <a:avLst/>
+          </a:prstGeom>
+          <a:solidFill>
+            <a:srgbClr val="B8C2D1"/>
+          </a:solidFill>
+          <a:ln>
+            <a:noFill/>
+          </a:ln>
+        </p:spPr>
+        <p:txBody>
+          <a:bodyPr/>
+          <a:lstStyle/>
+          <a:p>
+            <a:endParaRPr lang="en-US"/>
+          </a:p>
+        </p:txBody>
+      </p:sp>
+      <p:sp>
+        <p:nvSpPr>
+          <p:cNvPr id="114" name="PII discovery, misleading column names (F1) value 0"/>
+          <p:cNvSpPr txBox="1"/>
+          <p:nvPr/>
+        </p:nvSpPr>
+        <p:spPr>
+          <a:xfrm>
+            <a:off x="7879312" y="1508760"/>
+            <a:ext cx="548640" cy="219456"/>
+          </a:xfrm>
+          <a:prstGeom prst="rect">
+            <a:avLst/>
+          </a:prstGeom>
+          <a:noFill/>
+          <a:ln>
+            <a:noFill/>
+          </a:ln>
+        </p:spPr>
+        <p:txBody>
+          <a:bodyPr wrap="square" lIns="0" tIns="0" rIns="0" bIns="0" rtlCol="0" anchor="ctr">
+            <a:noAutofit/>
+          </a:bodyPr>
+          <a:lstStyle/>
+          <a:p>
+            <a:pPr algn="l" marL="0" indent="0">
+              <a:spcAft>
+                <a:spcPts val="0"/>
+              </a:spcAft>
+              <a:buNone/>
+            </a:pPr>
+            <a:r>
+              <a:rPr lang="en-US" sz="1000" b="1" dirty="0">
+                <a:solidFill>
+                  <a:srgbClr val="2D2D2D"/>
+                </a:solidFill>
+                <a:latin typeface="Calibri" pitchFamily="34" charset="0"/>
+                <a:ea typeface="Calibri" pitchFamily="34" charset="-122"/>
+                <a:cs typeface="Calibri" pitchFamily="34" charset="-120"/>
+              </a:rPr>
+              <a:t>0.844</a:t>
+            </a:r>
+            <a:endParaRPr lang="en-US" sz="1000" dirty="0"/>
+          </a:p>
+        </p:txBody>
+      </p:sp>
+      <p:sp>
+        <p:nvSpPr>
+          <p:cNvPr id="115" name="PII discovery, misleading column names (F1) label 1"/>
+          <p:cNvSpPr txBox="1"/>
+          <p:nvPr/>
+        </p:nvSpPr>
+        <p:spPr>
+          <a:xfrm>
+            <a:off x="5486400" y="1783080"/>
+            <a:ext cx="1234440" cy="219456"/>
+          </a:xfrm>
+          <a:prstGeom prst="rect">
+            <a:avLst/>
+          </a:prstGeom>
+          <a:noFill/>
+          <a:ln>
+            <a:noFill/>
+          </a:ln>
+        </p:spPr>
+        <p:txBody>
+          <a:bodyPr wrap="square" lIns="0" tIns="0" rIns="0" bIns="0" rtlCol="0" anchor="ctr">
+            <a:noAutofit/>
+          </a:bodyPr>
+          <a:lstStyle/>
+          <a:p>
+            <a:pPr algn="l" marL="0" indent="0">
+              <a:spcAft>
+                <a:spcPts val="0"/>
+              </a:spcAft>
+              <a:buNone/>
+            </a:pPr>
+            <a:r>
+              <a:rPr lang="en-US" sz="950" b="1" dirty="0">
+                <a:solidFill>
+                  <a:srgbClr val="2D2D2D"/>
+                </a:solidFill>
+                <a:latin typeface="Calibri" pitchFamily="34" charset="0"/>
+                <a:ea typeface="Calibri" pitchFamily="34" charset="-122"/>
+                <a:cs typeface="Calibri" pitchFamily="34" charset="-120"/>
+              </a:rPr>
+              <a:t>MaskGuard AI</a:t>
+            </a:r>
+            <a:endParaRPr lang="en-US" sz="950" dirty="0"/>
+          </a:p>
+        </p:txBody>
+      </p:sp>
+      <p:sp>
+        <p:nvSpPr>
+          <p:cNvPr id="116" name="Rect 116"/>
+          <p:cNvSpPr/>
+          <p:nvPr/>
+        </p:nvSpPr>
+        <p:spPr>
+          <a:xfrm>
+            <a:off x="6720840" y="1810512"/>
+            <a:ext cx="1306284" cy="164592"/>
+          </a:xfrm>
+          <a:prstGeom prst="rect">
+            <a:avLst/>
+          </a:prstGeom>
+          <a:solidFill>
+            <a:srgbClr val="1F4788"/>
+          </a:solidFill>
+          <a:ln>
+            <a:noFill/>
+          </a:ln>
+        </p:spPr>
+        <p:txBody>
+          <a:bodyPr/>
+          <a:lstStyle/>
+          <a:p>
+            <a:endParaRPr lang="en-US"/>
+          </a:p>
+        </p:txBody>
+      </p:sp>
+      <p:sp>
+        <p:nvSpPr>
+          <p:cNvPr id="117" name="PII discovery, misleading column names (F1) value 1"/>
+          <p:cNvSpPr txBox="1"/>
+          <p:nvPr/>
+        </p:nvSpPr>
+        <p:spPr>
+          <a:xfrm>
+            <a:off x="8081988" y="1783080"/>
+            <a:ext cx="548640" cy="219456"/>
+          </a:xfrm>
+          <a:prstGeom prst="rect">
+            <a:avLst/>
+          </a:prstGeom>
+          <a:noFill/>
+          <a:ln>
+            <a:noFill/>
+          </a:ln>
+        </p:spPr>
+        <p:txBody>
+          <a:bodyPr wrap="square" lIns="0" tIns="0" rIns="0" bIns="0" rtlCol="0" anchor="ctr">
+            <a:noAutofit/>
+          </a:bodyPr>
+          <a:lstStyle/>
+          <a:p>
+            <a:pPr algn="l" marL="0" indent="0">
+              <a:spcAft>
+                <a:spcPts val="0"/>
+              </a:spcAft>
+              <a:buNone/>
+            </a:pPr>
+            <a:r>
+              <a:rPr lang="en-US" sz="1000" b="1" dirty="0">
+                <a:solidFill>
+                  <a:srgbClr val="1F4788"/>
+                </a:solidFill>
+                <a:latin typeface="Calibri" pitchFamily="34" charset="0"/>
+                <a:ea typeface="Calibri" pitchFamily="34" charset="-122"/>
+                <a:cs typeface="Calibri" pitchFamily="34" charset="-120"/>
+              </a:rPr>
+              <a:t>0.999</a:t>
+            </a:r>
+            <a:endParaRPr lang="en-US" sz="1000" dirty="0"/>
+          </a:p>
+        </p:txBody>
+      </p:sp>
+      <p:sp>
+        <p:nvSpPr>
+          <p:cNvPr id="118" name="False alarms on look-alike data"/>
+          <p:cNvSpPr txBox="1"/>
+          <p:nvPr/>
+        </p:nvSpPr>
+        <p:spPr>
+          <a:xfrm>
+            <a:off x="5486400" y="2212848"/>
+            <a:ext cx="3108960" cy="237744"/>
+          </a:xfrm>
+          <a:prstGeom prst="rect">
+            <a:avLst/>
+          </a:prstGeom>
+          <a:noFill/>
+          <a:ln>
+            <a:noFill/>
+          </a:ln>
+        </p:spPr>
+        <p:txBody>
+          <a:bodyPr wrap="square" lIns="0" tIns="0" rIns="0" bIns="0" rtlCol="0" anchor="t">
+            <a:noAutofit/>
+          </a:bodyPr>
+          <a:lstStyle/>
+          <a:p>
+            <a:pPr algn="l" marL="0" indent="0">
+              <a:spcAft>
+                <a:spcPts val="0"/>
+              </a:spcAft>
+              <a:buNone/>
+            </a:pPr>
+            <a:r>
+              <a:rPr lang="en-US" sz="1050" b="1" dirty="0">
+                <a:solidFill>
+                  <a:srgbClr val="1F4788"/>
+                </a:solidFill>
+                <a:latin typeface="Calibri" pitchFamily="34" charset="0"/>
+                <a:ea typeface="Calibri" pitchFamily="34" charset="-122"/>
+                <a:cs typeface="Calibri" pitchFamily="34" charset="-120"/>
+              </a:rPr>
+              <a:t>False alarms on look-alike data</a:t>
             </a:r>
             <a:endParaRPr lang="en-US" sz="1050" dirty="0"/>
+          </a:p>
+        </p:txBody>
+      </p:sp>
+      <p:sp>
+        <p:nvSpPr>
+          <p:cNvPr id="119" name="False alarms on look-alike data label 0"/>
+          <p:cNvSpPr txBox="1"/>
+          <p:nvPr/>
+        </p:nvSpPr>
+        <p:spPr>
+          <a:xfrm>
+            <a:off x="5486400" y="2487168"/>
+            <a:ext cx="1234440" cy="219456"/>
+          </a:xfrm>
+          <a:prstGeom prst="rect">
+            <a:avLst/>
+          </a:prstGeom>
+          <a:noFill/>
+          <a:ln>
+            <a:noFill/>
+          </a:ln>
+        </p:spPr>
+        <p:txBody>
+          <a:bodyPr wrap="square" lIns="0" tIns="0" rIns="0" bIns="0" rtlCol="0" anchor="ctr">
+            <a:noAutofit/>
+          </a:bodyPr>
+          <a:lstStyle/>
+          <a:p>
+            <a:pPr algn="l" marL="0" indent="0">
+              <a:spcAft>
+                <a:spcPts val="0"/>
+              </a:spcAft>
+              <a:buNone/>
+            </a:pPr>
+            <a:r>
+              <a:rPr lang="en-US" sz="950" dirty="0">
+                <a:solidFill>
+                  <a:srgbClr val="2D2D2D"/>
+                </a:solidFill>
+                <a:latin typeface="Calibri" pitchFamily="34" charset="0"/>
+                <a:ea typeface="Calibri" pitchFamily="34" charset="-122"/>
+                <a:cs typeface="Calibri" pitchFamily="34" charset="-120"/>
+              </a:rPr>
+              <a:t>Benchmark baseline</a:t>
+            </a:r>
+            <a:endParaRPr lang="en-US" sz="950" dirty="0"/>
+          </a:p>
+        </p:txBody>
+      </p:sp>
+      <p:sp>
+        <p:nvSpPr>
+          <p:cNvPr id="120" name="Rect 120"/>
+          <p:cNvSpPr/>
+          <p:nvPr/>
+        </p:nvSpPr>
+        <p:spPr>
+          <a:xfrm>
+            <a:off x="6720840" y="2514600"/>
+            <a:ext cx="1161142" cy="164592"/>
+          </a:xfrm>
+          <a:prstGeom prst="rect">
+            <a:avLst/>
+          </a:prstGeom>
+          <a:solidFill>
+            <a:srgbClr val="B8C2D1"/>
+          </a:solidFill>
+          <a:ln>
+            <a:noFill/>
+          </a:ln>
+        </p:spPr>
+        <p:txBody>
+          <a:bodyPr/>
+          <a:lstStyle/>
+          <a:p>
+            <a:endParaRPr lang="en-US"/>
+          </a:p>
+        </p:txBody>
+      </p:sp>
+      <p:sp>
+        <p:nvSpPr>
+          <p:cNvPr id="121" name="False alarms on look-alike data value 0"/>
+          <p:cNvSpPr txBox="1"/>
+          <p:nvPr/>
+        </p:nvSpPr>
+        <p:spPr>
+          <a:xfrm>
+            <a:off x="7936846" y="2487168"/>
+            <a:ext cx="548640" cy="219456"/>
+          </a:xfrm>
+          <a:prstGeom prst="rect">
+            <a:avLst/>
+          </a:prstGeom>
+          <a:noFill/>
+          <a:ln>
+            <a:noFill/>
+          </a:ln>
+        </p:spPr>
+        <p:txBody>
+          <a:bodyPr wrap="square" lIns="0" tIns="0" rIns="0" bIns="0" rtlCol="0" anchor="ctr">
+            <a:noAutofit/>
+          </a:bodyPr>
+          <a:lstStyle/>
+          <a:p>
+            <a:pPr algn="l" marL="0" indent="0">
+              <a:spcAft>
+                <a:spcPts val="0"/>
+              </a:spcAft>
+              <a:buNone/>
+            </a:pPr>
+            <a:r>
+              <a:rPr lang="en-US" sz="1000" b="1" dirty="0">
+                <a:solidFill>
+                  <a:srgbClr val="2D2D2D"/>
+                </a:solidFill>
+                <a:latin typeface="Calibri" pitchFamily="34" charset="0"/>
+                <a:ea typeface="Calibri" pitchFamily="34" charset="-122"/>
+                <a:cs typeface="Calibri" pitchFamily="34" charset="-120"/>
+              </a:rPr>
+              <a:t>22.2%</a:t>
+            </a:r>
+            <a:endParaRPr lang="en-US" sz="1000" dirty="0"/>
+          </a:p>
+        </p:txBody>
+      </p:sp>
+      <p:sp>
+        <p:nvSpPr>
+          <p:cNvPr id="122" name="False alarms on look-alike data label 1"/>
+          <p:cNvSpPr txBox="1"/>
+          <p:nvPr/>
+        </p:nvSpPr>
+        <p:spPr>
+          <a:xfrm>
+            <a:off x="5486400" y="2761488"/>
+            <a:ext cx="1234440" cy="219456"/>
+          </a:xfrm>
+          <a:prstGeom prst="rect">
+            <a:avLst/>
+          </a:prstGeom>
+          <a:noFill/>
+          <a:ln>
+            <a:noFill/>
+          </a:ln>
+        </p:spPr>
+        <p:txBody>
+          <a:bodyPr wrap="square" lIns="0" tIns="0" rIns="0" bIns="0" rtlCol="0" anchor="ctr">
+            <a:noAutofit/>
+          </a:bodyPr>
+          <a:lstStyle/>
+          <a:p>
+            <a:pPr algn="l" marL="0" indent="0">
+              <a:spcAft>
+                <a:spcPts val="0"/>
+              </a:spcAft>
+              <a:buNone/>
+            </a:pPr>
+            <a:r>
+              <a:rPr lang="en-US" sz="950" b="1" dirty="0">
+                <a:solidFill>
+                  <a:srgbClr val="2D2D2D"/>
+                </a:solidFill>
+                <a:latin typeface="Calibri" pitchFamily="34" charset="0"/>
+                <a:ea typeface="Calibri" pitchFamily="34" charset="-122"/>
+                <a:cs typeface="Calibri" pitchFamily="34" charset="-120"/>
+              </a:rPr>
+              <a:t>MaskGuard AI</a:t>
+            </a:r>
+            <a:endParaRPr lang="en-US" sz="950" dirty="0"/>
+          </a:p>
+        </p:txBody>
+      </p:sp>
+      <p:sp>
+        <p:nvSpPr>
+          <p:cNvPr id="123" name="Rect 123"/>
+          <p:cNvSpPr/>
+          <p:nvPr/>
+        </p:nvSpPr>
+        <p:spPr>
+          <a:xfrm>
+            <a:off x="6720840" y="2788920"/>
+            <a:ext cx="78456" cy="164592"/>
+          </a:xfrm>
+          <a:prstGeom prst="rect">
+            <a:avLst/>
+          </a:prstGeom>
+          <a:solidFill>
+            <a:srgbClr val="1F4788"/>
+          </a:solidFill>
+          <a:ln>
+            <a:noFill/>
+          </a:ln>
+        </p:spPr>
+        <p:txBody>
+          <a:bodyPr/>
+          <a:lstStyle/>
+          <a:p>
+            <a:endParaRPr lang="en-US"/>
+          </a:p>
+        </p:txBody>
+      </p:sp>
+      <p:sp>
+        <p:nvSpPr>
+          <p:cNvPr id="124" name="False alarms on look-alike data value 1"/>
+          <p:cNvSpPr txBox="1"/>
+          <p:nvPr/>
+        </p:nvSpPr>
+        <p:spPr>
+          <a:xfrm>
+            <a:off x="6854160" y="2761488"/>
+            <a:ext cx="548640" cy="219456"/>
+          </a:xfrm>
+          <a:prstGeom prst="rect">
+            <a:avLst/>
+          </a:prstGeom>
+          <a:noFill/>
+          <a:ln>
+            <a:noFill/>
+          </a:ln>
+        </p:spPr>
+        <p:txBody>
+          <a:bodyPr wrap="square" lIns="0" tIns="0" rIns="0" bIns="0" rtlCol="0" anchor="ctr">
+            <a:noAutofit/>
+          </a:bodyPr>
+          <a:lstStyle/>
+          <a:p>
+            <a:pPr algn="l" marL="0" indent="0">
+              <a:spcAft>
+                <a:spcPts val="0"/>
+              </a:spcAft>
+              <a:buNone/>
+            </a:pPr>
+            <a:r>
+              <a:rPr lang="en-US" sz="1000" b="1" dirty="0">
+                <a:solidFill>
+                  <a:srgbClr val="1F4788"/>
+                </a:solidFill>
+                <a:latin typeface="Calibri" pitchFamily="34" charset="0"/>
+                <a:ea typeface="Calibri" pitchFamily="34" charset="-122"/>
+                <a:cs typeface="Calibri" pitchFamily="34" charset="-120"/>
+              </a:rPr>
+              <a:t>1.5%</a:t>
+            </a:r>
+            <a:endParaRPr lang="en-US" sz="1000" dirty="0"/>
+          </a:p>
+        </p:txBody>
+      </p:sp>
+      <p:sp>
+        <p:nvSpPr>
+          <p:cNvPr id="125" name="False alarms on look-alike data note"/>
+          <p:cNvSpPr txBox="1"/>
+          <p:nvPr/>
+        </p:nvSpPr>
+        <p:spPr>
+          <a:xfrm>
+            <a:off x="5486400" y="3035808"/>
+            <a:ext cx="3108960" cy="182880"/>
+          </a:xfrm>
+          <a:prstGeom prst="rect">
+            <a:avLst/>
+          </a:prstGeom>
+          <a:noFill/>
+          <a:ln>
+            <a:noFill/>
+          </a:ln>
+        </p:spPr>
+        <p:txBody>
+          <a:bodyPr wrap="square" lIns="0" tIns="0" rIns="0" bIns="0" rtlCol="0" anchor="t">
+            <a:noAutofit/>
+          </a:bodyPr>
+          <a:lstStyle/>
+          <a:p>
+            <a:pPr algn="l" marL="0" indent="0">
+              <a:spcAft>
+                <a:spcPts val="0"/>
+              </a:spcAft>
+              <a:buNone/>
+            </a:pPr>
+            <a:r>
+              <a:rPr lang="en-US" sz="850" i="1" dirty="0">
+                <a:solidFill>
+                  <a:srgbClr val="6B7280"/>
+                </a:solidFill>
+                <a:latin typeface="Calibri" pitchFamily="34" charset="0"/>
+                <a:ea typeface="Calibri" pitchFamily="34" charset="-122"/>
+                <a:cs typeface="Calibri" pitchFamily="34" charset="-120"/>
+              </a:rPr>
+              <a:t>lower is better</a:t>
+            </a:r>
+            <a:endParaRPr lang="en-US" sz="850" dirty="0"/>
+          </a:p>
+        </p:txBody>
+      </p:sp>
+      <p:sp>
+        <p:nvSpPr>
+          <p:cNvPr id="126" name="PII leaks across 17 attacks"/>
+          <p:cNvSpPr txBox="1"/>
+          <p:nvPr/>
+        </p:nvSpPr>
+        <p:spPr>
+          <a:xfrm>
+            <a:off x="5486400" y="3364992"/>
+            <a:ext cx="3108960" cy="237744"/>
+          </a:xfrm>
+          <a:prstGeom prst="rect">
+            <a:avLst/>
+          </a:prstGeom>
+          <a:noFill/>
+          <a:ln>
+            <a:noFill/>
+          </a:ln>
+        </p:spPr>
+        <p:txBody>
+          <a:bodyPr wrap="square" lIns="0" tIns="0" rIns="0" bIns="0" rtlCol="0" anchor="t">
+            <a:noAutofit/>
+          </a:bodyPr>
+          <a:lstStyle/>
+          <a:p>
+            <a:pPr algn="l" marL="0" indent="0">
+              <a:spcAft>
+                <a:spcPts val="0"/>
+              </a:spcAft>
+              <a:buNone/>
+            </a:pPr>
+            <a:r>
+              <a:rPr lang="en-US" sz="1050" b="1" dirty="0">
+                <a:solidFill>
+                  <a:srgbClr val="1F4788"/>
+                </a:solidFill>
+                <a:latin typeface="Calibri" pitchFamily="34" charset="0"/>
+                <a:ea typeface="Calibri" pitchFamily="34" charset="-122"/>
+                <a:cs typeface="Calibri" pitchFamily="34" charset="-120"/>
+              </a:rPr>
+              <a:t>PII leaks across 17 attacks</a:t>
+            </a:r>
+            <a:endParaRPr lang="en-US" sz="1050" dirty="0"/>
+          </a:p>
+        </p:txBody>
+      </p:sp>
+      <p:sp>
+        <p:nvSpPr>
+          <p:cNvPr id="127" name="PII leaks across 17 attacks label 0"/>
+          <p:cNvSpPr txBox="1"/>
+          <p:nvPr/>
+        </p:nvSpPr>
+        <p:spPr>
+          <a:xfrm>
+            <a:off x="5486400" y="3639312"/>
+            <a:ext cx="1234440" cy="219456"/>
+          </a:xfrm>
+          <a:prstGeom prst="rect">
+            <a:avLst/>
+          </a:prstGeom>
+          <a:noFill/>
+          <a:ln>
+            <a:noFill/>
+          </a:ln>
+        </p:spPr>
+        <p:txBody>
+          <a:bodyPr wrap="square" lIns="0" tIns="0" rIns="0" bIns="0" rtlCol="0" anchor="ctr">
+            <a:noAutofit/>
+          </a:bodyPr>
+          <a:lstStyle/>
+          <a:p>
+            <a:pPr algn="l" marL="0" indent="0">
+              <a:spcAft>
+                <a:spcPts val="0"/>
+              </a:spcAft>
+              <a:buNone/>
+            </a:pPr>
+            <a:r>
+              <a:rPr lang="en-US" sz="950" dirty="0">
+                <a:solidFill>
+                  <a:srgbClr val="2D2D2D"/>
+                </a:solidFill>
+                <a:latin typeface="Calibri" pitchFamily="34" charset="0"/>
+                <a:ea typeface="Calibri" pitchFamily="34" charset="-122"/>
+                <a:cs typeface="Calibri" pitchFamily="34" charset="-120"/>
+              </a:rPr>
+              <a:t>Naive masking</a:t>
+            </a:r>
+            <a:endParaRPr lang="en-US" sz="950" dirty="0"/>
+          </a:p>
+        </p:txBody>
+      </p:sp>
+      <p:sp>
+        <p:nvSpPr>
+          <p:cNvPr id="128" name="Rect 128"/>
+          <p:cNvSpPr/>
+          <p:nvPr/>
+        </p:nvSpPr>
+        <p:spPr>
+          <a:xfrm>
+            <a:off x="6720840" y="3666744"/>
+            <a:ext cx="1153758" cy="164592"/>
+          </a:xfrm>
+          <a:prstGeom prst="rect">
+            <a:avLst/>
+          </a:prstGeom>
+          <a:solidFill>
+            <a:srgbClr val="B8C2D1"/>
+          </a:solidFill>
+          <a:ln>
+            <a:noFill/>
+          </a:ln>
+        </p:spPr>
+        <p:txBody>
+          <a:bodyPr/>
+          <a:lstStyle/>
+          <a:p>
+            <a:endParaRPr lang="en-US"/>
+          </a:p>
+        </p:txBody>
+      </p:sp>
+      <p:sp>
+        <p:nvSpPr>
+          <p:cNvPr id="129" name="PII leaks across 17 attacks value 0"/>
+          <p:cNvSpPr txBox="1"/>
+          <p:nvPr/>
+        </p:nvSpPr>
+        <p:spPr>
+          <a:xfrm>
+            <a:off x="7929462" y="3639312"/>
+            <a:ext cx="548640" cy="219456"/>
+          </a:xfrm>
+          <a:prstGeom prst="rect">
+            <a:avLst/>
+          </a:prstGeom>
+          <a:noFill/>
+          <a:ln>
+            <a:noFill/>
+          </a:ln>
+        </p:spPr>
+        <p:txBody>
+          <a:bodyPr wrap="square" lIns="0" tIns="0" rIns="0" bIns="0" rtlCol="0" anchor="ctr">
+            <a:noAutofit/>
+          </a:bodyPr>
+          <a:lstStyle/>
+          <a:p>
+            <a:pPr algn="l" marL="0" indent="0">
+              <a:spcAft>
+                <a:spcPts val="0"/>
+              </a:spcAft>
+              <a:buNone/>
+            </a:pPr>
+            <a:r>
+              <a:rPr lang="en-US" sz="1000" b="1" dirty="0">
+                <a:solidFill>
+                  <a:srgbClr val="2D2D2D"/>
+                </a:solidFill>
+                <a:latin typeface="Calibri" pitchFamily="34" charset="0"/>
+                <a:ea typeface="Calibri" pitchFamily="34" charset="-122"/>
+                <a:cs typeface="Calibri" pitchFamily="34" charset="-120"/>
+              </a:rPr>
+              <a:t>15</a:t>
+            </a:r>
+            <a:endParaRPr lang="en-US" sz="1000" dirty="0"/>
+          </a:p>
+        </p:txBody>
+      </p:sp>
+      <p:sp>
+        <p:nvSpPr>
+          <p:cNvPr id="130" name="PII leaks across 17 attacks label 1"/>
+          <p:cNvSpPr txBox="1"/>
+          <p:nvPr/>
+        </p:nvSpPr>
+        <p:spPr>
+          <a:xfrm>
+            <a:off x="5486400" y="3913632"/>
+            <a:ext cx="1234440" cy="219456"/>
+          </a:xfrm>
+          <a:prstGeom prst="rect">
+            <a:avLst/>
+          </a:prstGeom>
+          <a:noFill/>
+          <a:ln>
+            <a:noFill/>
+          </a:ln>
+        </p:spPr>
+        <p:txBody>
+          <a:bodyPr wrap="square" lIns="0" tIns="0" rIns="0" bIns="0" rtlCol="0" anchor="ctr">
+            <a:noAutofit/>
+          </a:bodyPr>
+          <a:lstStyle/>
+          <a:p>
+            <a:pPr algn="l" marL="0" indent="0">
+              <a:spcAft>
+                <a:spcPts val="0"/>
+              </a:spcAft>
+              <a:buNone/>
+            </a:pPr>
+            <a:r>
+              <a:rPr lang="en-US" sz="950" b="1" dirty="0">
+                <a:solidFill>
+                  <a:srgbClr val="2D2D2D"/>
+                </a:solidFill>
+                <a:latin typeface="Calibri" pitchFamily="34" charset="0"/>
+                <a:ea typeface="Calibri" pitchFamily="34" charset="-122"/>
+                <a:cs typeface="Calibri" pitchFamily="34" charset="-120"/>
+              </a:rPr>
+              <a:t>MaskGuard</a:t>
+            </a:r>
+            <a:endParaRPr lang="en-US" sz="950" dirty="0"/>
+          </a:p>
+        </p:txBody>
+      </p:sp>
+      <p:sp>
+        <p:nvSpPr>
+          <p:cNvPr id="131" name="Rect 131"/>
+          <p:cNvSpPr/>
+          <p:nvPr/>
+        </p:nvSpPr>
+        <p:spPr>
+          <a:xfrm>
+            <a:off x="6720840" y="3941064"/>
+            <a:ext cx="27432" cy="164592"/>
+          </a:xfrm>
+          <a:prstGeom prst="rect">
+            <a:avLst/>
+          </a:prstGeom>
+          <a:solidFill>
+            <a:srgbClr val="1F4788"/>
+          </a:solidFill>
+          <a:ln>
+            <a:noFill/>
+          </a:ln>
+        </p:spPr>
+        <p:txBody>
+          <a:bodyPr/>
+          <a:lstStyle/>
+          <a:p>
+            <a:endParaRPr lang="en-US"/>
+          </a:p>
+        </p:txBody>
+      </p:sp>
+      <p:sp>
+        <p:nvSpPr>
+          <p:cNvPr id="132" name="PII leaks across 17 attacks value 1"/>
+          <p:cNvSpPr txBox="1"/>
+          <p:nvPr/>
+        </p:nvSpPr>
+        <p:spPr>
+          <a:xfrm>
+            <a:off x="6803136" y="3913632"/>
+            <a:ext cx="548640" cy="219456"/>
+          </a:xfrm>
+          <a:prstGeom prst="rect">
+            <a:avLst/>
+          </a:prstGeom>
+          <a:noFill/>
+          <a:ln>
+            <a:noFill/>
+          </a:ln>
+        </p:spPr>
+        <p:txBody>
+          <a:bodyPr wrap="square" lIns="0" tIns="0" rIns="0" bIns="0" rtlCol="0" anchor="ctr">
+            <a:noAutofit/>
+          </a:bodyPr>
+          <a:lstStyle/>
+          <a:p>
+            <a:pPr algn="l" marL="0" indent="0">
+              <a:spcAft>
+                <a:spcPts val="0"/>
+              </a:spcAft>
+              <a:buNone/>
+            </a:pPr>
+            <a:r>
+              <a:rPr lang="en-US" sz="1000" b="1" dirty="0">
+                <a:solidFill>
+                  <a:srgbClr val="1F4788"/>
+                </a:solidFill>
+                <a:latin typeface="Calibri" pitchFamily="34" charset="0"/>
+                <a:ea typeface="Calibri" pitchFamily="34" charset="-122"/>
+                <a:cs typeface="Calibri" pitchFamily="34" charset="-120"/>
+              </a:rPr>
+              <a:t>0</a:t>
+            </a:r>
+            <a:endParaRPr lang="en-US" sz="1000" dirty="0"/>
+          </a:p>
+        </p:txBody>
+      </p:sp>
+      <p:sp>
+        <p:nvSpPr>
+          <p:cNvPr id="133" name="PII leaks across 17 attacks note"/>
+          <p:cNvSpPr txBox="1"/>
+          <p:nvPr/>
+        </p:nvSpPr>
+        <p:spPr>
+          <a:xfrm>
+            <a:off x="5486400" y="4187952"/>
+            <a:ext cx="3108960" cy="182880"/>
+          </a:xfrm>
+          <a:prstGeom prst="rect">
+            <a:avLst/>
+          </a:prstGeom>
+          <a:noFill/>
+          <a:ln>
+            <a:noFill/>
+          </a:ln>
+        </p:spPr>
+        <p:txBody>
+          <a:bodyPr wrap="square" lIns="0" tIns="0" rIns="0" bIns="0" rtlCol="0" anchor="t">
+            <a:noAutofit/>
+          </a:bodyPr>
+          <a:lstStyle/>
+          <a:p>
+            <a:pPr algn="l" marL="0" indent="0">
+              <a:spcAft>
+                <a:spcPts val="0"/>
+              </a:spcAft>
+              <a:buNone/>
+            </a:pPr>
+            <a:r>
+              <a:rPr lang="en-US" sz="850" i="1" dirty="0">
+                <a:solidFill>
+                  <a:srgbClr val="6B7280"/>
+                </a:solidFill>
+                <a:latin typeface="Calibri" pitchFamily="34" charset="0"/>
+                <a:ea typeface="Calibri" pitchFamily="34" charset="-122"/>
+                <a:cs typeface="Calibri" pitchFamily="34" charset="-120"/>
+              </a:rPr>
+              <a:t>lower is better</a:t>
+            </a:r>
+            <a:endParaRPr lang="en-US" sz="850" dirty="0"/>
+          </a:p>
+        </p:txBody>
+      </p:sp>
+      <p:sp>
+        <p:nvSpPr>
+          <p:cNvPr id="134" name="Evidence source"/>
+          <p:cNvSpPr txBox="1"/>
+          <p:nvPr/>
+        </p:nvSpPr>
+        <p:spPr>
+          <a:xfrm>
+            <a:off x="5486400" y="4462272"/>
+            <a:ext cx="3108960" cy="347472"/>
+          </a:xfrm>
+          <a:prstGeom prst="rect">
+            <a:avLst/>
+          </a:prstGeom>
+          <a:noFill/>
+          <a:ln>
+            <a:noFill/>
+          </a:ln>
+        </p:spPr>
+        <p:txBody>
+          <a:bodyPr wrap="square" lIns="0" tIns="0" rIns="0" bIns="0" rtlCol="0" anchor="t">
+            <a:noAutofit/>
+          </a:bodyPr>
+          <a:lstStyle/>
+          <a:p>
+            <a:pPr algn="l" marL="0" indent="0">
+              <a:lnSpc>
+                <a:spcPct val="95000"/>
+              </a:lnSpc>
+              <a:spcAft>
+                <a:spcPts val="0"/>
+              </a:spcAft>
+              <a:buNone/>
+            </a:pPr>
+            <a:r>
+              <a:rPr lang="en-US" sz="850" i="1" dirty="0">
+                <a:solidFill>
+                  <a:srgbClr val="6B7280"/>
+                </a:solidFill>
+                <a:latin typeface="Calibri" pitchFamily="34" charset="0"/>
+                <a:ea typeface="Calibri" pitchFamily="34" charset="-122"/>
+                <a:cs typeface="Calibri" pitchFamily="34" charset="-120"/>
+              </a:rPr>
+              <a:t>bharat-pii-bench (Apache-2.0), 2,880 unseen columns; attack suite on PostgreSQL.</a:t>
+            </a:r>
+            <a:endParaRPr lang="en-US" sz="850" dirty="0"/>
           </a:p>
         </p:txBody>
       </p:sp>
@@ -4735,7 +5804,7 @@
       </p:sp>
       <p:sp>
         <p:nvSpPr>
-          <p:cNvPr id="102" name="Leak-proof by construction"/>
+          <p:cNvPr id="102" name="AI that beats the benchmark"/>
           <p:cNvSpPr txBox="1"/>
           <p:nvPr/>
         </p:nvSpPr>
@@ -4765,7 +5834,7 @@
               <a:buNone/>
             </a:pPr>
             <a:r>
-              <a:rPr lang="en-US" sz="1400" b="1" dirty="0">
+              <a:rPr lang="en-US" sz="1350" b="1" dirty="0">
                 <a:solidFill>
                   <a:srgbClr val="1F4788"/>
                 </a:solidFill>
@@ -4773,15 +5842,15 @@
                 <a:ea typeface="Calibri" pitchFamily="34" charset="-122"/>
                 <a:cs typeface="Calibri" pitchFamily="34" charset="-120"/>
               </a:rPr>
-              <a:t>Leak-proof by construction</a:t>
-            </a:r>
-            <a:endParaRPr lang="en-US" sz="1400" dirty="0"/>
-          </a:p>
-        </p:txBody>
-      </p:sp>
-      <p:sp>
-        <p:nvSpPr>
-          <p:cNvPr id="103" name="Leak-proof by construction detail"/>
+              <a:t>AI that beats the benchmark</a:t>
+            </a:r>
+            <a:endParaRPr lang="en-US" sz="1350" dirty="0"/>
+          </a:p>
+        </p:txBody>
+      </p:sp>
+      <p:sp>
+        <p:nvSpPr>
+          <p:cNvPr id="103" name="AI that beats the benchmark detail"/>
           <p:cNvSpPr txBox="1"/>
           <p:nvPr/>
         </p:nvSpPr>
@@ -4814,7 +5883,7 @@
               <a:buNone/>
             </a:pPr>
             <a:r>
-              <a:rPr lang="en-US" sz="1150" dirty="0">
+              <a:rPr lang="en-US" sz="1100" dirty="0">
                 <a:solidFill>
                   <a:srgbClr val="2D2D2D"/>
                 </a:solidFill>
@@ -4822,9 +5891,9 @@
                 <a:ea typeface="Calibri" pitchFamily="34" charset="-122"/>
                 <a:cs typeface="Calibri" pitchFamily="34" charset="-120"/>
               </a:rPr>
-              <a:t>Masks at the table source, not the output column. Our attack suite finds 0/17 PII leaks for Support and Analyst on both backends, vs 13–15/17 for naive output masking.</a:t>
-            </a:r>
-            <a:endParaRPr lang="en-US" sz="1150" dirty="0"/>
+              <a:t>Our LightGBM + checksum scanner scores 0.999 F1 on an independent Indian-PII benchmark with misleading column names (baseline 0.844) and cuts false alarms from 22.2% to 1.5%.</a:t>
+            </a:r>
+            <a:endParaRPr lang="en-US" sz="1100" dirty="0"/>
           </a:p>
         </p:txBody>
       </p:sp>
@@ -4859,7 +5928,7 @@
       </p:sp>
       <p:sp>
         <p:nvSpPr>
-          <p:cNvPr id="105" name="India-aware auto-scanner"/>
+          <p:cNvPr id="105" name="Leak-proof by construction"/>
           <p:cNvSpPr txBox="1"/>
           <p:nvPr/>
         </p:nvSpPr>
@@ -4889,7 +5958,7 @@
               <a:buNone/>
             </a:pPr>
             <a:r>
-              <a:rPr lang="en-US" sz="1400" b="1" dirty="0">
+              <a:rPr lang="en-US" sz="1350" b="1" dirty="0">
                 <a:solidFill>
                   <a:srgbClr val="1F4788"/>
                 </a:solidFill>
@@ -4897,15 +5966,15 @@
                 <a:ea typeface="Calibri" pitchFamily="34" charset="-122"/>
                 <a:cs typeface="Calibri" pitchFamily="34" charset="-120"/>
               </a:rPr>
-              <a:t>India-aware auto-scanner</a:t>
-            </a:r>
-            <a:endParaRPr lang="en-US" sz="1400" dirty="0"/>
-          </a:p>
-        </p:txBody>
-      </p:sp>
-      <p:sp>
-        <p:nvSpPr>
-          <p:cNvPr id="106" name="India-aware auto-scanner detail"/>
+              <a:t>Leak-proof by construction</a:t>
+            </a:r>
+            <a:endParaRPr lang="en-US" sz="1350" dirty="0"/>
+          </a:p>
+        </p:txBody>
+      </p:sp>
+      <p:sp>
+        <p:nvSpPr>
+          <p:cNvPr id="106" name="Leak-proof by construction detail"/>
           <p:cNvSpPr txBox="1"/>
           <p:nvPr/>
         </p:nvSpPr>
@@ -4938,7 +6007,7 @@
               <a:buNone/>
             </a:pPr>
             <a:r>
-              <a:rPr lang="en-US" sz="1150" dirty="0">
+              <a:rPr lang="en-US" sz="1100" dirty="0">
                 <a:solidFill>
                   <a:srgbClr val="2D2D2D"/>
                 </a:solidFill>
@@ -4946,9 +6015,9 @@
                 <a:ea typeface="Calibri" pitchFamily="34" charset="-122"/>
                 <a:cs typeface="Calibri" pitchFamily="34" charset="-120"/>
               </a:rPr>
-              <a:t>Checksum validators for Aadhaar (Verhoeff), PAN, cards (Luhn) and IBAN on sampled rows find PII behind misleading headers. A background worker rescans; new tables stay blocked until tagged.</a:t>
-            </a:r>
-            <a:endParaRPr lang="en-US" sz="1150" dirty="0"/>
+              <a:t>Masks at the table source, not the output: 0 of 17 inference and bypass attacks leak, vs 15 for naive masking. The ML threat engine adds multi-query defence.</a:t>
+            </a:r>
+            <a:endParaRPr lang="en-US" sz="1100" dirty="0"/>
           </a:p>
         </p:txBody>
       </p:sp>
@@ -4983,7 +6052,7 @@
       </p:sp>
       <p:sp>
         <p:nvSpPr>
-          <p:cNvPr id="108" name="Zero-touch, any database"/>
+          <p:cNvPr id="108" name="Built for India and DPDP"/>
           <p:cNvSpPr txBox="1"/>
           <p:nvPr/>
         </p:nvSpPr>
@@ -5013,7 +6082,7 @@
               <a:buNone/>
             </a:pPr>
             <a:r>
-              <a:rPr lang="en-US" sz="1400" b="1" dirty="0">
+              <a:rPr lang="en-US" sz="1350" b="1" dirty="0">
                 <a:solidFill>
                   <a:srgbClr val="1F4788"/>
                 </a:solidFill>
@@ -5021,15 +6090,15 @@
                 <a:ea typeface="Calibri" pitchFamily="34" charset="-122"/>
                 <a:cs typeface="Calibri" pitchFamily="34" charset="-120"/>
               </a:rPr>
-              <a:t>Zero-touch, any database</a:t>
-            </a:r>
-            <a:endParaRPr lang="en-US" sz="1400" dirty="0"/>
-          </a:p>
-        </p:txBody>
-      </p:sp>
-      <p:sp>
-        <p:nvSpPr>
-          <p:cNvPr id="109" name="Zero-touch, any database detail"/>
+              <a:t>Built for India and DPDP</a:t>
+            </a:r>
+            <a:endParaRPr lang="en-US" sz="1350" dirty="0"/>
+          </a:p>
+        </p:txBody>
+      </p:sp>
+      <p:sp>
+        <p:nvSpPr>
+          <p:cNvPr id="109" name="Built for India and DPDP detail"/>
           <p:cNvSpPr txBox="1"/>
           <p:nvPr/>
         </p:nvSpPr>
@@ -5062,7 +6131,7 @@
               <a:buNone/>
             </a:pPr>
             <a:r>
-              <a:rPr lang="en-US" sz="1150" dirty="0">
+              <a:rPr lang="en-US" sz="1100" dirty="0">
                 <a:solidFill>
                   <a:srgbClr val="2D2D2D"/>
                 </a:solidFill>
@@ -5070,9 +6139,9 @@
                 <a:ea typeface="Calibri" pitchFamily="34" charset="-122"/>
                 <a:cs typeface="Calibri" pitchFamily="34" charset="-120"/>
               </a:rPr>
-              <a:t>No views, triggers or copies. SQLite and PostgreSQL behind one interface. Table checksums prove data is unchanged; a hash-chained audit log supports DPDP Rule 6.</a:t>
-            </a:r>
-            <a:endParaRPr lang="en-US" sz="1150" dirty="0"/>
+              <a:t>Aadhaar, PAN, GSTIN, UPI, IFSC, EPIC and Devanagari names; keyed tokens; one-year tamper-evident audit and an automated PIA mapped to DPDP Rule 6.</a:t>
+            </a:r>
+            <a:endParaRPr lang="en-US" sz="1100" dirty="0"/>
           </a:p>
         </p:txBody>
       </p:sp>
@@ -5120,7 +6189,7 @@
                 <a:ea typeface="Calibri" pitchFamily="34" charset="-122"/>
                 <a:cs typeface="Calibri" pitchFamily="34" charset="-120"/>
               </a:rPr>
-              <a:t>0 / 17</a:t>
+              <a:t>0.999</a:t>
             </a:r>
             <a:endParaRPr lang="en-US" sz="1800" dirty="0"/>
           </a:p>
@@ -5140,7 +6209,7 @@
                 <a:ea typeface="Calibri" pitchFamily="34" charset="-122"/>
                 <a:cs typeface="Calibri" pitchFamily="34" charset="-120"/>
               </a:rPr>
-              <a:t>PII leaks in our attack suite</a:t>
+              <a:t>F1 with misleading headers</a:t>
             </a:r>
             <a:endParaRPr lang="en-US" sz="1000" dirty="0"/>
           </a:p>
@@ -5190,7 +6259,7 @@
                 <a:ea typeface="Calibri" pitchFamily="34" charset="-122"/>
                 <a:cs typeface="Calibri" pitchFamily="34" charset="-120"/>
               </a:rPr>
-              <a:t>4 / 4</a:t>
+              <a:t>0 / 17</a:t>
             </a:r>
             <a:endParaRPr lang="en-US" sz="1800" dirty="0"/>
           </a:p>
@@ -5210,7 +6279,7 @@
                 <a:ea typeface="Calibri" pitchFamily="34" charset="-122"/>
                 <a:cs typeface="Calibri" pitchFamily="34" charset="-120"/>
               </a:rPr>
-              <a:t>unsafe statements rejected</a:t>
+              <a:t>PII leaks in attack suite</a:t>
             </a:r>
             <a:endParaRPr lang="en-US" sz="1000" dirty="0"/>
           </a:p>
@@ -5260,7 +6329,7 @@
                 <a:ea typeface="Calibri" pitchFamily="34" charset="-122"/>
                 <a:cs typeface="Calibri" pitchFamily="34" charset="-120"/>
               </a:rPr>
-              <a:t>160</a:t>
+              <a:t>1.5%</a:t>
             </a:r>
             <a:endParaRPr lang="en-US" sz="1800" dirty="0"/>
           </a:p>
@@ -5280,7 +6349,7 @@
                 <a:ea typeface="Calibri" pitchFamily="34" charset="-122"/>
                 <a:cs typeface="Calibri" pitchFamily="34" charset="-120"/>
               </a:rPr>
-              <a:t>automated tests, 2 backends</a:t>
+              <a:t>false alarms (baseline 22.2%)</a:t>
             </a:r>
             <a:endParaRPr lang="en-US" sz="1000" dirty="0"/>
           </a:p>
@@ -5350,7 +6419,7 @@
                 <a:ea typeface="Calibri" pitchFamily="34" charset="-122"/>
                 <a:cs typeface="Calibri" pitchFamily="34" charset="-120"/>
               </a:rPr>
-              <a:t>median added per query</a:t>
+              <a:t>added per query</a:t>
             </a:r>
             <a:endParaRPr lang="en-US" sz="1000" dirty="0"/>
           </a:p>
@@ -5438,7 +6507,7 @@
               <a:buChar char="•"/>
             </a:pPr>
             <a:r>
-              <a:rPr lang="en-US" sz="1150" b="1" dirty="0">
+              <a:rPr lang="en-US" sz="1100" b="1" dirty="0">
                 <a:solidFill>
                   <a:srgbClr val="2D2D2D"/>
                 </a:solidFill>
@@ -5449,7 +6518,7 @@
               <a:t>vs native dynamic masking: </a:t>
             </a:r>
             <a:r>
-              <a:rPr lang="en-US" sz="1150" dirty="0">
+              <a:rPr lang="en-US" sz="1100" dirty="0">
                 <a:solidFill>
                   <a:srgbClr val="2D2D2D"/>
                 </a:solidFill>
@@ -5457,9 +6526,9 @@
                 <a:ea typeface="Calibri" pitchFamily="34" charset="-122"/>
                 <a:cs typeface="Calibri" pitchFamily="34" charset="-120"/>
               </a:rPr>
-              <a:t>there, filters and sorting still run on real values (inference); here they only see masked values.</a:t>
-            </a:r>
-            <a:endParaRPr lang="en-US" sz="1150" dirty="0"/>
+              <a:t>filters and sorting there still run on real values; here they never see them.</a:t>
+            </a:r>
+            <a:endParaRPr lang="en-US" sz="1100" dirty="0"/>
           </a:p>
           <a:p>
             <a:pPr algn="l" marL="228600" indent="-228600">
@@ -5473,7 +6542,7 @@
               <a:buChar char="•"/>
             </a:pPr>
             <a:r>
-              <a:rPr lang="en-US" sz="1150" b="1" dirty="0">
+              <a:rPr lang="en-US" sz="1100" b="1" dirty="0">
                 <a:solidFill>
                   <a:srgbClr val="2D2D2D"/>
                 </a:solidFill>
@@ -5481,10 +6550,10 @@
                 <a:ea typeface="Calibri" pitchFamily="34" charset="-122"/>
                 <a:cs typeface="Calibri" pitchFamily="34" charset="-120"/>
               </a:rPr>
-              <a:t>vs static masked copies: </a:t>
-            </a:r>
-            <a:r>
-              <a:rPr lang="en-US" sz="1150" dirty="0">
+              <a:t>vs text PII tools (Presidio, pii-masker): </a:t>
+            </a:r>
+            <a:r>
+              <a:rPr lang="en-US" sz="1100" dirty="0">
                 <a:solidFill>
                   <a:srgbClr val="2D2D2D"/>
                 </a:solidFill>
@@ -5492,9 +6561,9 @@
                 <a:ea typeface="Calibri" pitchFamily="34" charset="-122"/>
                 <a:cs typeface="Calibri" pitchFamily="34" charset="-120"/>
               </a:rPr>
-              <a:t>no stale replicas to sync and secure; masking is applied per query, per role.</a:t>
-            </a:r>
-            <a:endParaRPr lang="en-US" sz="1150" dirty="0"/>
+              <a:t>they find PII in text but do not enforce per-role access in the database at query time.</a:t>
+            </a:r>
+            <a:endParaRPr lang="en-US" sz="1100" dirty="0"/>
           </a:p>
           <a:p>
             <a:pPr algn="l" marL="228600" indent="-228600">
@@ -5508,7 +6577,7 @@
               <a:buChar char="•"/>
             </a:pPr>
             <a:r>
-              <a:rPr lang="en-US" sz="1150" b="1" dirty="0">
+              <a:rPr lang="en-US" sz="1100" b="1" dirty="0">
                 <a:solidFill>
                   <a:srgbClr val="2D2D2D"/>
                 </a:solidFill>
@@ -5516,10 +6585,10 @@
                 <a:ea typeface="Calibri" pitchFamily="34" charset="-122"/>
                 <a:cs typeface="Calibri" pitchFamily="34" charset="-120"/>
               </a:rPr>
-              <a:t>vs database-specific extensions: </a:t>
-            </a:r>
-            <a:r>
-              <a:rPr lang="en-US" sz="1150" dirty="0">
+              <a:t>vs PostgreSQL Anonymizer: </a:t>
+            </a:r>
+            <a:r>
+              <a:rPr lang="en-US" sz="1100" dirty="0">
                 <a:solidFill>
                   <a:srgbClr val="2D2D2D"/>
                 </a:solidFill>
@@ -5527,9 +6596,9 @@
                 <a:ea typeface="Calibri" pitchFamily="34" charset="-122"/>
                 <a:cs typeface="Calibri" pitchFamily="34" charset="-120"/>
               </a:rPr>
-              <a:t>one policy across engines; adding MySQL is one new backend class.</a:t>
-            </a:r>
-            <a:endParaRPr lang="en-US" sz="1150" dirty="0"/>
+              <a:t>tied to one engine; MaskGuard applies one policy across databases and BI tools.</a:t>
+            </a:r>
+            <a:endParaRPr lang="en-US" sz="1100" dirty="0"/>
           </a:p>
           <a:p>
             <a:pPr algn="l" marL="228600" indent="-228600">
@@ -5543,7 +6612,7 @@
               <a:buChar char="•"/>
             </a:pPr>
             <a:r>
-              <a:rPr lang="en-US" sz="1150" b="1" dirty="0">
+              <a:rPr lang="en-US" sz="1100" b="1" dirty="0">
                 <a:solidFill>
                   <a:srgbClr val="2D2D2D"/>
                 </a:solidFill>
@@ -5551,10 +6620,10 @@
                 <a:ea typeface="Calibri" pitchFamily="34" charset="-122"/>
                 <a:cs typeface="Calibri" pitchFamily="34" charset="-120"/>
               </a:rPr>
-              <a:t>Measured cost: </a:t>
-            </a:r>
-            <a:r>
-              <a:rPr lang="en-US" sz="1150" dirty="0">
+              <a:t>Research gap closed: </a:t>
+            </a:r>
+            <a:r>
+              <a:rPr lang="en-US" sz="1100" dirty="0">
                 <a:solidFill>
                   <a:srgbClr val="2D2D2D"/>
                 </a:solidFill>
@@ -5562,9 +6631,9 @@
                 <a:ea typeface="Calibri" pitchFamily="34" charset="-122"/>
                 <a:cs typeface="Calibri" pitchFamily="34" charset="-120"/>
               </a:rPr>
-              <a:t>about 7.5 ms median overhead per query (parse, rewrite, mask, audit) on our test machine.</a:t>
-            </a:r>
-            <a:endParaRPr lang="en-US" sz="1150" dirty="0"/>
+              <a:t>masking's “limited protection against sophisticated attacks” (IEEE Access 2025 survey).</a:t>
+            </a:r>
+            <a:endParaRPr lang="en-US" sz="1100" dirty="0"/>
           </a:p>
         </p:txBody>
       </p:sp>
@@ -5729,8 +6798,8 @@
         </p:blipFill>
         <p:spPr>
           <a:xfrm>
-            <a:off x="457200" y="1261872"/>
-            <a:ext cx="4983480" cy="2149397"/>
+            <a:off x="457200" y="1243584"/>
+            <a:ext cx="4206240" cy="1814170"/>
           </a:xfrm>
           <a:prstGeom prst="rect">
             <a:avLst/>
@@ -5742,16 +6811,45 @@
           </a:ln>
         </p:spPr>
       </p:pic>
-      <p:sp>
-        <p:nvSpPr>
-          <p:cNvPr id="103" name="Caption"/>
+      <p:pic>
+        <p:nvPicPr>
+          <p:cNvPr id="103" name="Screenshot 103" descr="AI PII scanner: tags with source and evidence"/>
+          <p:cNvPicPr>
+            <a:picLocks noChangeAspect="1"/>
+          </p:cNvPicPr>
+          <p:nvPr/>
+        </p:nvPicPr>
+        <p:blipFill>
+          <a:blip r:embed="rIdMg2"/>
+          <a:stretch>
+            <a:fillRect/>
+          </a:stretch>
+        </p:blipFill>
+        <p:spPr>
+          <a:xfrm>
+            <a:off x="457200" y="3167482"/>
+            <a:ext cx="4206240" cy="1436277"/>
+          </a:xfrm>
+          <a:prstGeom prst="rect">
+            <a:avLst/>
+          </a:prstGeom>
+          <a:ln w="9525">
+            <a:solidFill>
+              <a:srgbClr val="C9D3E3"/>
+            </a:solidFill>
+          </a:ln>
+        </p:spPr>
+      </p:pic>
+      <p:sp>
+        <p:nvSpPr>
+          <p:cNvPr id="104" name="Caption"/>
           <p:cNvSpPr txBox="1"/>
           <p:nvPr/>
         </p:nvSpPr>
         <p:spPr>
           <a:xfrm>
-            <a:off x="457200" y="3438701"/>
-            <a:ext cx="4983480" cy="228600"/>
+            <a:off x="457200" y="4631191"/>
+            <a:ext cx="4206240" cy="201168"/>
           </a:xfrm>
           <a:prstGeom prst="rect">
             <a:avLst/>
@@ -5774,7 +6872,7 @@
               <a:buNone/>
             </a:pPr>
             <a:r>
-              <a:rPr lang="en-US" sz="950" i="1" dirty="0">
+              <a:rPr lang="en-US" sz="900" i="1" dirty="0">
                 <a:solidFill>
                   <a:srgbClr val="6B7280"/>
                 </a:solidFill>
@@ -5782,22 +6880,22 @@
                 <a:ea typeface="Calibri" pitchFamily="34" charset="-122"/>
                 <a:cs typeface="Calibri" pitchFamily="34" charset="-120"/>
               </a:rPr>
-              <a:t>Attack suite as Analyst on PostgreSQL: naive masking 15/17 leaks, MaskGuard 0/17</a:t>
-            </a:r>
-            <a:endParaRPr lang="en-US" sz="950" dirty="0"/>
-          </a:p>
-        </p:txBody>
-      </p:sp>
-      <p:sp>
-        <p:nvSpPr>
-          <p:cNvPr id="104" name="Demo steps"/>
+              <a:t>Attack suite as Analyst (top) and AI PII scanner with evidence (bottom)</a:t>
+            </a:r>
+            <a:endParaRPr lang="en-US" sz="900" dirty="0"/>
+          </a:p>
+        </p:txBody>
+      </p:sp>
+      <p:sp>
+        <p:nvSpPr>
+          <p:cNvPr id="105" name="Demo steps"/>
           <p:cNvSpPr txBox="1"/>
           <p:nvPr/>
         </p:nvSpPr>
         <p:spPr>
           <a:xfrm>
-            <a:off x="5669280" y="1216152"/>
-            <a:ext cx="3017520" cy="2514600"/>
+            <a:off x="4937760" y="1216152"/>
+            <a:ext cx="3749040" cy="2240280"/>
           </a:xfrm>
           <a:prstGeom prst="rect">
             <a:avLst/>
@@ -5852,7 +6950,7 @@
                 <a:ea typeface="Calibri" pitchFamily="34" charset="-122"/>
                 <a:cs typeface="Calibri" pitchFamily="34" charset="-120"/>
               </a:rPr>
-              <a:t>Toggle Admin / Support / Analyst; the same query side by side</a:t>
+              <a:t>Toggle Admin / Support / Analyst: one query, three views</a:t>
             </a:r>
             <a:endParaRPr lang="en-US" sz="1100" dirty="0"/>
           </a:p>
@@ -5876,7 +6974,7 @@
                 <a:ea typeface="Calibri" pitchFamily="34" charset="-122"/>
                 <a:cs typeface="Calibri" pitchFamily="34" charset="-120"/>
               </a:rPr>
-              <a:t>PII scanner tags with evidence and confidence</a:t>
+              <a:t>AI scanner tags with source, confidence and evidence</a:t>
             </a:r>
             <a:endParaRPr lang="en-US" sz="1100" dirty="0"/>
           </a:p>
@@ -5900,7 +6998,7 @@
                 <a:ea typeface="Calibri" pitchFamily="34" charset="-122"/>
                 <a:cs typeface="Calibri" pitchFamily="34" charset="-120"/>
               </a:rPr>
-              <a:t>Attack suite: naive masking vs MaskGuard</a:t>
+              <a:t>Attack suite: naive masking vs MaskGuard, live</a:t>
             </a:r>
             <a:endParaRPr lang="en-US" sz="1100" dirty="0"/>
           </a:p>
@@ -5948,7 +7046,7 @@
                 <a:ea typeface="Calibri" pitchFamily="34" charset="-122"/>
                 <a:cs typeface="Calibri" pitchFamily="34" charset="-120"/>
               </a:rPr>
-              <a:t>Audit log with verified hash chain</a:t>
+              <a:t>Audit log with a verified hash chain</a:t>
             </a:r>
             <a:endParaRPr lang="en-US" sz="1100" dirty="0"/>
           </a:p>
@@ -5980,14 +7078,14 @@
       </p:sp>
       <p:sp>
         <p:nvSpPr>
-          <p:cNvPr id="105" name="Run box"/>
+          <p:cNvPr id="106" name="Run box"/>
           <p:cNvSpPr txBox="1"/>
           <p:nvPr/>
         </p:nvSpPr>
         <p:spPr>
           <a:xfrm>
-            <a:off x="5669280" y="3310128"/>
-            <a:ext cx="3017520" cy="1060704"/>
+            <a:off x="4937760" y="3566160"/>
+            <a:ext cx="3749040" cy="1188720"/>
           </a:xfrm>
           <a:prstGeom prst="roundRect">
             <a:avLst>
@@ -6052,7 +7150,7 @@
                 <a:ea typeface="Calibri" pitchFamily="34" charset="-122"/>
                 <a:cs typeface="Calibri" pitchFamily="34" charset="-120"/>
               </a:rPr>
-              <a:t>Dashboard :8501 · API :8000/docs</a:t>
+              <a:t>Dashboard :8501 · REST API :8000/docs · CLI: maskguard</a:t>
             </a:r>
             <a:endParaRPr lang="en-US" sz="1050" dirty="0"/>
           </a:p>

--- a/docs/MaskGuard_Round1_Submission.pptx
+++ b/docs/MaskGuard_Round1_Submission.pptx
@@ -4421,7 +4421,7 @@
                 <a:ea typeface="Calibri" pitchFamily="34" charset="-122"/>
                 <a:cs typeface="Calibri" pitchFamily="34" charset="-120"/>
               </a:rPr>
-              <a:t>mask at the table source, suppress groups under 5 rows, reject unsafe SQL; the ML threat engine stops multi-query probing.</a:t>
+              <a:t>mask at the table source, suppress groups under 5 rows, reject unsafe SQL; the threat engine alerts within ~8 queries and blocks.</a:t>
             </a:r>
             <a:endParaRPr lang="en-US" sz="1050" dirty="0"/>
           </a:p>
@@ -4584,7 +4584,7 @@
                 <a:ea typeface="Calibri" pitchFamily="34" charset="-122"/>
                 <a:cs typeface="Calibri" pitchFamily="34" charset="-120"/>
               </a:rPr>
-              <a:t>keyed-HMAC tokens keep joins and counts working; differential-privacy aggregates with a per-analyst privacy budget.</a:t>
+              <a:t>keyed tokens keep joins working; differential-privacy aggregates (5.4% error at n=150) with a daily per-analyst budget.</a:t>
             </a:r>
             <a:endParaRPr lang="en-US" sz="1050" dirty="0"/>
           </a:p>
@@ -6015,7 +6015,7 @@
                 <a:ea typeface="Calibri" pitchFamily="34" charset="-122"/>
                 <a:cs typeface="Calibri" pitchFamily="34" charset="-120"/>
               </a:rPr>
-              <a:t>Masks at the table source, not the output: 0 of 17 inference and bypass attacks leak, vs 15 for naive masking. The ML threat engine adds multi-query defence.</a:t>
+              <a:t>Masks at the table source: 0 of 17 bypass and inference attacks leak (naive masking: 15). The threat engine catches 95–100% of simulated insider attacks, blocking no normal users.</a:t>
             </a:r>
             <a:endParaRPr lang="en-US" sz="1100" dirty="0"/>
           </a:p>
@@ -6329,7 +6329,7 @@
                 <a:ea typeface="Calibri" pitchFamily="34" charset="-122"/>
                 <a:cs typeface="Calibri" pitchFamily="34" charset="-120"/>
               </a:rPr>
-              <a:t>1.5%</a:t>
+              <a:t>95–100%</a:t>
             </a:r>
             <a:endParaRPr lang="en-US" sz="1800" dirty="0"/>
           </a:p>
@@ -6349,7 +6349,7 @@
                 <a:ea typeface="Calibri" pitchFamily="34" charset="-122"/>
                 <a:cs typeface="Calibri" pitchFamily="34" charset="-120"/>
               </a:rPr>
-              <a:t>false alarms (baseline 22.2%)</a:t>
+              <a:t>insider attacks caught</a:t>
             </a:r>
             <a:endParaRPr lang="en-US" sz="1000" dirty="0"/>
           </a:p>
@@ -6399,7 +6399,7 @@
                 <a:ea typeface="Calibri" pitchFamily="34" charset="-122"/>
                 <a:cs typeface="Calibri" pitchFamily="34" charset="-120"/>
               </a:rPr>
-              <a:t>~7.5 ms</a:t>
+              <a:t>5.4%</a:t>
             </a:r>
             <a:endParaRPr lang="en-US" sz="1800" dirty="0"/>
           </a:p>
@@ -6419,7 +6419,7 @@
                 <a:ea typeface="Calibri" pitchFamily="34" charset="-122"/>
                 <a:cs typeface="Calibri" pitchFamily="34" charset="-120"/>
               </a:rPr>
-              <a:t>added per query</a:t>
+              <a:t>DP error for analysts (n=150)</a:t>
             </a:r>
             <a:endParaRPr lang="en-US" sz="1000" dirty="0"/>
           </a:p>
@@ -6620,7 +6620,7 @@
                 <a:ea typeface="Calibri" pitchFamily="34" charset="-122"/>
                 <a:cs typeface="Calibri" pitchFamily="34" charset="-120"/>
               </a:rPr>
-              <a:t>Research gap closed: </a:t>
+              <a:t>Proven, not promised: </a:t>
             </a:r>
             <a:r>
               <a:rPr lang="en-US" sz="1100" dirty="0">
@@ -6631,7 +6631,7 @@
                 <a:ea typeface="Calibri" pitchFamily="34" charset="-122"/>
                 <a:cs typeface="Calibri" pitchFamily="34" charset="-120"/>
               </a:rPr>
-              <a:t>masking's “limited protection against sophisticated attacks” (IEEE Access 2025 survey).</a:t>
+              <a:t>every number reproducible from the repo; ~8 ms added per query; SQLite, PostgreSQL and MySQL.</a:t>
             </a:r>
             <a:endParaRPr lang="en-US" sz="1100" dirty="0"/>
           </a:p>
@@ -6813,7 +6813,7 @@
       </p:pic>
       <p:pic>
         <p:nvPicPr>
-          <p:cNvPr id="103" name="Screenshot 103" descr="AI PII scanner: tags with source and evidence"/>
+          <p:cNvPr id="103" name="Screenshot 103" descr="Threat monitor: simulated insider alerted at query 8, blocked at 22"/>
           <p:cNvPicPr>
             <a:picLocks noChangeAspect="1"/>
           </p:cNvPicPr>
@@ -6828,7 +6828,7 @@
         <p:spPr>
           <a:xfrm>
             <a:off x="457200" y="3167482"/>
-            <a:ext cx="4206240" cy="1436277"/>
+            <a:ext cx="4206240" cy="1319030"/>
           </a:xfrm>
           <a:prstGeom prst="rect">
             <a:avLst/>
@@ -6848,7 +6848,7 @@
         </p:nvSpPr>
         <p:spPr>
           <a:xfrm>
-            <a:off x="457200" y="4631191"/>
+            <a:off x="457200" y="4513944"/>
             <a:ext cx="4206240" cy="201168"/>
           </a:xfrm>
           <a:prstGeom prst="rect">
@@ -6880,7 +6880,7 @@
                 <a:ea typeface="Calibri" pitchFamily="34" charset="-122"/>
                 <a:cs typeface="Calibri" pitchFamily="34" charset="-120"/>
               </a:rPr>
-              <a:t>Attack suite as Analyst (top) and AI PII scanner with evidence (bottom)</a:t>
+              <a:t>Attack suite as Analyst (top); insider alerted at query 8, blocked at 22 (bottom)</a:t>
             </a:r>
             <a:endParaRPr lang="en-US" sz="900" dirty="0"/>
           </a:p>
@@ -7022,7 +7022,7 @@
                 <a:ea typeface="Calibri" pitchFamily="34" charset="-122"/>
                 <a:cs typeface="Calibri" pitchFamily="34" charset="-120"/>
               </a:rPr>
-              <a:t>Table checksums unchanged after every query</a:t>
+              <a:t>Threat monitor: a simulated insider is blocked live</a:t>
             </a:r>
             <a:endParaRPr lang="en-US" sz="1100" dirty="0"/>
           </a:p>
@@ -7046,7 +7046,7 @@
                 <a:ea typeface="Calibri" pitchFamily="34" charset="-122"/>
                 <a:cs typeface="Calibri" pitchFamily="34" charset="-120"/>
               </a:rPr>
-              <a:t>Audit log with a verified hash chain</a:t>
+              <a:t>Noisy analyst averages with a privacy budget</a:t>
             </a:r>
             <a:endParaRPr lang="en-US" sz="1100" dirty="0"/>
           </a:p>
@@ -7070,7 +7070,7 @@
                 <a:ea typeface="Calibri" pitchFamily="34" charset="-122"/>
                 <a:cs typeface="Calibri" pitchFamily="34" charset="-120"/>
               </a:rPr>
-              <a:t>p50 / p95 overhead per query</a:t>
+              <a:t>Checksums, audit chain and one-click PIA report</a:t>
             </a:r>
             <a:endParaRPr lang="en-US" sz="1100" dirty="0"/>
           </a:p>
@@ -7150,7 +7150,7 @@
                 <a:ea typeface="Calibri" pitchFamily="34" charset="-122"/>
                 <a:cs typeface="Calibri" pitchFamily="34" charset="-120"/>
               </a:rPr>
-              <a:t>Dashboard :8501 · REST API :8000/docs · CLI: maskguard</a:t>
+              <a:t>Dashboard :8501 · API :8000/docs · psql :6543</a:t>
             </a:r>
             <a:endParaRPr lang="en-US" sz="1050" dirty="0"/>
           </a:p>

--- a/docs/MaskGuard_Round1_Submission.pptx
+++ b/docs/MaskGuard_Round1_Submission.pptx
@@ -1552,7 +1552,7 @@
                 <a:ea typeface="Calibri" pitchFamily="34" charset="-122"/>
                 <a:cs typeface="Calibri" pitchFamily="34" charset="-120"/>
               </a:rPr>
-              <a:t>12 Oct 2026</a:t>
+              <a:t>13 Oct 2026</a:t>
             </a:r>
             <a:endParaRPr lang="en-US" sz="1800" dirty="0"/>
           </a:p>
@@ -2553,7 +2553,7 @@
                 <a:ea typeface="Calibri" pitchFamily="34" charset="-122"/>
                 <a:cs typeface="Calibri" pitchFamily="34" charset="-120"/>
               </a:rPr>
-              <a:t>each table is rewritten into a masked view inside the query. Admin sees all · Support 4111-XXXX-XXXX-1111 · Analyst redacted or keyed tokens.</a:t>
+              <a:t>each table is rewritten into a masked view inside the query. Admin sees all · Support 4111-XXXX-XXXX-1111 · Analyst keyed tokens · Auditor redacted; row filters per role.</a:t>
             </a:r>
             <a:endParaRPr lang="en-US" sz="1050" dirty="0"/>
           </a:p>
@@ -2647,7 +2647,7 @@
                 <a:ea typeface="Calibri" pitchFamily="34" charset="-122"/>
                 <a:cs typeface="Calibri" pitchFamily="34" charset="-120"/>
               </a:rPr>
-              <a:t>Plug-in anywhere: </a:t>
+              <a:t>One engine, every interface: </a:t>
             </a:r>
             <a:r>
               <a:rPr lang="en-US" sz="1050" dirty="0">
@@ -2658,7 +2658,7 @@
                 <a:ea typeface="Calibri" pitchFamily="34" charset="-122"/>
                 <a:cs typeface="Calibri" pitchFamily="34" charset="-120"/>
               </a:rPr>
-              <a:t>PostgreSQL wire proxy for BI tools, REST API, CLI, dashboard; tamper-evident audit and automated PIA.</a:t>
+              <a:t>Control Room dashboard, security CLI, REST API + Postman suite, PostgreSQL wire proxy; audit log, integrity proof, automated PIA.</a:t>
             </a:r>
             <a:endParaRPr lang="en-US" sz="1050" dirty="0"/>
           </a:p>
@@ -2666,7 +2666,7 @@
       </p:sp>
       <p:pic>
         <p:nvPicPr>
-          <p:cNvPr id="103" name="Screenshot 103" descr="Dashboard: the same query as Admin, Support and Analyst"/>
+          <p:cNvPr id="103" name="Screenshot 103" descr="Control Room playground: the same query as Admin, Support, Analyst and Auditor"/>
           <p:cNvPicPr>
             <a:picLocks noChangeAspect="1"/>
           </p:cNvPicPr>
@@ -2681,7 +2681,7 @@
         <p:spPr>
           <a:xfrm>
             <a:off x="4709160" y="914400"/>
-            <a:ext cx="3977640" cy="1563385"/>
+            <a:ext cx="3977640" cy="1544214"/>
           </a:xfrm>
           <a:prstGeom prst="rect">
             <a:avLst/>
@@ -2701,7 +2701,7 @@
         </p:nvSpPr>
         <p:spPr>
           <a:xfrm>
-            <a:off x="4709160" y="2505217"/>
+            <a:off x="4709160" y="2486046"/>
             <a:ext cx="3977640" cy="228600"/>
           </a:xfrm>
           <a:prstGeom prst="rect">
@@ -2733,7 +2733,7 @@
                 <a:ea typeface="Calibri" pitchFamily="34" charset="-122"/>
                 <a:cs typeface="Calibri" pitchFamily="34" charset="-120"/>
               </a:rPr>
-              <a:t>Live dashboard (PostgreSQL): one query, three roles</a:t>
+              <a:t>Control Room playground: one query, four roles, four real requests</a:t>
             </a:r>
             <a:endParaRPr lang="en-US" sz="950" dirty="0"/>
           </a:p>
@@ -2747,7 +2747,7 @@
         </p:nvSpPr>
         <p:spPr>
           <a:xfrm>
-            <a:off x="4709160" y="2825257"/>
+            <a:off x="4709160" y="2806086"/>
             <a:ext cx="3977640" cy="1417320"/>
           </a:xfrm>
           <a:prstGeom prst="roundRect">
@@ -3104,7 +3104,7 @@
                 <a:ea typeface="Calibri" pitchFamily="34" charset="-122"/>
                 <a:cs typeface="Calibri" pitchFamily="34" charset="-120"/>
               </a:rPr>
-              <a:t>SQLite, PostgreSQL and MySQL behind one interface; apps use the REST API, SDK or PostgreSQL wire proxy.</a:t>
+              <a:t>SQLite, PostgreSQL and MySQL behind one engine, used by the Control Room, CLI, REST API, SDK and PostgreSQL wire proxy.</a:t>
             </a:r>
             <a:endParaRPr lang="en-US" sz="1050" dirty="0"/>
           </a:p>
@@ -3174,7 +3174,7 @@
                 <a:ea typeface="Calibri" pitchFamily="34" charset="-122"/>
                 <a:cs typeface="Calibri" pitchFamily="34" charset="-120"/>
               </a:rPr>
-              <a:t>PBKDF2 passwords and signed JWTs; the role only ever comes from the session.</a:t>
+              <a:t>PBKDF2 passwords and signed JWTs; the role only comes from the session; capabilities gate audit, policy and integrity.</a:t>
             </a:r>
             <a:endParaRPr lang="en-US" sz="1050" dirty="0"/>
           </a:p>
@@ -3268,7 +3268,7 @@
                 <a:ea typeface="Calibri" pitchFamily="34" charset="-122"/>
                 <a:cs typeface="Calibri" pitchFamily="34" charset="-120"/>
               </a:rPr>
-              <a:t>Audit &amp; report: </a:t>
+              <a:t>Audit &amp; prove: </a:t>
             </a:r>
             <a:r>
               <a:rPr lang="en-US" sz="1050" dirty="0">
@@ -3279,7 +3279,7 @@
                 <a:ea typeface="Calibri" pitchFamily="34" charset="-122"/>
                 <a:cs typeface="Calibri" pitchFamily="34" charset="-120"/>
               </a:rPr>
-              <a:t>hash-chained log without literals; one-click PIA report mapped to DPDP Rule 6.</a:t>
+              <a:t>hash-chained log with request id and policy version; integrity proof shows source data unchanged; PIA for DPDP Rule 6.</a:t>
             </a:r>
             <a:endParaRPr lang="en-US" sz="1050" dirty="0"/>
           </a:p>
@@ -3333,7 +3333,7 @@
       </p:sp>
       <p:sp>
         <p:nvSpPr>
-          <p:cNvPr id="104" name="BI tools · API · CLI · Dashboard"/>
+          <p:cNvPr id="104" name="Control Room · CLI · API · BI tools"/>
           <p:cNvSpPr txBox="1"/>
           <p:nvPr/>
         </p:nvSpPr>
@@ -3377,7 +3377,7 @@
                 <a:ea typeface="Calibri" pitchFamily="34" charset="-122"/>
                 <a:cs typeface="Calibri" pitchFamily="34" charset="-120"/>
               </a:rPr>
-              <a:t>BI tools · API · CLI · Dashboard</a:t>
+              <a:t>Control Room · CLI · API · BI tools</a:t>
             </a:r>
             <a:endParaRPr lang="en-US" sz="1000" dirty="0"/>
           </a:p>
@@ -3400,7 +3400,7 @@
                 <a:ea typeface="Calibri" pitchFamily="34" charset="-122"/>
                 <a:cs typeface="Calibri" pitchFamily="34" charset="-120"/>
               </a:rPr>
-              <a:t>via PostgreSQL wire proxy or SDK</a:t>
+              <a:t>REST, SDK or PostgreSQL wire proxy</a:t>
             </a:r>
             <a:endParaRPr lang="en-US" sz="850" dirty="0"/>
           </a:p>
@@ -3483,7 +3483,7 @@
       </p:sp>
       <p:sp>
         <p:nvSpPr>
-          <p:cNvPr id="106" name="Audit log + PIA"/>
+          <p:cNvPr id="106" name="Audit + integrity"/>
           <p:cNvSpPr txBox="1"/>
           <p:nvPr/>
         </p:nvSpPr>
@@ -3527,7 +3527,7 @@
                 <a:ea typeface="Calibri" pitchFamily="34" charset="-122"/>
                 <a:cs typeface="Calibri" pitchFamily="34" charset="-120"/>
               </a:rPr>
-              <a:t>Audit log + PIA</a:t>
+              <a:t>Audit + integrity</a:t>
             </a:r>
             <a:endParaRPr lang="en-US" sz="1000" dirty="0"/>
           </a:p>
@@ -3550,7 +3550,7 @@
                 <a:ea typeface="Calibri" pitchFamily="34" charset="-122"/>
                 <a:cs typeface="Calibri" pitchFamily="34" charset="-120"/>
               </a:rPr>
-              <a:t>hash-chained, no literals</a:t>
+              <a:t>hash chain · digest proof</a:t>
             </a:r>
             <a:endParaRPr lang="en-US" sz="850" dirty="0"/>
           </a:p>
@@ -3631,7 +3631,7 @@
       </p:sp>
       <p:sp>
         <p:nvSpPr>
-          <p:cNvPr id="108" name="Policy as code"/>
+          <p:cNvPr id="108" name="Versioned policy"/>
           <p:cNvSpPr txBox="1"/>
           <p:nvPr/>
         </p:nvSpPr>
@@ -3675,7 +3675,7 @@
                 <a:ea typeface="Calibri" pitchFamily="34" charset="-122"/>
                 <a:cs typeface="Calibri" pitchFamily="34" charset="-120"/>
               </a:rPr>
-              <a:t>Policy as code</a:t>
+              <a:t>Versioned policy</a:t>
             </a:r>
             <a:endParaRPr lang="en-US" sz="1000" dirty="0"/>
           </a:p>
@@ -6399,7 +6399,7 @@
                 <a:ea typeface="Calibri" pitchFamily="34" charset="-122"/>
                 <a:cs typeface="Calibri" pitchFamily="34" charset="-120"/>
               </a:rPr>
-              <a:t>5.4%</a:t>
+              <a:t>412 + 119</a:t>
             </a:r>
             <a:endParaRPr lang="en-US" sz="1800" dirty="0"/>
           </a:p>
@@ -6419,7 +6419,7 @@
                 <a:ea typeface="Calibri" pitchFamily="34" charset="-122"/>
                 <a:cs typeface="Calibri" pitchFamily="34" charset="-120"/>
               </a:rPr>
-              <a:t>DP error for analysts (n=150)</a:t>
+              <a:t>tests + API checks pass, 3 DBs</a:t>
             </a:r>
             <a:endParaRPr lang="en-US" sz="1000" dirty="0"/>
           </a:p>
@@ -6631,7 +6631,7 @@
                 <a:ea typeface="Calibri" pitchFamily="34" charset="-122"/>
                 <a:cs typeface="Calibri" pitchFamily="34" charset="-120"/>
               </a:rPr>
-              <a:t>every number reproducible from the repo; ~8 ms added per query; SQLite, PostgreSQL and MySQL.</a:t>
+              <a:t>412 automated tests and 119 Postman assertions pass on SQLite, PostgreSQL and MySQL; ~8 ms added per query.</a:t>
             </a:r>
             <a:endParaRPr lang="en-US" sz="1100" dirty="0"/>
           </a:p>
@@ -6784,7 +6784,7 @@
       </p:sp>
       <p:pic>
         <p:nvPicPr>
-          <p:cNvPr id="102" name="Screenshot 102" descr="Attack suite as Analyst: naive 15/17 leaks, MaskGuard 0/17"/>
+          <p:cNvPr id="102" name="Screenshot 102" descr="maskguard CLI: branded console with live engine health checks"/>
           <p:cNvPicPr>
             <a:picLocks noChangeAspect="1"/>
           </p:cNvPicPr>
@@ -6799,7 +6799,7 @@
         <p:spPr>
           <a:xfrm>
             <a:off x="457200" y="1243584"/>
-            <a:ext cx="4206240" cy="1814170"/>
+            <a:ext cx="4206240" cy="1559387"/>
           </a:xfrm>
           <a:prstGeom prst="rect">
             <a:avLst/>
@@ -6813,7 +6813,7 @@
       </p:pic>
       <p:pic>
         <p:nvPicPr>
-          <p:cNvPr id="103" name="Screenshot 103" descr="Threat monitor: simulated insider alerted at query 8, blocked at 22"/>
+          <p:cNvPr id="103" name="Screenshot 103" descr="Integrity proof: same query as four roles, digest unchanged"/>
           <p:cNvPicPr>
             <a:picLocks noChangeAspect="1"/>
           </p:cNvPicPr>
@@ -6827,8 +6827,8 @@
         </p:blipFill>
         <p:spPr>
           <a:xfrm>
-            <a:off x="457200" y="3167482"/>
-            <a:ext cx="4206240" cy="1319030"/>
+            <a:off x="457200" y="2912699"/>
+            <a:ext cx="4206240" cy="1190791"/>
           </a:xfrm>
           <a:prstGeom prst="rect">
             <a:avLst/>
@@ -6848,7 +6848,7 @@
         </p:nvSpPr>
         <p:spPr>
           <a:xfrm>
-            <a:off x="457200" y="4513944"/>
+            <a:off x="457200" y="4130921"/>
             <a:ext cx="4206240" cy="201168"/>
           </a:xfrm>
           <a:prstGeom prst="rect">
@@ -6880,7 +6880,7 @@
                 <a:ea typeface="Calibri" pitchFamily="34" charset="-122"/>
                 <a:cs typeface="Calibri" pitchFamily="34" charset="-120"/>
               </a:rPr>
-              <a:t>Attack suite as Analyst (top); insider alerted at query 8, blocked at 22 (bottom)</a:t>
+              <a:t>CLI health checks (top) · integrity proof: digest unchanged after 4 roles (bottom)</a:t>
             </a:r>
             <a:endParaRPr lang="en-US" sz="900" dirty="0"/>
           </a:p>
@@ -6895,7 +6895,7 @@
         <p:spPr>
           <a:xfrm>
             <a:off x="4937760" y="1216152"/>
-            <a:ext cx="3749040" cy="2240280"/>
+            <a:ext cx="3749040" cy="1783080"/>
           </a:xfrm>
           <a:prstGeom prst="rect">
             <a:avLst/>
@@ -6942,7 +6942,7 @@
               <a:buAutoNum type="arabicPeriod"/>
             </a:pPr>
             <a:r>
-              <a:rPr lang="en-US" sz="1100" dirty="0">
+              <a:rPr lang="en-US" sz="1050" dirty="0">
                 <a:solidFill>
                   <a:srgbClr val="2D2D2D"/>
                 </a:solidFill>
@@ -6950,9 +6950,9 @@
                 <a:ea typeface="Calibri" pitchFamily="34" charset="-122"/>
                 <a:cs typeface="Calibri" pitchFamily="34" charset="-120"/>
               </a:rPr>
-              <a:t>Toggle Admin / Support / Analyst: one query, three views</a:t>
-            </a:r>
-            <a:endParaRPr lang="en-US" sz="1100" dirty="0"/>
+              <a:t>maskguard console: real health checks, then scan for PII</a:t>
+            </a:r>
+            <a:endParaRPr lang="en-US" sz="1050" dirty="0"/>
           </a:p>
           <a:p>
             <a:pPr algn="l" marL="228600" indent="-228600">
@@ -6966,7 +6966,7 @@
               <a:buAutoNum type="arabicPeriod"/>
             </a:pPr>
             <a:r>
-              <a:rPr lang="en-US" sz="1100" dirty="0">
+              <a:rPr lang="en-US" sz="1050" dirty="0">
                 <a:solidFill>
                   <a:srgbClr val="2D2D2D"/>
                 </a:solidFill>
@@ -6974,9 +6974,9 @@
                 <a:ea typeface="Calibri" pitchFamily="34" charset="-122"/>
                 <a:cs typeface="Calibri" pitchFamily="34" charset="-120"/>
               </a:rPr>
-              <a:t>AI scanner tags with source, confidence and evidence</a:t>
-            </a:r>
-            <a:endParaRPr lang="en-US" sz="1100" dirty="0"/>
+              <a:t>Playground: one query as Admin, Support, Analyst, Auditor</a:t>
+            </a:r>
+            <a:endParaRPr lang="en-US" sz="1050" dirty="0"/>
           </a:p>
           <a:p>
             <a:pPr algn="l" marL="228600" indent="-228600">
@@ -6990,7 +6990,7 @@
               <a:buAutoNum type="arabicPeriod"/>
             </a:pPr>
             <a:r>
-              <a:rPr lang="en-US" sz="1100" dirty="0">
+              <a:rPr lang="en-US" sz="1050" dirty="0">
                 <a:solidFill>
                   <a:srgbClr val="2D2D2D"/>
                 </a:solidFill>
@@ -6998,9 +6998,9 @@
                 <a:ea typeface="Calibri" pitchFamily="34" charset="-122"/>
                 <a:cs typeface="Calibri" pitchFamily="34" charset="-120"/>
               </a:rPr>
-              <a:t>Attack suite: naive masking vs MaskGuard, live</a:t>
-            </a:r>
-            <a:endParaRPr lang="en-US" sz="1100" dirty="0"/>
+              <a:t>Each masked field explained; risky policy edits need sign-off</a:t>
+            </a:r>
+            <a:endParaRPr lang="en-US" sz="1050" dirty="0"/>
           </a:p>
           <a:p>
             <a:pPr algn="l" marL="228600" indent="-228600">
@@ -7014,7 +7014,7 @@
               <a:buAutoNum type="arabicPeriod"/>
             </a:pPr>
             <a:r>
-              <a:rPr lang="en-US" sz="1100" dirty="0">
+              <a:rPr lang="en-US" sz="1050" dirty="0">
                 <a:solidFill>
                   <a:srgbClr val="2D2D2D"/>
                 </a:solidFill>
@@ -7022,9 +7022,9 @@
                 <a:ea typeface="Calibri" pitchFamily="34" charset="-122"/>
                 <a:cs typeface="Calibri" pitchFamily="34" charset="-120"/>
               </a:rPr>
-              <a:t>Threat monitor: a simulated insider is blocked live</a:t>
-            </a:r>
-            <a:endParaRPr lang="en-US" sz="1100" dirty="0"/>
+              <a:t>Attack suite: naive masking leaks 15/17, MaskGuard 0/17</a:t>
+            </a:r>
+            <a:endParaRPr lang="en-US" sz="1050" dirty="0"/>
           </a:p>
           <a:p>
             <a:pPr algn="l" marL="228600" indent="-228600">
@@ -7038,7 +7038,7 @@
               <a:buAutoNum type="arabicPeriod"/>
             </a:pPr>
             <a:r>
-              <a:rPr lang="en-US" sz="1100" dirty="0">
+              <a:rPr lang="en-US" sz="1050" dirty="0">
                 <a:solidFill>
                   <a:srgbClr val="2D2D2D"/>
                 </a:solidFill>
@@ -7046,9 +7046,9 @@
                 <a:ea typeface="Calibri" pitchFamily="34" charset="-122"/>
                 <a:cs typeface="Calibri" pitchFamily="34" charset="-120"/>
               </a:rPr>
-              <a:t>Noisy analyst averages with a privacy budget</a:t>
-            </a:r>
-            <a:endParaRPr lang="en-US" sz="1100" dirty="0"/>
+              <a:t>Postman: 54 requests, 25 attacks refused, 119/119 pass</a:t>
+            </a:r>
+            <a:endParaRPr lang="en-US" sz="1050" dirty="0"/>
           </a:p>
           <a:p>
             <a:pPr algn="l" marL="228600" indent="-228600">
@@ -7062,7 +7062,7 @@
               <a:buAutoNum type="arabicPeriod"/>
             </a:pPr>
             <a:r>
-              <a:rPr lang="en-US" sz="1100" dirty="0">
+              <a:rPr lang="en-US" sz="1050" dirty="0">
                 <a:solidFill>
                   <a:srgbClr val="2D2D2D"/>
                 </a:solidFill>
@@ -7070,9 +7070,9 @@
                 <a:ea typeface="Calibri" pitchFamily="34" charset="-122"/>
                 <a:cs typeface="Calibri" pitchFamily="34" charset="-120"/>
               </a:rPr>
-              <a:t>Checksums, audit chain and one-click PIA report</a:t>
-            </a:r>
-            <a:endParaRPr lang="en-US" sz="1100" dirty="0"/>
+              <a:t>Integrity proof: source records unchanged (PASS)</a:t>
+            </a:r>
+            <a:endParaRPr lang="en-US" sz="1050" dirty="0"/>
           </a:p>
         </p:txBody>
       </p:sp>
@@ -7084,8 +7084,8 @@
         </p:nvSpPr>
         <p:spPr>
           <a:xfrm>
-            <a:off x="4937760" y="3566160"/>
-            <a:ext cx="3749040" cy="1188720"/>
+            <a:off x="4937760" y="3108960"/>
+            <a:ext cx="3749040" cy="1005840"/>
           </a:xfrm>
           <a:prstGeom prst="roundRect">
             <a:avLst>
@@ -7130,7 +7130,7 @@
                 <a:latin typeface="Courier New" pitchFamily="49" charset="0"/>
                 <a:cs typeface="Courier New" pitchFamily="49" charset="0"/>
               </a:rPr>
-              <a:t>docker compose up --build</a:t>
+              <a:t>uv run maskguard</a:t>
             </a:r>
             <a:endParaRPr lang="en-US" sz="1050" dirty="0"/>
           </a:p>
@@ -7150,7 +7150,7 @@
                 <a:ea typeface="Calibri" pitchFamily="34" charset="-122"/>
                 <a:cs typeface="Calibri" pitchFamily="34" charset="-120"/>
               </a:rPr>
-              <a:t>Dashboard :8501 · API :8000/docs · psql :6543</a:t>
+              <a:t>Control Room :8000/ui · API :8000/docs · psql :6543</a:t>
             </a:r>
             <a:endParaRPr lang="en-US" sz="1050" dirty="0"/>
           </a:p>

--- a/docs/MaskGuard_Round1_Submission.pptx
+++ b/docs/MaskGuard_Round1_Submission.pptx
@@ -6399,7 +6399,7 @@
                 <a:ea typeface="Calibri" pitchFamily="34" charset="-122"/>
                 <a:cs typeface="Calibri" pitchFamily="34" charset="-120"/>
               </a:rPr>
-              <a:t>412 + 119</a:t>
+              <a:t>416 + 121</a:t>
             </a:r>
             <a:endParaRPr lang="en-US" sz="1800" dirty="0"/>
           </a:p>
@@ -6631,7 +6631,7 @@
                 <a:ea typeface="Calibri" pitchFamily="34" charset="-122"/>
                 <a:cs typeface="Calibri" pitchFamily="34" charset="-120"/>
               </a:rPr>
-              <a:t>412 automated tests and 119 Postman assertions pass on SQLite, PostgreSQL and MySQL; ~8 ms added per query.</a:t>
+              <a:t>416 automated tests and 121 Postman assertions pass on SQLite, PostgreSQL and MySQL; ~8 ms added per query.</a:t>
             </a:r>
             <a:endParaRPr lang="en-US" sz="1100" dirty="0"/>
           </a:p>
@@ -7046,7 +7046,7 @@
                 <a:ea typeface="Calibri" pitchFamily="34" charset="-122"/>
                 <a:cs typeface="Calibri" pitchFamily="34" charset="-120"/>
               </a:rPr>
-              <a:t>Postman: 54 requests, 25 attacks refused, 119/119 pass</a:t>
+              <a:t>Postman: 55 requests, 26 attacks refused, 121/121 pass</a:t>
             </a:r>
             <a:endParaRPr lang="en-US" sz="1050" dirty="0"/>
           </a:p>

--- a/docs/MaskGuard_Round1_Submission.pptx
+++ b/docs/MaskGuard_Round1_Submission.pptx
@@ -1474,7 +1474,7 @@
                 <a:ea typeface="Calibri" pitchFamily="34" charset="-122"/>
                 <a:cs typeface="Calibri" pitchFamily="34" charset="-120"/>
               </a:rPr>
-              <a:t>PS 1: Smart Data Masking (PII)</a:t>
+              <a:t>BFSI · PS 11: PII Data Masking</a:t>
             </a:r>
             <a:endParaRPr lang="en-US" sz="1800" dirty="0"/>
           </a:p>
@@ -1804,7 +1804,7 @@
                 <a:ea typeface="Calibri" pitchFamily="34" charset="-122"/>
                 <a:cs typeface="Calibri" pitchFamily="34" charset="-120"/>
               </a:rPr>
-              <a:t>Banks, NBFCs and fintechs give support, analytics and ops staff SQL access to tables full of card numbers, Aadhaar, PAN and balances, with no per-role control over what each person sees.</a:t>
+              <a:t>Banks, NBFCs and fintechs give support, analytics and ops staff SQL access to tables of card numbers, Aadhaar, PAN and balances across several databases, with no per-role control over what each person sees: a GDPR, HIPAA and DPDP compliance risk.</a:t>
             </a:r>
             <a:endParaRPr lang="en-US" sz="1150" dirty="0"/>
           </a:p>
@@ -2437,7 +2437,7 @@
         <p:spPr>
           <a:xfrm>
             <a:off x="457200" y="1216152"/>
-            <a:ext cx="4114800" cy="3630168"/>
+            <a:ext cx="4114800" cy="3017520"/>
           </a:xfrm>
           <a:prstGeom prst="rect">
             <a:avLst/>
@@ -2664,9 +2664,309 @@
           </a:p>
         </p:txBody>
       </p:sp>
+      <p:sp>
+        <p:nvSpPr>
+          <p:cNvPr id="103" name="Outcome 1"/>
+          <p:cNvSpPr txBox="1"/>
+          <p:nvPr/>
+        </p:nvSpPr>
+        <p:spPr>
+          <a:xfrm>
+            <a:off x="457200" y="4334256"/>
+            <a:ext cx="1975104" cy="512064"/>
+          </a:xfrm>
+          <a:prstGeom prst="roundRect">
+            <a:avLst>
+              <a:gd name="adj" fmla="val 8000"/>
+            </a:avLst>
+          </a:prstGeom>
+          <a:solidFill>
+            <a:srgbClr val="E8F3E0"/>
+          </a:solidFill>
+          <a:ln w="9525">
+            <a:solidFill>
+              <a:srgbClr val="B9D99F"/>
+            </a:solidFill>
+          </a:ln>
+        </p:spPr>
+        <p:txBody>
+          <a:bodyPr wrap="square" lIns="64008" tIns="64008" rIns="64008" bIns="64008" rtlCol="0" anchor="ctr">
+            <a:noAutofit/>
+          </a:bodyPr>
+          <a:lstStyle/>
+          <a:p>
+            <a:pPr algn="l" marL="0" indent="0">
+              <a:spcAft>
+                <a:spcPts val="100"/>
+              </a:spcAft>
+              <a:buNone/>
+            </a:pPr>
+            <a:r>
+              <a:rPr lang="en-US" sz="1000" b="1" dirty="0">
+                <a:solidFill>
+                  <a:srgbClr val="1F4788"/>
+                </a:solidFill>
+                <a:latin typeface="Calibri" pitchFamily="34" charset="0"/>
+                <a:ea typeface="Calibri" pitchFamily="34" charset="-122"/>
+                <a:cs typeface="Calibri" pitchFamily="34" charset="-120"/>
+              </a:rPr>
+              <a:t>✓ PII scanner</a:t>
+            </a:r>
+            <a:endParaRPr lang="en-US" sz="1000" dirty="0"/>
+          </a:p>
+          <a:p>
+            <a:pPr algn="l" marL="0" indent="0">
+              <a:lnSpc>
+                <a:spcPct val="90000"/>
+              </a:lnSpc>
+              <a:spcAft>
+                <a:spcPts val="0"/>
+              </a:spcAft>
+              <a:buNone/>
+            </a:pPr>
+            <a:r>
+              <a:rPr lang="en-US" sz="900" dirty="0">
+                <a:solidFill>
+                  <a:srgbClr val="2D2D2D"/>
+                </a:solidFill>
+                <a:latin typeface="Calibri" pitchFamily="34" charset="0"/>
+                <a:ea typeface="Calibri" pitchFamily="34" charset="-122"/>
+                <a:cs typeface="Calibri" pitchFamily="34" charset="-120"/>
+              </a:rPr>
+              <a:t>background worker tags PII_HIGH / FINANCIAL_CONFIDENTIAL</a:t>
+            </a:r>
+            <a:endParaRPr lang="en-US" sz="900" dirty="0"/>
+          </a:p>
+        </p:txBody>
+      </p:sp>
+      <p:sp>
+        <p:nvSpPr>
+          <p:cNvPr id="104" name="Outcome 2"/>
+          <p:cNvSpPr txBox="1"/>
+          <p:nvPr/>
+        </p:nvSpPr>
+        <p:spPr>
+          <a:xfrm>
+            <a:off x="2542032" y="4334256"/>
+            <a:ext cx="1975104" cy="512064"/>
+          </a:xfrm>
+          <a:prstGeom prst="roundRect">
+            <a:avLst>
+              <a:gd name="adj" fmla="val 8000"/>
+            </a:avLst>
+          </a:prstGeom>
+          <a:solidFill>
+            <a:srgbClr val="E8F3E0"/>
+          </a:solidFill>
+          <a:ln w="9525">
+            <a:solidFill>
+              <a:srgbClr val="B9D99F"/>
+            </a:solidFill>
+          </a:ln>
+        </p:spPr>
+        <p:txBody>
+          <a:bodyPr wrap="square" lIns="64008" tIns="64008" rIns="64008" bIns="64008" rtlCol="0" anchor="ctr">
+            <a:noAutofit/>
+          </a:bodyPr>
+          <a:lstStyle/>
+          <a:p>
+            <a:pPr algn="l" marL="0" indent="0">
+              <a:spcAft>
+                <a:spcPts val="100"/>
+              </a:spcAft>
+              <a:buNone/>
+            </a:pPr>
+            <a:r>
+              <a:rPr lang="en-US" sz="1000" b="1" dirty="0">
+                <a:solidFill>
+                  <a:srgbClr val="1F4788"/>
+                </a:solidFill>
+                <a:latin typeface="Calibri" pitchFamily="34" charset="0"/>
+                <a:ea typeface="Calibri" pitchFamily="34" charset="-122"/>
+                <a:cs typeface="Calibri" pitchFamily="34" charset="-120"/>
+              </a:rPr>
+              <a:t>✓ Masking engine</a:t>
+            </a:r>
+            <a:endParaRPr lang="en-US" sz="1000" dirty="0"/>
+          </a:p>
+          <a:p>
+            <a:pPr algn="l" marL="0" indent="0">
+              <a:lnSpc>
+                <a:spcPct val="90000"/>
+              </a:lnSpc>
+              <a:spcAft>
+                <a:spcPts val="0"/>
+              </a:spcAft>
+              <a:buNone/>
+            </a:pPr>
+            <a:r>
+              <a:rPr lang="en-US" sz="900" dirty="0">
+                <a:solidFill>
+                  <a:srgbClr val="2D2D2D"/>
+                </a:solidFill>
+                <a:latin typeface="Calibri" pitchFamily="34" charset="0"/>
+                <a:ea typeface="Calibri" pitchFamily="34" charset="-122"/>
+                <a:cs typeface="Calibri" pitchFamily="34" charset="-120"/>
+              </a:rPr>
+              <a:t>works on SQLite, PostgreSQL and MySQL; the brief asks for two</a:t>
+            </a:r>
+            <a:endParaRPr lang="en-US" sz="900" dirty="0"/>
+          </a:p>
+        </p:txBody>
+      </p:sp>
+      <p:sp>
+        <p:nvSpPr>
+          <p:cNvPr id="105" name="Outcome 3"/>
+          <p:cNvSpPr txBox="1"/>
+          <p:nvPr/>
+        </p:nvSpPr>
+        <p:spPr>
+          <a:xfrm>
+            <a:off x="4626864" y="4334256"/>
+            <a:ext cx="1975104" cy="512064"/>
+          </a:xfrm>
+          <a:prstGeom prst="roundRect">
+            <a:avLst>
+              <a:gd name="adj" fmla="val 8000"/>
+            </a:avLst>
+          </a:prstGeom>
+          <a:solidFill>
+            <a:srgbClr val="E8F3E0"/>
+          </a:solidFill>
+          <a:ln w="9525">
+            <a:solidFill>
+              <a:srgbClr val="B9D99F"/>
+            </a:solidFill>
+          </a:ln>
+        </p:spPr>
+        <p:txBody>
+          <a:bodyPr wrap="square" lIns="64008" tIns="64008" rIns="64008" bIns="64008" rtlCol="0" anchor="ctr">
+            <a:noAutofit/>
+          </a:bodyPr>
+          <a:lstStyle/>
+          <a:p>
+            <a:pPr algn="l" marL="0" indent="0">
+              <a:spcAft>
+                <a:spcPts val="100"/>
+              </a:spcAft>
+              <a:buNone/>
+            </a:pPr>
+            <a:r>
+              <a:rPr lang="en-US" sz="1000" b="1" dirty="0">
+                <a:solidFill>
+                  <a:srgbClr val="1F4788"/>
+                </a:solidFill>
+                <a:latin typeface="Calibri" pitchFamily="34" charset="0"/>
+                <a:ea typeface="Calibri" pitchFamily="34" charset="-122"/>
+                <a:cs typeface="Calibri" pitchFamily="34" charset="-120"/>
+              </a:rPr>
+              <a:t>✓ Demo</a:t>
+            </a:r>
+            <a:endParaRPr lang="en-US" sz="1000" dirty="0"/>
+          </a:p>
+          <a:p>
+            <a:pPr algn="l" marL="0" indent="0">
+              <a:lnSpc>
+                <a:spcPct val="90000"/>
+              </a:lnSpc>
+              <a:spcAft>
+                <a:spcPts val="0"/>
+              </a:spcAft>
+              <a:buNone/>
+            </a:pPr>
+            <a:r>
+              <a:rPr lang="en-US" sz="900" dirty="0">
+                <a:solidFill>
+                  <a:srgbClr val="2D2D2D"/>
+                </a:solidFill>
+                <a:latin typeface="Calibri" pitchFamily="34" charset="0"/>
+                <a:ea typeface="Calibri" pitchFamily="34" charset="-122"/>
+                <a:cs typeface="Calibri" pitchFamily="34" charset="-120"/>
+              </a:rPr>
+              <a:t>CLI · Postman suite · dashboard with live role toggle</a:t>
+            </a:r>
+            <a:endParaRPr lang="en-US" sz="900" dirty="0"/>
+          </a:p>
+        </p:txBody>
+      </p:sp>
+      <p:sp>
+        <p:nvSpPr>
+          <p:cNvPr id="106" name="Outcome 4"/>
+          <p:cNvSpPr txBox="1"/>
+          <p:nvPr/>
+        </p:nvSpPr>
+        <p:spPr>
+          <a:xfrm>
+            <a:off x="6711696" y="4334256"/>
+            <a:ext cx="1975104" cy="512064"/>
+          </a:xfrm>
+          <a:prstGeom prst="roundRect">
+            <a:avLst>
+              <a:gd name="adj" fmla="val 8000"/>
+            </a:avLst>
+          </a:prstGeom>
+          <a:solidFill>
+            <a:srgbClr val="E8F3E0"/>
+          </a:solidFill>
+          <a:ln w="9525">
+            <a:solidFill>
+              <a:srgbClr val="B9D99F"/>
+            </a:solidFill>
+          </a:ln>
+        </p:spPr>
+        <p:txBody>
+          <a:bodyPr wrap="square" lIns="64008" tIns="64008" rIns="64008" bIns="64008" rtlCol="0" anchor="ctr">
+            <a:noAutofit/>
+          </a:bodyPr>
+          <a:lstStyle/>
+          <a:p>
+            <a:pPr algn="l" marL="0" indent="0">
+              <a:spcAft>
+                <a:spcPts val="100"/>
+              </a:spcAft>
+              <a:buNone/>
+            </a:pPr>
+            <a:r>
+              <a:rPr lang="en-US" sz="1000" b="1" dirty="0">
+                <a:solidFill>
+                  <a:srgbClr val="1F4788"/>
+                </a:solidFill>
+                <a:latin typeface="Calibri" pitchFamily="34" charset="0"/>
+                <a:ea typeface="Calibri" pitchFamily="34" charset="-122"/>
+                <a:cs typeface="Calibri" pitchFamily="34" charset="-120"/>
+              </a:rPr>
+              <a:t>✓ Raw data intact</a:t>
+            </a:r>
+            <a:endParaRPr lang="en-US" sz="1000" dirty="0"/>
+          </a:p>
+          <a:p>
+            <a:pPr algn="l" marL="0" indent="0">
+              <a:lnSpc>
+                <a:spcPct val="90000"/>
+              </a:lnSpc>
+              <a:spcAft>
+                <a:spcPts val="0"/>
+              </a:spcAft>
+              <a:buNone/>
+            </a:pPr>
+            <a:r>
+              <a:rPr lang="en-US" sz="900" dirty="0">
+                <a:solidFill>
+                  <a:srgbClr val="2D2D2D"/>
+                </a:solidFill>
+                <a:latin typeface="Calibri" pitchFamily="34" charset="0"/>
+                <a:ea typeface="Calibri" pitchFamily="34" charset="-122"/>
+                <a:cs typeface="Calibri" pitchFamily="34" charset="-120"/>
+              </a:rPr>
+              <a:t>integrity proof: table digests unchanged</a:t>
+            </a:r>
+            <a:endParaRPr lang="en-US" sz="900" dirty="0"/>
+          </a:p>
+        </p:txBody>
+      </p:sp>
       <p:pic>
         <p:nvPicPr>
-          <p:cNvPr id="103" name="Screenshot 103" descr="Control Room playground: the same query as Admin, Support, Analyst and Auditor"/>
+          <p:cNvPr id="107" name="Screenshot 107" descr="Control Room playground: the same query as Admin, Support, Analyst and Auditor"/>
           <p:cNvPicPr>
             <a:picLocks noChangeAspect="1"/>
           </p:cNvPicPr>
@@ -2695,7 +2995,7 @@
       </p:pic>
       <p:sp>
         <p:nvSpPr>
-          <p:cNvPr id="104" name="Caption"/>
+          <p:cNvPr id="108" name="Caption"/>
           <p:cNvSpPr txBox="1"/>
           <p:nvPr/>
         </p:nvSpPr>
@@ -2741,7 +3041,7 @@
       </p:sp>
       <p:sp>
         <p:nvSpPr>
-          <p:cNvPr id="105" name="Rewrite example"/>
+          <p:cNvPr id="109" name="Rewrite example"/>
           <p:cNvSpPr txBox="1"/>
           <p:nvPr/>
         </p:nvSpPr>
@@ -3287,7 +3587,181 @@
       </p:sp>
       <p:sp>
         <p:nvSpPr>
-          <p:cNvPr id="103" name="Architecture Diagram"/>
+          <p:cNvPr id="103" name="Tech stack"/>
+          <p:cNvSpPr txBox="1"/>
+          <p:nvPr/>
+        </p:nvSpPr>
+        <p:spPr>
+          <a:xfrm>
+            <a:off x="457200" y="3794760"/>
+            <a:ext cx="4160520" cy="1024128"/>
+          </a:xfrm>
+          <a:prstGeom prst="roundRect">
+            <a:avLst>
+              <a:gd name="adj" fmla="val 8000"/>
+            </a:avLst>
+          </a:prstGeom>
+          <a:solidFill>
+            <a:srgbClr val="F5F5F5"/>
+          </a:solidFill>
+          <a:ln>
+            <a:noFill/>
+          </a:ln>
+        </p:spPr>
+        <p:txBody>
+          <a:bodyPr wrap="square" lIns="91440" tIns="91440" rIns="91440" bIns="91440" rtlCol="0" anchor="t">
+            <a:noAutofit/>
+          </a:bodyPr>
+          <a:lstStyle/>
+          <a:p>
+            <a:pPr algn="l" marL="0" indent="0">
+              <a:spcAft>
+                <a:spcPts val="200"/>
+              </a:spcAft>
+              <a:buNone/>
+            </a:pPr>
+            <a:r>
+              <a:rPr lang="en-US" sz="1050" b="1" dirty="0">
+                <a:solidFill>
+                  <a:srgbClr val="1F4788"/>
+                </a:solidFill>
+                <a:latin typeface="Calibri" pitchFamily="34" charset="0"/>
+                <a:ea typeface="Calibri" pitchFamily="34" charset="-122"/>
+                <a:cs typeface="Calibri" pitchFamily="34" charset="-120"/>
+              </a:rPr>
+              <a:t>Tech stack</a:t>
+            </a:r>
+            <a:endParaRPr lang="en-US" sz="1050" dirty="0"/>
+          </a:p>
+          <a:p>
+            <a:pPr algn="l" marL="0" indent="0">
+              <a:spcAft>
+                <a:spcPts val="100"/>
+              </a:spcAft>
+              <a:buNone/>
+            </a:pPr>
+            <a:r>
+              <a:rPr lang="en-US" sz="950" b="1" dirty="0">
+                <a:solidFill>
+                  <a:srgbClr val="2D2D2D"/>
+                </a:solidFill>
+                <a:latin typeface="Calibri" pitchFamily="34" charset="0"/>
+                <a:ea typeface="Calibri" pitchFamily="34" charset="-122"/>
+                <a:cs typeface="Calibri" pitchFamily="34" charset="-120"/>
+              </a:rPr>
+              <a:t>Backend: </a:t>
+            </a:r>
+            <a:r>
+              <a:rPr lang="en-US" sz="950" dirty="0">
+                <a:solidFill>
+                  <a:srgbClr val="2D2D2D"/>
+                </a:solidFill>
+                <a:latin typeface="Calibri" pitchFamily="34" charset="0"/>
+                <a:ea typeface="Calibri" pitchFamily="34" charset="-122"/>
+                <a:cs typeface="Calibri" pitchFamily="34" charset="-120"/>
+              </a:rPr>
+              <a:t>Python · FastAPI · sqlglot · PostgreSQL wire proxy</a:t>
+            </a:r>
+            <a:endParaRPr lang="en-US" sz="950" dirty="0"/>
+          </a:p>
+          <a:p>
+            <a:pPr algn="l" marL="0" indent="0">
+              <a:spcAft>
+                <a:spcPts val="100"/>
+              </a:spcAft>
+              <a:buNone/>
+            </a:pPr>
+            <a:r>
+              <a:rPr lang="en-US" sz="950" b="1" dirty="0">
+                <a:solidFill>
+                  <a:srgbClr val="2D2D2D"/>
+                </a:solidFill>
+                <a:latin typeface="Calibri" pitchFamily="34" charset="0"/>
+                <a:ea typeface="Calibri" pitchFamily="34" charset="-122"/>
+                <a:cs typeface="Calibri" pitchFamily="34" charset="-120"/>
+              </a:rPr>
+              <a:t>AI/ML: </a:t>
+            </a:r>
+            <a:r>
+              <a:rPr lang="en-US" sz="950" dirty="0">
+                <a:solidFill>
+                  <a:srgbClr val="2D2D2D"/>
+                </a:solidFill>
+                <a:latin typeface="Calibri" pitchFamily="34" charset="0"/>
+                <a:ea typeface="Calibri" pitchFamily="34" charset="-122"/>
+                <a:cs typeface="Calibri" pitchFamily="34" charset="-120"/>
+              </a:rPr>
+              <a:t>LightGBM · scikit-learn IsolationForest · checksums · DP</a:t>
+            </a:r>
+            <a:endParaRPr lang="en-US" sz="950" dirty="0"/>
+          </a:p>
+          <a:p>
+            <a:pPr algn="l" marL="0" indent="0">
+              <a:spcAft>
+                <a:spcPts val="100"/>
+              </a:spcAft>
+              <a:buNone/>
+            </a:pPr>
+            <a:r>
+              <a:rPr lang="en-US" sz="950" b="1" dirty="0">
+                <a:solidFill>
+                  <a:srgbClr val="2D2D2D"/>
+                </a:solidFill>
+                <a:latin typeface="Calibri" pitchFamily="34" charset="0"/>
+                <a:ea typeface="Calibri" pitchFamily="34" charset="-122"/>
+                <a:cs typeface="Calibri" pitchFamily="34" charset="-120"/>
+              </a:rPr>
+              <a:t>Data &amp; security: </a:t>
+            </a:r>
+            <a:r>
+              <a:rPr lang="en-US" sz="950" dirty="0">
+                <a:solidFill>
+                  <a:srgbClr val="2D2D2D"/>
+                </a:solidFill>
+                <a:latin typeface="Calibri" pitchFamily="34" charset="0"/>
+                <a:ea typeface="Calibri" pitchFamily="34" charset="-122"/>
+                <a:cs typeface="Calibri" pitchFamily="34" charset="-120"/>
+              </a:rPr>
+              <a:t>SQLite · PostgreSQL · MySQL · JWT · HMAC-SHA256</a:t>
+            </a:r>
+            <a:endParaRPr lang="en-US" sz="950" dirty="0"/>
+          </a:p>
+          <a:p>
+            <a:pPr algn="l" marL="0" indent="0">
+              <a:spcAft>
+                <a:spcPts val="0"/>
+              </a:spcAft>
+              <a:buNone/>
+            </a:pPr>
+            <a:r>
+              <a:rPr lang="en-US" sz="950" b="1" dirty="0">
+                <a:solidFill>
+                  <a:srgbClr val="2D2D2D"/>
+                </a:solidFill>
+                <a:latin typeface="Calibri" pitchFamily="34" charset="0"/>
+                <a:ea typeface="Calibri" pitchFamily="34" charset="-122"/>
+                <a:cs typeface="Calibri" pitchFamily="34" charset="-120"/>
+              </a:rPr>
+              <a:t>Interfaces &amp; QA: </a:t>
+            </a:r>
+            <a:r>
+              <a:rPr lang="en-US" sz="950" dirty="0">
+                <a:solidFill>
+                  <a:srgbClr val="2D2D2D"/>
+                </a:solidFill>
+                <a:latin typeface="Calibri" pitchFamily="34" charset="0"/>
+                <a:ea typeface="Calibri" pitchFamily="34" charset="-122"/>
+                <a:cs typeface="Calibri" pitchFamily="34" charset="-120"/>
+              </a:rPr>
+              <a:t>Typer/Rich CLI · web dashboard · pytest · Postman · Docker</a:t>
+            </a:r>
+            <a:endParaRPr lang="en-US" sz="950" dirty="0"/>
+          </a:p>
+        </p:txBody>
+      </p:sp>
+      <p:sp>
+        <p:nvSpPr>
+          <p:cNvPr id="104" name="Architecture Diagram"/>
           <p:cNvSpPr txBox="1"/>
           <p:nvPr/>
         </p:nvSpPr>
@@ -3333,7 +3807,7 @@
       </p:sp>
       <p:sp>
         <p:nvSpPr>
-          <p:cNvPr id="104" name="Control Room · CLI · API · BI tools"/>
+          <p:cNvPr id="105" name="Control Room · CLI · API · BI tools"/>
           <p:cNvSpPr txBox="1"/>
           <p:nvPr/>
         </p:nvSpPr>
@@ -3408,7 +3882,7 @@
       </p:sp>
       <p:sp>
         <p:nvSpPr>
-          <p:cNvPr id="105" name="Auth + threat engine"/>
+          <p:cNvPr id="106" name="Auth + threat engine"/>
           <p:cNvSpPr txBox="1"/>
           <p:nvPr/>
         </p:nvSpPr>
@@ -3483,7 +3957,7 @@
       </p:sp>
       <p:sp>
         <p:nvSpPr>
-          <p:cNvPr id="106" name="Audit + integrity"/>
+          <p:cNvPr id="107" name="Audit + integrity"/>
           <p:cNvSpPr txBox="1"/>
           <p:nvPr/>
         </p:nvSpPr>
@@ -3558,7 +4032,7 @@
       </p:sp>
       <p:sp>
         <p:nvSpPr>
-          <p:cNvPr id="107" name="Masking engine (sqlglot)"/>
+          <p:cNvPr id="108" name="Masking engine (sqlglot)"/>
           <p:cNvSpPr txBox="1"/>
           <p:nvPr/>
         </p:nvSpPr>
@@ -3631,7 +4105,7 @@
       </p:sp>
       <p:sp>
         <p:nvSpPr>
-          <p:cNvPr id="108" name="Versioned policy"/>
+          <p:cNvPr id="109" name="Versioned policy"/>
           <p:cNvSpPr txBox="1"/>
           <p:nvPr/>
         </p:nvSpPr>
@@ -3683,7 +4157,7 @@
       </p:sp>
       <p:sp>
         <p:nvSpPr>
-          <p:cNvPr id="109" name="AI PII scanner"/>
+          <p:cNvPr id="110" name="AI PII scanner"/>
           <p:cNvSpPr txBox="1"/>
           <p:nvPr/>
         </p:nvSpPr>
@@ -3758,7 +4232,7 @@
       </p:sp>
       <p:sp>
         <p:nvSpPr>
-          <p:cNvPr id="110" name="SQLite | PostgreSQL | MySQL"/>
+          <p:cNvPr id="111" name="SQLite | PostgreSQL | MySQL"/>
           <p:cNvSpPr txBox="1"/>
           <p:nvPr/>
         </p:nvSpPr>
@@ -3833,7 +4307,7 @@
       </p:sp>
       <p:cxnSp>
         <p:nvCxnSpPr>
-          <p:cNvPr id="111" name="Arrow 111"/>
+          <p:cNvPr id="112" name="Arrow 112"/>
           <p:cNvCxnSpPr/>
           <p:nvPr/>
         </p:nvCxnSpPr>
@@ -3855,7 +4329,7 @@
       </p:cxnSp>
       <p:cxnSp>
         <p:nvCxnSpPr>
-          <p:cNvPr id="112" name="Arrow 112"/>
+          <p:cNvPr id="113" name="Arrow 113"/>
           <p:cNvCxnSpPr/>
           <p:nvPr/>
         </p:nvCxnSpPr>
@@ -3877,7 +4351,7 @@
       </p:cxnSp>
       <p:cxnSp>
         <p:nvCxnSpPr>
-          <p:cNvPr id="113" name="Arrow 113"/>
+          <p:cNvPr id="114" name="Arrow 114"/>
           <p:cNvCxnSpPr/>
           <p:nvPr/>
         </p:nvCxnSpPr>
@@ -3899,7 +4373,7 @@
       </p:cxnSp>
       <p:cxnSp>
         <p:nvCxnSpPr>
-          <p:cNvPr id="114" name="Arrow 114"/>
+          <p:cNvPr id="115" name="Arrow 115"/>
           <p:cNvCxnSpPr/>
           <p:nvPr/>
         </p:nvCxnSpPr>
@@ -3921,7 +4395,7 @@
       </p:cxnSp>
       <p:cxnSp>
         <p:nvCxnSpPr>
-          <p:cNvPr id="115" name="Arrow 115"/>
+          <p:cNvPr id="116" name="Arrow 116"/>
           <p:cNvCxnSpPr/>
           <p:nvPr/>
         </p:nvCxnSpPr>
@@ -3943,7 +4417,7 @@
       </p:cxnSp>
       <p:cxnSp>
         <p:nvCxnSpPr>
-          <p:cNvPr id="116" name="Arrow 116"/>
+          <p:cNvPr id="117" name="Arrow 117"/>
           <p:cNvCxnSpPr/>
           <p:nvPr/>
         </p:nvCxnSpPr>
@@ -3965,7 +4439,7 @@
       </p:cxnSp>
       <p:cxnSp>
         <p:nvCxnSpPr>
-          <p:cNvPr id="117" name="Arrow 117"/>
+          <p:cNvPr id="118" name="Arrow 118"/>
           <p:cNvCxnSpPr/>
           <p:nvPr/>
         </p:nvCxnSpPr>
@@ -3987,7 +4461,7 @@
       </p:cxnSp>
       <p:sp>
         <p:nvSpPr>
-          <p:cNvPr id="118" name="Diagram caption"/>
+          <p:cNvPr id="119" name="Diagram caption"/>
           <p:cNvSpPr txBox="1"/>
           <p:nvPr/>
         </p:nvSpPr>
@@ -6479,8 +6953,8 @@
         </p:nvSpPr>
         <p:spPr>
           <a:xfrm>
-            <a:off x="548640" y="3794760"/>
-            <a:ext cx="8138160" cy="1051560"/>
+            <a:off x="548640" y="3767328"/>
+            <a:ext cx="8138160" cy="1143000"/>
           </a:xfrm>
           <a:prstGeom prst="rect">
             <a:avLst/>
@@ -6498,7 +6972,7 @@
           <a:p>
             <a:pPr algn="l" marL="228600" indent="-228600">
               <a:spcAft>
-                <a:spcPts val="200"/>
+                <a:spcPts val="100"/>
               </a:spcAft>
               <a:buClr>
                 <a:srgbClr val="1F4788"/>
@@ -6507,7 +6981,7 @@
               <a:buChar char="•"/>
             </a:pPr>
             <a:r>
-              <a:rPr lang="en-US" sz="1100" b="1" dirty="0">
+              <a:rPr lang="en-US" sz="1050" b="1" dirty="0">
                 <a:solidFill>
                   <a:srgbClr val="2D2D2D"/>
                 </a:solidFill>
@@ -6518,7 +6992,7 @@
               <a:t>vs native dynamic masking: </a:t>
             </a:r>
             <a:r>
-              <a:rPr lang="en-US" sz="1100" dirty="0">
+              <a:rPr lang="en-US" sz="1050" dirty="0">
                 <a:solidFill>
                   <a:srgbClr val="2D2D2D"/>
                 </a:solidFill>
@@ -6528,12 +7002,12 @@
               </a:rPr>
               <a:t>filters and sorting there still run on real values; here they never see them.</a:t>
             </a:r>
-            <a:endParaRPr lang="en-US" sz="1100" dirty="0"/>
+            <a:endParaRPr lang="en-US" sz="1050" dirty="0"/>
           </a:p>
           <a:p>
             <a:pPr algn="l" marL="228600" indent="-228600">
               <a:spcAft>
-                <a:spcPts val="200"/>
+                <a:spcPts val="100"/>
               </a:spcAft>
               <a:buClr>
                 <a:srgbClr val="1F4788"/>
@@ -6542,7 +7016,7 @@
               <a:buChar char="•"/>
             </a:pPr>
             <a:r>
-              <a:rPr lang="en-US" sz="1100" b="1" dirty="0">
+              <a:rPr lang="en-US" sz="1050" b="1" dirty="0">
                 <a:solidFill>
                   <a:srgbClr val="2D2D2D"/>
                 </a:solidFill>
@@ -6553,7 +7027,7 @@
               <a:t>vs text PII tools (Presidio, pii-masker): </a:t>
             </a:r>
             <a:r>
-              <a:rPr lang="en-US" sz="1100" dirty="0">
+              <a:rPr lang="en-US" sz="1050" dirty="0">
                 <a:solidFill>
                   <a:srgbClr val="2D2D2D"/>
                 </a:solidFill>
@@ -6563,12 +7037,12 @@
               </a:rPr>
               <a:t>they find PII in text but do not enforce per-role access in the database at query time.</a:t>
             </a:r>
-            <a:endParaRPr lang="en-US" sz="1100" dirty="0"/>
+            <a:endParaRPr lang="en-US" sz="1050" dirty="0"/>
           </a:p>
           <a:p>
             <a:pPr algn="l" marL="228600" indent="-228600">
               <a:spcAft>
-                <a:spcPts val="200"/>
+                <a:spcPts val="100"/>
               </a:spcAft>
               <a:buClr>
                 <a:srgbClr val="1F4788"/>
@@ -6577,7 +7051,7 @@
               <a:buChar char="•"/>
             </a:pPr>
             <a:r>
-              <a:rPr lang="en-US" sz="1100" b="1" dirty="0">
+              <a:rPr lang="en-US" sz="1050" b="1" dirty="0">
                 <a:solidFill>
                   <a:srgbClr val="2D2D2D"/>
                 </a:solidFill>
@@ -6588,7 +7062,7 @@
               <a:t>vs PostgreSQL Anonymizer: </a:t>
             </a:r>
             <a:r>
-              <a:rPr lang="en-US" sz="1100" dirty="0">
+              <a:rPr lang="en-US" sz="1050" dirty="0">
                 <a:solidFill>
                   <a:srgbClr val="2D2D2D"/>
                 </a:solidFill>
@@ -6598,12 +7072,12 @@
               </a:rPr>
               <a:t>tied to one engine; MaskGuard applies one policy across databases and BI tools.</a:t>
             </a:r>
-            <a:endParaRPr lang="en-US" sz="1100" dirty="0"/>
+            <a:endParaRPr lang="en-US" sz="1050" dirty="0"/>
           </a:p>
           <a:p>
             <a:pPr algn="l" marL="228600" indent="-228600">
               <a:spcAft>
-                <a:spcPts val="200"/>
+                <a:spcPts val="100"/>
               </a:spcAft>
               <a:buClr>
                 <a:srgbClr val="1F4788"/>
@@ -6612,7 +7086,7 @@
               <a:buChar char="•"/>
             </a:pPr>
             <a:r>
-              <a:rPr lang="en-US" sz="1100" b="1" dirty="0">
+              <a:rPr lang="en-US" sz="1050" b="1" dirty="0">
                 <a:solidFill>
                   <a:srgbClr val="2D2D2D"/>
                 </a:solidFill>
@@ -6623,7 +7097,7 @@
               <a:t>Proven, not promised: </a:t>
             </a:r>
             <a:r>
-              <a:rPr lang="en-US" sz="1100" dirty="0">
+              <a:rPr lang="en-US" sz="1050" dirty="0">
                 <a:solidFill>
                   <a:srgbClr val="2D2D2D"/>
                 </a:solidFill>
@@ -6633,7 +7107,42 @@
               </a:rPr>
               <a:t>416 automated tests and 121 Postman assertions pass on SQLite, PostgreSQL and MySQL; ~8 ms added per query.</a:t>
             </a:r>
-            <a:endParaRPr lang="en-US" sz="1100" dirty="0"/>
+            <a:endParaRPr lang="en-US" sz="1050" dirty="0"/>
+          </a:p>
+          <a:p>
+            <a:pPr algn="l" marL="228600" indent="-228600">
+              <a:spcAft>
+                <a:spcPts val="100"/>
+              </a:spcAft>
+              <a:buClr>
+                <a:srgbClr val="1F4788"/>
+              </a:buClr>
+              <a:buFont typeface="Arial"/>
+              <a:buChar char="•"/>
+            </a:pPr>
+            <a:r>
+              <a:rPr lang="en-US" sz="1050" b="1" dirty="0">
+                <a:solidFill>
+                  <a:srgbClr val="2D2D2D"/>
+                </a:solidFill>
+                <a:latin typeface="Calibri" pitchFamily="34" charset="0"/>
+                <a:ea typeface="Calibri" pitchFamily="34" charset="-122"/>
+                <a:cs typeface="Calibri" pitchFamily="34" charset="-120"/>
+              </a:rPr>
+              <a:t>Feasible and scalable today: </a:t>
+            </a:r>
+            <a:r>
+              <a:rPr lang="en-US" sz="1050" dirty="0">
+                <a:solidFill>
+                  <a:srgbClr val="2D2D2D"/>
+                </a:solidFill>
+                <a:latin typeface="Calibri" pitchFamily="34" charset="0"/>
+                <a:ea typeface="Calibri" pitchFamily="34" charset="-122"/>
+                <a:cs typeface="Calibri" pitchFamily="34" charset="-120"/>
+              </a:rPr>
+              <a:t>one-command Docker deploy, drop-in for existing PostgreSQL clients, stateless gateway that scales out; policy is a reviewed YAML file.</a:t>
+            </a:r>
+            <a:endParaRPr lang="en-US" sz="1050" dirty="0"/>
           </a:p>
         </p:txBody>
       </p:sp>

--- a/docs/MaskGuard_Round1_Submission.pptx
+++ b/docs/MaskGuard_Round1_Submission.pptx
@@ -1318,7 +1318,7 @@
                 <a:ea typeface="Calibri" pitchFamily="34" charset="-122"/>
                 <a:cs typeface="Calibri" pitchFamily="34" charset="-120"/>
               </a:rPr>
-              <a:t>[Enter Team Name]</a:t>
+              <a:t>Pirates of the Caribbean</a:t>
             </a:r>
             <a:endParaRPr lang="en-US" sz="1800" dirty="0"/>
           </a:p>
@@ -1396,7 +1396,7 @@
                 <a:ea typeface="Calibri" pitchFamily="34" charset="-122"/>
                 <a:cs typeface="Calibri" pitchFamily="34" charset="-120"/>
               </a:rPr>
-              <a:t>[Enter Leader Name]</a:t>
+              <a:t>G. Harshith</a:t>
             </a:r>
             <a:endParaRPr lang="en-US" sz="1800" dirty="0"/>
           </a:p>
@@ -1474,7 +1474,7 @@
                 <a:ea typeface="Calibri" pitchFamily="34" charset="-122"/>
                 <a:cs typeface="Calibri" pitchFamily="34" charset="-120"/>
               </a:rPr>
-              <a:t>BFSI · PS 11: PII Data Masking</a:t>
+              <a:t>PS 11: Smart Data Masking</a:t>
             </a:r>
             <a:endParaRPr lang="en-US" sz="1800" dirty="0"/>
           </a:p>
@@ -1612,6 +1612,63 @@
               <a:t>  ·  AI-powered PII discovery and leak-proof masking for any database</a:t>
             </a:r>
             <a:endParaRPr lang="en-US" sz="1600" dirty="0"/>
+          </a:p>
+        </p:txBody>
+      </p:sp>
+      <p:sp>
+        <p:nvSpPr>
+          <p:cNvPr id="102" name="Team members"/>
+          <p:cNvSpPr txBox="1"/>
+          <p:nvPr/>
+        </p:nvSpPr>
+        <p:spPr>
+          <a:xfrm>
+            <a:off x="1005840" y="4370832"/>
+            <a:ext cx="7315200" cy="292608"/>
+          </a:xfrm>
+          <a:prstGeom prst="rect">
+            <a:avLst/>
+          </a:prstGeom>
+          <a:noFill/>
+          <a:ln>
+            <a:noFill/>
+          </a:ln>
+        </p:spPr>
+        <p:txBody>
+          <a:bodyPr wrap="square" lIns="0" tIns="0" rIns="0" bIns="0" rtlCol="0" anchor="ctr">
+            <a:noAutofit/>
+          </a:bodyPr>
+          <a:lstStyle/>
+          <a:p>
+            <a:pPr algn="l" marL="0" indent="0">
+              <a:spcAft>
+                <a:spcPts val="0"/>
+              </a:spcAft>
+              <a:buNone/>
+            </a:pPr>
+            <a:r>
+              <a:rPr lang="en-US" sz="1250" b="1" dirty="0">
+                <a:solidFill>
+                  <a:srgbClr val="FFFFFF"/>
+                </a:solidFill>
+                <a:latin typeface="Calibri" pitchFamily="34" charset="0"/>
+                <a:ea typeface="Calibri" pitchFamily="34" charset="-122"/>
+                <a:cs typeface="Calibri" pitchFamily="34" charset="-120"/>
+              </a:rPr>
+              <a:t>Team members: </a:t>
+            </a:r>
+            <a:r>
+              <a:rPr lang="en-US" sz="1250" dirty="0">
+                <a:solidFill>
+                  <a:srgbClr val="FFFFFF"/>
+                </a:solidFill>
+                <a:latin typeface="Calibri" pitchFamily="34" charset="0"/>
+                <a:ea typeface="Calibri" pitchFamily="34" charset="-122"/>
+                <a:cs typeface="Calibri" pitchFamily="34" charset="-120"/>
+              </a:rPr>
+              <a:t>G. Harshith (Lead) · G. Praneeth · D. Mandeep · K. Surya Srinivas</a:t>
+            </a:r>
+            <a:endParaRPr lang="en-US" sz="1250" dirty="0"/>
           </a:p>
         </p:txBody>
       </p:sp>
@@ -7594,7 +7651,7 @@
         <p:spPr>
           <a:xfrm>
             <a:off x="4937760" y="3108960"/>
-            <a:ext cx="3749040" cy="1005840"/>
+            <a:ext cx="3749040" cy="1325880"/>
           </a:xfrm>
           <a:prstGeom prst="roundRect">
             <a:avLst>
@@ -7666,6 +7723,58 @@
           <a:p>
             <a:pPr algn="l" marL="0" indent="0">
               <a:spcAft>
+                <a:spcPts val="100"/>
+              </a:spcAft>
+              <a:buNone/>
+            </a:pPr>
+            <a:r>
+              <a:rPr lang="en-US" sz="1050" b="1" dirty="0">
+                <a:solidFill>
+                  <a:srgbClr val="1F4788"/>
+                </a:solidFill>
+                <a:latin typeface="Calibri" pitchFamily="34" charset="0"/>
+                <a:ea typeface="Calibri" pitchFamily="34" charset="-122"/>
+                <a:cs typeface="Calibri" pitchFamily="34" charset="-120"/>
+              </a:rPr>
+              <a:t>Demo video (3 min, CLI + dashboard): </a:t>
+            </a:r>
+            <a:r>
+              <a:rPr lang="en-US" sz="1050" u="sng" dirty="0">
+                <a:solidFill>
+                  <a:srgbClr val="0B66C3"/>
+                </a:solidFill>
+                <a:latin typeface="Calibri" pitchFamily="34" charset="0"/>
+                <a:ea typeface="Calibri" pitchFamily="34" charset="-122"/>
+                <a:cs typeface="Calibri" pitchFamily="34" charset="-120"/>
+                <a:hlinkClick r:id="rIdVid"/>
+              </a:rPr>
+              <a:t>Watch on GitHub</a:t>
+            </a:r>
+            <a:endParaRPr lang="en-US" sz="1050" dirty="0"/>
+          </a:p>
+          <a:p>
+            <a:pPr algn="l" marL="0" indent="0">
+              <a:spcAft>
+                <a:spcPts val="200"/>
+              </a:spcAft>
+              <a:buNone/>
+            </a:pPr>
+            <a:r>
+              <a:rPr lang="en-US" sz="800" dirty="0">
+                <a:solidFill>
+                  <a:srgbClr val="6B7280"/>
+                </a:solidFill>
+                <a:latin typeface="Calibri" pitchFamily="34" charset="0"/>
+                <a:ea typeface="Calibri" pitchFamily="34" charset="-122"/>
+                <a:cs typeface="Calibri" pitchFamily="34" charset="-120"/>
+              </a:rPr>
+              <a:t>https://github.com/hotaro6754/mask/blob/claude/zealous-bell-me62fn/docs/demo.mp4</a:t>
+            </a:r>
+            <a:endParaRPr lang="en-US" sz="800" dirty="0"/>
+          </a:p>
+          <a:p>
+            <a:pPr algn="l" marL="0" indent="0">
+              <a:spcAft>
                 <a:spcPts val="0"/>
               </a:spcAft>
               <a:buNone/>
@@ -7679,18 +7788,19 @@
                 <a:ea typeface="Calibri" pitchFamily="34" charset="-122"/>
                 <a:cs typeface="Calibri" pitchFamily="34" charset="-120"/>
               </a:rPr>
-              <a:t>Demo video: </a:t>
-            </a:r>
-            <a:r>
-              <a:rPr lang="en-US" sz="1050" dirty="0">
-                <a:solidFill>
-                  <a:srgbClr val="2D2D2D"/>
-                </a:solidFill>
-                <a:latin typeface="Calibri" pitchFamily="34" charset="0"/>
-                <a:ea typeface="Calibri" pitchFamily="34" charset="-122"/>
-                <a:cs typeface="Calibri" pitchFamily="34" charset="-120"/>
-              </a:rPr>
-              <a:t>docs/demo.mp4 in the repo (paste your upload link here)</a:t>
+              <a:t>Code: </a:t>
+            </a:r>
+            <a:r>
+              <a:rPr lang="en-US" sz="1050" u="sng" dirty="0">
+                <a:solidFill>
+                  <a:srgbClr val="0B66C3"/>
+                </a:solidFill>
+                <a:latin typeface="Calibri" pitchFamily="34" charset="0"/>
+                <a:ea typeface="Calibri" pitchFamily="34" charset="-122"/>
+                <a:cs typeface="Calibri" pitchFamily="34" charset="-120"/>
+                <a:hlinkClick r:id="rIdRepo"/>
+              </a:rPr>
+              <a:t>github.com/hotaro6754/mask</a:t>
             </a:r>
             <a:endParaRPr lang="en-US" sz="1050" dirty="0"/>
           </a:p>

--- a/docs/MaskGuard_Round1_Submission.pptx
+++ b/docs/MaskGuard_Round1_Submission.pptx
@@ -6199,7 +6199,7 @@
                 <a:ea typeface="Calibri" pitchFamily="34" charset="-122"/>
                 <a:cs typeface="Calibri" pitchFamily="34" charset="-120"/>
               </a:rPr>
-              <a:t>bharat-pii-bench (Apache-2.0), 2,880 unseen columns; attack suite on PostgreSQL.</a:t>
+              <a:t>bharat-pii-bench (Apache-2.0): synthetic, held-out seeds, 20 values per column (5 values: 0.965). Attacks on PostgreSQL.</a:t>
             </a:r>
             <a:endParaRPr lang="en-US" sz="850" dirty="0"/>
           </a:p>

--- a/docs/MaskGuard_Round1_Submission.pptx
+++ b/docs/MaskGuard_Round1_Submission.pptx
@@ -5422,7 +5422,7 @@
         <p:spPr>
           <a:xfrm>
             <a:off x="6720840" y="1810512"/>
-            <a:ext cx="1306284" cy="164592"/>
+            <a:ext cx="1261826" cy="164592"/>
           </a:xfrm>
           <a:prstGeom prst="rect">
             <a:avLst/>
@@ -5450,7 +5450,7 @@
         </p:nvSpPr>
         <p:spPr>
           <a:xfrm>
-            <a:off x="8081988" y="1783080"/>
+            <a:off x="8037530" y="1783080"/>
             <a:ext cx="548640" cy="219456"/>
           </a:xfrm>
           <a:prstGeom prst="rect">
@@ -5482,7 +5482,7 @@
                 <a:ea typeface="Calibri" pitchFamily="34" charset="-122"/>
                 <a:cs typeface="Calibri" pitchFamily="34" charset="-120"/>
               </a:rPr>
-              <a:t>0.999</a:t>
+              <a:t>0.965</a:t>
             </a:r>
             <a:endParaRPr lang="en-US" sz="1000" dirty="0"/>
           </a:p>
@@ -5710,7 +5710,7 @@
         <p:spPr>
           <a:xfrm>
             <a:off x="6720840" y="2788920"/>
-            <a:ext cx="78456" cy="164592"/>
+            <a:ext cx="329513" cy="164592"/>
           </a:xfrm>
           <a:prstGeom prst="rect">
             <a:avLst/>
@@ -5738,7 +5738,7 @@
         </p:nvSpPr>
         <p:spPr>
           <a:xfrm>
-            <a:off x="6854160" y="2761488"/>
+            <a:off x="7105217" y="2761488"/>
             <a:ext cx="548640" cy="219456"/>
           </a:xfrm>
           <a:prstGeom prst="rect">
@@ -5770,7 +5770,7 @@
                 <a:ea typeface="Calibri" pitchFamily="34" charset="-122"/>
                 <a:cs typeface="Calibri" pitchFamily="34" charset="-120"/>
               </a:rPr>
-              <a:t>1.5%</a:t>
+              <a:t>6.3%</a:t>
             </a:r>
             <a:endParaRPr lang="en-US" sz="1000" dirty="0"/>
           </a:p>
@@ -6199,7 +6199,7 @@
                 <a:ea typeface="Calibri" pitchFamily="34" charset="-122"/>
                 <a:cs typeface="Calibri" pitchFamily="34" charset="-120"/>
               </a:rPr>
-              <a:t>bharat-pii-bench (Apache-2.0): synthetic, held-out seeds, 20 values per column (5 values: 0.965). Attacks on PostgreSQL.</a:t>
+              <a:t>bharat-pii-bench (Apache-2.0): synthetic, held-out seeds, only 5 values per column (with 20 values: 0.999 and 1.5%). Attacks on PostgreSQL.</a:t>
             </a:r>
             <a:endParaRPr lang="en-US" sz="850" dirty="0"/>
           </a:p>
@@ -6422,7 +6422,7 @@
                 <a:ea typeface="Calibri" pitchFamily="34" charset="-122"/>
                 <a:cs typeface="Calibri" pitchFamily="34" charset="-120"/>
               </a:rPr>
-              <a:t>Our LightGBM + checksum scanner scores 0.999 F1 on an independent Indian-PII benchmark with misleading column names (baseline 0.844) and cuts false alarms from 22.2% to 1.5%.</a:t>
+              <a:t>Our LightGBM + checksum scanner scores 0.965 F1 on an independent Indian-PII benchmark with misleading column names from just 5 sample values (baseline 0.844), and cuts false alarms from 22.2% to 6.3%.</a:t>
             </a:r>
             <a:endParaRPr lang="en-US" sz="1100" dirty="0"/>
           </a:p>
@@ -6720,7 +6720,7 @@
                 <a:ea typeface="Calibri" pitchFamily="34" charset="-122"/>
                 <a:cs typeface="Calibri" pitchFamily="34" charset="-120"/>
               </a:rPr>
-              <a:t>0.999</a:t>
+              <a:t>0.965</a:t>
             </a:r>
             <a:endParaRPr lang="en-US" sz="1800" dirty="0"/>
           </a:p>

--- a/docs/MaskGuard_Round1_Submission.pptx
+++ b/docs/MaskGuard_Round1_Submission.pptx
@@ -2158,7 +2158,7 @@
                 <a:ea typeface="Calibri" pitchFamily="34" charset="-122"/>
                 <a:cs typeface="Calibri" pitchFamily="34" charset="-120"/>
               </a:rPr>
-              <a:t>max DPDP penalty for weak security safeguards; Rule 6 names masking and 1-year access logs (from 13 May 2027)</a:t>
+              <a:t>max DPDP penalty for weak security safeguards; Rule 6 names masking and 1-year access logs (in force from May 2027)</a:t>
             </a:r>
             <a:endParaRPr lang="en-US" sz="1050" dirty="0"/>
           </a:p>
@@ -2231,7 +2231,7 @@
                 <a:ea typeface="Calibri" pitchFamily="34" charset="-122"/>
                 <a:cs typeface="Calibri" pitchFamily="34" charset="-120"/>
               </a:rPr>
-              <a:t>global data-masking market in 2025, growing about 12–18% a year (analyst estimates)</a:t>
+              <a:t>global data-masking market in 2025, growing about 12–17% a year (analyst estimates)</a:t>
             </a:r>
             <a:endParaRPr lang="en-US" sz="1050" dirty="0"/>
           </a:p>

--- a/docs/MaskGuard_Round1_Submission.pptx
+++ b/docs/MaskGuard_Round1_Submission.pptx
@@ -1609,7 +1609,7 @@
                 <a:ea typeface="Calibri" pitchFamily="34" charset="-122"/>
                 <a:cs typeface="Calibri" pitchFamily="34" charset="-120"/>
               </a:rPr>
-              <a:t>  ·  AI-powered PII discovery and leak-proof masking for any database</a:t>
+              <a:t>  ·  AI-powered PII discovery and query-time masking for any database</a:t>
             </a:r>
             <a:endParaRPr lang="en-US" sz="1600" dirty="0"/>
           </a:p>
@@ -2599,7 +2599,7 @@
                 <a:ea typeface="Calibri" pitchFamily="34" charset="-122"/>
                 <a:cs typeface="Calibri" pitchFamily="34" charset="-120"/>
               </a:rPr>
-              <a:t>Leak-proof masking: </a:t>
+              <a:t>Masking at the source: </a:t>
             </a:r>
             <a:r>
               <a:rPr lang="en-US" sz="1050" dirty="0">
@@ -2669,7 +2669,7 @@
                 <a:ea typeface="Calibri" pitchFamily="34" charset="-122"/>
                 <a:cs typeface="Calibri" pitchFamily="34" charset="-120"/>
               </a:rPr>
-              <a:t>Privacy-safe analytics: </a:t>
+              <a:t>Analytics without raw PII: </a:t>
             </a:r>
             <a:r>
               <a:rPr lang="en-US" sz="1050" dirty="0">
@@ -2680,7 +2680,7 @@
                 <a:ea typeface="Calibri" pitchFamily="34" charset="-122"/>
                 <a:cs typeface="Calibri" pitchFamily="34" charset="-120"/>
               </a:rPr>
-              <a:t>differential-privacy aggregates with a per-analyst budget; free-text PII redacted in place.</a:t>
+              <a:t>keyed tokens keep joins working; free-text PII redacted in place.</a:t>
             </a:r>
             <a:endParaRPr lang="en-US" sz="1050" dirty="0"/>
           </a:p>
@@ -3601,7 +3601,7 @@
                 <a:ea typeface="Calibri" pitchFamily="34" charset="-122"/>
                 <a:cs typeface="Calibri" pitchFamily="34" charset="-120"/>
               </a:rPr>
-              <a:t>sqlglot swaps every table for a masked view, adds DP noise to analyst aggregates, rejects unsafe SQL, runs read-only.</a:t>
+              <a:t>sqlglot swaps every table for a masked view, applies row filters, rejects unsafe SQL, runs read-only.</a:t>
             </a:r>
             <a:endParaRPr lang="en-US" sz="1050" dirty="0"/>
           </a:p>
@@ -3748,7 +3748,7 @@
                 <a:ea typeface="Calibri" pitchFamily="34" charset="-122"/>
                 <a:cs typeface="Calibri" pitchFamily="34" charset="-120"/>
               </a:rPr>
-              <a:t>LightGBM · scikit-learn IsolationForest · checksums · DP</a:t>
+              <a:t>LightGBM · scikit-learn IsolationForest · checksums</a:t>
             </a:r>
             <a:endParaRPr lang="en-US" sz="950" dirty="0"/>
           </a:p>
@@ -4154,7 +4154,7 @@
                 <a:ea typeface="Calibri" pitchFamily="34" charset="-122"/>
                 <a:cs typeface="Calibri" pitchFamily="34" charset="-120"/>
               </a:rPr>
-              <a:t>masked views · DP aggregates · firewall · row caps</a:t>
+              <a:t>masked views · row filters · firewall · row caps</a:t>
             </a:r>
             <a:endParaRPr lang="en-US" sz="850" dirty="0"/>
           </a:p>
@@ -5115,7 +5115,7 @@
                 <a:ea typeface="Calibri" pitchFamily="34" charset="-122"/>
                 <a:cs typeface="Calibri" pitchFamily="34" charset="-120"/>
               </a:rPr>
-              <a:t>keyed tokens keep joins working; differential-privacy aggregates (5.4% error at n=150) with a daily per-analyst budget.</a:t>
+              <a:t>keyed tokens keep joins working; noisy aggregates are experimental and disabled in production until an independent privacy review.</a:t>
             </a:r>
             <a:endParaRPr lang="en-US" sz="1050" dirty="0"/>
           </a:p>
@@ -6459,7 +6459,7 @@
       </p:sp>
       <p:sp>
         <p:nvSpPr>
-          <p:cNvPr id="105" name="Leak-proof by construction"/>
+          <p:cNvPr id="105" name="Masked at the source"/>
           <p:cNvSpPr txBox="1"/>
           <p:nvPr/>
         </p:nvSpPr>
@@ -6497,7 +6497,7 @@
                 <a:ea typeface="Calibri" pitchFamily="34" charset="-122"/>
                 <a:cs typeface="Calibri" pitchFamily="34" charset="-120"/>
               </a:rPr>
-              <a:t>Leak-proof by construction</a:t>
+              <a:t>Masked at the source</a:t>
             </a:r>
             <a:endParaRPr lang="en-US" sz="1350" dirty="0"/>
           </a:p>
@@ -6505,7 +6505,7 @@
       </p:sp>
       <p:sp>
         <p:nvSpPr>
-          <p:cNvPr id="106" name="Leak-proof by construction detail"/>
+          <p:cNvPr id="106" name="Masked at the source detail"/>
           <p:cNvSpPr txBox="1"/>
           <p:nvPr/>
         </p:nvSpPr>
@@ -6930,7 +6930,7 @@
                 <a:ea typeface="Calibri" pitchFamily="34" charset="-122"/>
                 <a:cs typeface="Calibri" pitchFamily="34" charset="-120"/>
               </a:rPr>
-              <a:t>416 + 121</a:t>
+              <a:t>474 + 121</a:t>
             </a:r>
             <a:endParaRPr lang="en-US" sz="1800" dirty="0"/>
           </a:p>
@@ -7162,7 +7162,7 @@
                 <a:ea typeface="Calibri" pitchFamily="34" charset="-122"/>
                 <a:cs typeface="Calibri" pitchFamily="34" charset="-120"/>
               </a:rPr>
-              <a:t>416 automated tests and 121 Postman assertions pass on SQLite, PostgreSQL and MySQL; ~8 ms added per query.</a:t>
+              <a:t>474 automated tests and 121 Postman assertions pass on SQLite, PostgreSQL and MySQL; ~8 ms added per query.</a:t>
             </a:r>
             <a:endParaRPr lang="en-US" sz="1050" dirty="0"/>
           </a:p>
@@ -7186,7 +7186,7 @@
                 <a:ea typeface="Calibri" pitchFamily="34" charset="-122"/>
                 <a:cs typeface="Calibri" pitchFamily="34" charset="-120"/>
               </a:rPr>
-              <a:t>Feasible and scalable today: </a:t>
+              <a:t>Feasible today: </a:t>
             </a:r>
             <a:r>
               <a:rPr lang="en-US" sz="1050" dirty="0">
@@ -7197,7 +7197,7 @@
                 <a:ea typeface="Calibri" pitchFamily="34" charset="-122"/>
                 <a:cs typeface="Calibri" pitchFamily="34" charset="-120"/>
               </a:rPr>
-              <a:t>one-command Docker deploy, drop-in for existing PostgreSQL clients, stateless gateway that scales out; policy is a reviewed YAML file.</a:t>
+              <a:t>one-command Docker demo, a production profile that refuses unsafe settings (read-only DB account, TLS), drop-in for PostgreSQL clients; policy is a reviewed YAML file.</a:t>
             </a:r>
             <a:endParaRPr lang="en-US" sz="1050" dirty="0"/>
           </a:p>
@@ -7516,7 +7516,7 @@
                 <a:ea typeface="Calibri" pitchFamily="34" charset="-122"/>
                 <a:cs typeface="Calibri" pitchFamily="34" charset="-120"/>
               </a:rPr>
-              <a:t>maskguard console: real health checks, then scan for PII</a:t>
+              <a:t>CLI: health checks, PII scan, one query as four roles</a:t>
             </a:r>
             <a:endParaRPr lang="en-US" sz="1050" dirty="0"/>
           </a:p>
@@ -7540,7 +7540,7 @@
                 <a:ea typeface="Calibri" pitchFamily="34" charset="-122"/>
                 <a:cs typeface="Calibri" pitchFamily="34" charset="-120"/>
               </a:rPr>
-              <a:t>Playground: one query as Admin, Support, Analyst, Auditor</a:t>
+              <a:t>Attack suite (SQLite): naive 14/17 leaks, MaskGuard 0/17</a:t>
             </a:r>
             <a:endParaRPr lang="en-US" sz="1050" dirty="0"/>
           </a:p>
@@ -7564,7 +7564,7 @@
                 <a:ea typeface="Calibri" pitchFamily="34" charset="-122"/>
                 <a:cs typeface="Calibri" pitchFamily="34" charset="-120"/>
               </a:rPr>
-              <a:t>Each masked field explained; risky policy edits need sign-off</a:t>
+              <a:t>Insider attack blocked live; source data proven unchanged</a:t>
             </a:r>
             <a:endParaRPr lang="en-US" sz="1050" dirty="0"/>
           </a:p>
@@ -7588,7 +7588,7 @@
                 <a:ea typeface="Calibri" pitchFamily="34" charset="-122"/>
                 <a:cs typeface="Calibri" pitchFamily="34" charset="-120"/>
               </a:rPr>
-              <a:t>Attack suite: naive masking leaks 15/17, MaskGuard 0/17</a:t>
+              <a:t>Control Room: playground, discovery, policy, audit, API</a:t>
             </a:r>
             <a:endParaRPr lang="en-US" sz="1050" dirty="0"/>
           </a:p>
@@ -7612,7 +7612,7 @@
                 <a:ea typeface="Calibri" pitchFamily="34" charset="-122"/>
                 <a:cs typeface="Calibri" pitchFamily="34" charset="-120"/>
               </a:rPr>
-              <a:t>Postman: 55 requests, 26 attacks refused, 121/121 pass</a:t>
+              <a:t>Production on PostgreSQL: unsafe setup refused, D11, 403s</a:t>
             </a:r>
             <a:endParaRPr lang="en-US" sz="1050" dirty="0"/>
           </a:p>
@@ -7636,7 +7636,7 @@
                 <a:ea typeface="Calibri" pitchFamily="34" charset="-122"/>
                 <a:cs typeface="Calibri" pitchFamily="34" charset="-120"/>
               </a:rPr>
-              <a:t>Integrity proof: source records unchanged (PASS)</a:t>
+              <a:t>Privacy review: DP gaps as tests, protocol frozen for review</a:t>
             </a:r>
             <a:endParaRPr lang="en-US" sz="1050" dirty="0"/>
           </a:p>
@@ -7736,7 +7736,7 @@
                 <a:ea typeface="Calibri" pitchFamily="34" charset="-122"/>
                 <a:cs typeface="Calibri" pitchFamily="34" charset="-120"/>
               </a:rPr>
-              <a:t>Demo video (3 min, CLI + dashboard): </a:t>
+              <a:t>Demo video (8 min, captioned): </a:t>
             </a:r>
             <a:r>
               <a:rPr lang="en-US" sz="1050" u="sng" dirty="0">
@@ -7768,7 +7768,7 @@
                 <a:ea typeface="Calibri" pitchFamily="34" charset="-122"/>
                 <a:cs typeface="Calibri" pitchFamily="34" charset="-120"/>
               </a:rPr>
-              <a:t>https://github.com/hotaro6754/mask/blob/claude/zealous-bell-me62fn/docs/demo.mp4</a:t>
+              <a:t>https://github.com/hotaro6754/mask/blob/claude/zealous-bell-me62fn/docs/demo_full.mp4</a:t>
             </a:r>
             <a:endParaRPr lang="en-US" sz="800" dirty="0"/>
           </a:p>
